--- a/docs/组会_TonyPi多模态阶段汇报.pptx
+++ b/docs/组会_TonyPi多模态阶段汇报.pptx
@@ -3191,8 +3191,8 @@
         </p:nvSpPr>
         <p:spPr>
           <a:xfrm>
-            <a:off x="640080" y="1417320"/>
-            <a:ext cx="9144000" cy="365760"/>
+            <a:off x="640080" y="1234440"/>
+            <a:ext cx="10058400" cy="320040"/>
           </a:xfrm>
           <a:prstGeom prst="rect">
             <a:avLst/>
@@ -3226,21 +3226,21 @@
         </p:nvSpPr>
         <p:spPr>
           <a:xfrm>
-            <a:off x="640080" y="1874519"/>
-            <a:ext cx="10058400" cy="640080"/>
-          </a:xfrm>
-          <a:prstGeom prst="rect">
-            <a:avLst/>
-          </a:prstGeom>
-          <a:noFill/>
-        </p:spPr>
-        <p:txBody>
-          <a:bodyPr wrap="square"/>
-          <a:lstStyle/>
-          <a:p>
-            <a:pPr algn="l"/>
-            <a:r>
-              <a:rPr sz="4000" b="1">
+            <a:off x="640080" y="1691640"/>
+            <a:ext cx="10972800" cy="777240"/>
+          </a:xfrm>
+          <a:prstGeom prst="rect">
+            <a:avLst/>
+          </a:prstGeom>
+          <a:noFill/>
+        </p:spPr>
+        <p:txBody>
+          <a:bodyPr wrap="square"/>
+          <a:lstStyle/>
+          <a:p>
+            <a:pPr algn="l"/>
+            <a:r>
+              <a:rPr sz="3200" b="1">
                 <a:solidFill>
                   <a:srgbClr val="FFFFFF"/>
                 </a:solidFill>
@@ -3248,7 +3248,7 @@
                 <a:ea typeface="WenQuanYi Micro Hei"/>
                 <a:cs typeface="WenQuanYi Micro Hei"/>
               </a:rPr>
-              <a:t>TonyPi 多模态情绪动作</a:t>
+              <a:t>多模态情绪输入 → 端侧判断 → MoMask 生成</a:t>
             </a:r>
           </a:p>
         </p:txBody>
@@ -3283,7 +3283,7 @@
                 <a:ea typeface="WenQuanYi Micro Hei"/>
                 <a:cs typeface="WenQuanYi Micro Hei"/>
               </a:rPr>
-              <a:t>人脸识别  ·  778 条动作短语  ·  WonderPi 入口  ·  真机延迟记录</a:t>
+              <a:t>这是要做成的路径。当前工作只汇报已经落在这条路径上的部分。</a:t>
             </a:r>
           </a:p>
         </p:txBody>
@@ -3296,8 +3296,8 @@
         </p:nvSpPr>
         <p:spPr>
           <a:xfrm>
-            <a:off x="640080" y="3383280"/>
-            <a:ext cx="9144000" cy="822960"/>
+            <a:off x="640080" y="3246120"/>
+            <a:ext cx="10058400" cy="822960"/>
           </a:xfrm>
           <a:prstGeom prst="rect">
             <a:avLst/>
@@ -3318,8 +3318,8 @@
                 <a:ea typeface="WenQuanYi Micro Hei"/>
                 <a:cs typeface="WenQuanYi Micro Hei"/>
               </a:rPr>
-              <a:t>本阶段：先让机器人按表情做一组不重复的社交动作，并记下每一步耗时。
-语音唤醒和端侧大模型尚未在真机上跑通。</a:t>
+              <a:t>778 条预设短语是判断结果的临时动作出口，用来在 MoMask 还不能驱动舵机时看到身体反应。
+它不是这条路径的终点。</a:t>
             </a:r>
           </a:p>
         </p:txBody>
@@ -3495,7 +3495,7 @@
                 <a:ea typeface="WenQuanYi Micro Hei"/>
                 <a:cs typeface="WenQuanYi Micro Hei"/>
               </a:rPr>
-              <a:t>本阶段目标与已完成</a:t>
+              <a:t>标准路径上，三步现在各在哪里</a:t>
             </a:r>
           </a:p>
         </p:txBody>
@@ -3530,7 +3530,7 @@
                 <a:ea typeface="WenQuanYi Micro Hei"/>
                 <a:cs typeface="WenQuanYi Micro Hei"/>
               </a:rPr>
-              <a:t>目标是真机上能看见表情对应的动作，而不是先接 MoMask 关节。</a:t>
+              <a:t>只把真机已经发生的事放进「已通」。</a:t>
             </a:r>
           </a:p>
         </p:txBody>
@@ -3543,8 +3543,8 @@
         </p:nvSpPr>
         <p:spPr>
           <a:xfrm>
-            <a:off x="457200" y="1280160"/>
-            <a:ext cx="11247120" cy="1078992"/>
+            <a:off x="365760" y="1325880"/>
+            <a:ext cx="3749039" cy="4892040"/>
           </a:xfrm>
           <a:prstGeom prst="roundRect">
             <a:avLst/>
@@ -3589,14 +3589,14 @@
         </p:nvSpPr>
         <p:spPr>
           <a:xfrm>
-            <a:off x="457200" y="1280160"/>
-            <a:ext cx="91440" cy="1078992"/>
+            <a:off x="365760" y="1325880"/>
+            <a:ext cx="3749039" cy="109728"/>
           </a:xfrm>
           <a:prstGeom prst="rect">
             <a:avLst/>
           </a:prstGeom>
           <a:solidFill>
-            <a:srgbClr val="C45C26"/>
+            <a:srgbClr val="2F6F4E"/>
           </a:solidFill>
           <a:ln>
             <a:noFill/>
@@ -3633,21 +3633,21 @@
         </p:nvSpPr>
         <p:spPr>
           <a:xfrm>
-            <a:off x="777240" y="1408176"/>
-            <a:ext cx="2011680" cy="329184"/>
-          </a:xfrm>
-          <a:prstGeom prst="rect">
-            <a:avLst/>
-          </a:prstGeom>
-          <a:noFill/>
-        </p:spPr>
-        <p:txBody>
-          <a:bodyPr wrap="square"/>
-          <a:lstStyle/>
-          <a:p>
-            <a:pPr algn="l"/>
-            <a:r>
-              <a:rPr sz="1600" b="1">
+            <a:off x="566928" y="1554480"/>
+            <a:ext cx="3383280" cy="640080"/>
+          </a:xfrm>
+          <a:prstGeom prst="rect">
+            <a:avLst/>
+          </a:prstGeom>
+          <a:noFill/>
+        </p:spPr>
+        <p:txBody>
+          <a:bodyPr wrap="square"/>
+          <a:lstStyle/>
+          <a:p>
+            <a:pPr algn="l"/>
+            <a:r>
+              <a:rPr sz="1800" b="1">
                 <a:solidFill>
                   <a:srgbClr val="1B3A4B"/>
                 </a:solidFill>
@@ -3655,7 +3655,7 @@
                 <a:ea typeface="WenQuanYi Micro Hei"/>
                 <a:cs typeface="WenQuanYi Micro Hei"/>
               </a:rPr>
-              <a:t>目标</a:t>
+              <a:t>1  多模态输入</a:t>
             </a:r>
           </a:p>
         </p:txBody>
@@ -3668,21 +3668,56 @@
         </p:nvSpPr>
         <p:spPr>
           <a:xfrm>
-            <a:off x="2834640" y="1444752"/>
-            <a:ext cx="8503920" cy="768096"/>
-          </a:xfrm>
-          <a:prstGeom prst="rect">
-            <a:avLst/>
-          </a:prstGeom>
-          <a:noFill/>
-        </p:spPr>
-        <p:txBody>
-          <a:bodyPr wrap="square"/>
-          <a:lstStyle/>
-          <a:p>
-            <a:pPr algn="l"/>
-            <a:r>
-              <a:rPr sz="1600" b="0">
+            <a:off x="566928" y="2286000"/>
+            <a:ext cx="3383280" cy="365760"/>
+          </a:xfrm>
+          <a:prstGeom prst="rect">
+            <a:avLst/>
+          </a:prstGeom>
+          <a:noFill/>
+        </p:spPr>
+        <p:txBody>
+          <a:bodyPr wrap="square"/>
+          <a:lstStyle/>
+          <a:p>
+            <a:pPr algn="l"/>
+            <a:r>
+              <a:rPr sz="1500" b="1">
+                <a:solidFill>
+                  <a:srgbClr val="2F6F4E"/>
+                </a:solidFill>
+                <a:latin typeface="WenQuanYi Micro Hei"/>
+                <a:ea typeface="WenQuanYi Micro Hei"/>
+                <a:cs typeface="WenQuanYi Micro Hei"/>
+              </a:rPr>
+              <a:t>脸：已通</a:t>
+            </a:r>
+          </a:p>
+        </p:txBody>
+      </p:sp>
+      <p:sp>
+        <p:nvSpPr>
+          <p:cNvPr id="10" name="TextBox 9"/>
+          <p:cNvSpPr txBox="1"/>
+          <p:nvPr/>
+        </p:nvSpPr>
+        <p:spPr>
+          <a:xfrm>
+            <a:off x="566928" y="2697480"/>
+            <a:ext cx="3383280" cy="1051560"/>
+          </a:xfrm>
+          <a:prstGeom prst="rect">
+            <a:avLst/>
+          </a:prstGeom>
+          <a:noFill/>
+        </p:spPr>
+        <p:txBody>
+          <a:bodyPr wrap="square"/>
+          <a:lstStyle/>
+          <a:p>
+            <a:pPr algn="l"/>
+            <a:r>
+              <a:rPr sz="1400" b="0">
                 <a:solidFill>
                   <a:srgbClr val="1C2430"/>
                 </a:solidFill>
@@ -3690,21 +3725,91 @@
                 <a:ea typeface="WenQuanYi Micro Hei"/>
                 <a:cs typeface="WenQuanYi Micro Hei"/>
               </a:rPr>
-              <a:t>摄像头看脸，语音听唤醒。按情绪从 778 条短语里选一组 2–3 个动作。连续几组不要看起来一样。每次把耗时写进表。</a:t>
-            </a:r>
-          </a:p>
-        </p:txBody>
-      </p:sp>
-      <p:sp>
-        <p:nvSpPr>
-          <p:cNvPr id="10" name="Rounded Rectangle 9"/>
+              <a:t>板上 FaceExpression。17 轮里出现高兴、中性、不高兴、惊讶。约 0.02 秒。</a:t>
+            </a:r>
+          </a:p>
+        </p:txBody>
+      </p:sp>
+      <p:sp>
+        <p:nvSpPr>
+          <p:cNvPr id="11" name="TextBox 10"/>
+          <p:cNvSpPr txBox="1"/>
+          <p:nvPr/>
+        </p:nvSpPr>
+        <p:spPr>
+          <a:xfrm>
+            <a:off x="566928" y="3840480"/>
+            <a:ext cx="3383280" cy="411480"/>
+          </a:xfrm>
+          <a:prstGeom prst="rect">
+            <a:avLst/>
+          </a:prstGeom>
+          <a:noFill/>
+        </p:spPr>
+        <p:txBody>
+          <a:bodyPr wrap="square"/>
+          <a:lstStyle/>
+          <a:p>
+            <a:pPr algn="l"/>
+            <a:r>
+              <a:rPr sz="1500" b="1">
+                <a:solidFill>
+                  <a:srgbClr val="A33B2B"/>
+                </a:solidFill>
+                <a:latin typeface="WenQuanYi Micro Hei"/>
+                <a:ea typeface="WenQuanYi Micro Hei"/>
+                <a:cs typeface="WenQuanYi Micro Hei"/>
+              </a:rPr>
+              <a:t>语音：未通</a:t>
+            </a:r>
+          </a:p>
+        </p:txBody>
+      </p:sp>
+      <p:sp>
+        <p:nvSpPr>
+          <p:cNvPr id="12" name="TextBox 11"/>
+          <p:cNvSpPr txBox="1"/>
+          <p:nvPr/>
+        </p:nvSpPr>
+        <p:spPr>
+          <a:xfrm>
+            <a:off x="566928" y="4297680"/>
+            <a:ext cx="3383280" cy="1188720"/>
+          </a:xfrm>
+          <a:prstGeom prst="rect">
+            <a:avLst/>
+          </a:prstGeom>
+          <a:noFill/>
+        </p:spPr>
+        <p:txBody>
+          <a:bodyPr wrap="square"/>
+          <a:lstStyle/>
+          <a:p>
+            <a:pPr algn="l"/>
+            <a:r>
+              <a:rPr sz="1400" b="0">
+                <a:solidFill>
+                  <a:srgbClr val="1C2430"/>
+                </a:solidFill>
+                <a:latin typeface="WenQuanYi Micro Hei"/>
+                <a:ea typeface="WenQuanYi Micro Hei"/>
+                <a:cs typeface="WenQuanYi Micro Hei"/>
+              </a:rPr>
+              <a:t>唤醒、录音、识别全是 0。没有 wakeup 这一行。</a:t>
+            </a:r>
+          </a:p>
+        </p:txBody>
+      </p:sp>
+      <p:sp>
+        <p:nvSpPr>
+          <p:cNvPr id="13" name="Rounded Rectangle 12"/>
           <p:cNvSpPr/>
           <p:nvPr/>
         </p:nvSpPr>
         <p:spPr>
           <a:xfrm>
-            <a:off x="457200" y="2468880"/>
-            <a:ext cx="11247120" cy="1078992"/>
+            <a:off x="4279392" y="1325880"/>
+            <a:ext cx="3749039" cy="4892040"/>
           </a:xfrm>
           <a:prstGeom prst="roundRect">
             <a:avLst/>
@@ -3743,20 +3848,20 @@
       </p:sp>
       <p:sp>
         <p:nvSpPr>
-          <p:cNvPr id="11" name="Rectangle 10"/>
+          <p:cNvPr id="14" name="Rectangle 13"/>
           <p:cNvSpPr/>
           <p:nvPr/>
         </p:nvSpPr>
         <p:spPr>
           <a:xfrm>
-            <a:off x="457200" y="2468880"/>
-            <a:ext cx="91440" cy="1078992"/>
+            <a:off x="4279392" y="1325880"/>
+            <a:ext cx="3749039" cy="109728"/>
           </a:xfrm>
           <a:prstGeom prst="rect">
             <a:avLst/>
           </a:prstGeom>
           <a:solidFill>
-            <a:srgbClr val="1B3A4B"/>
+            <a:srgbClr val="8A5A12"/>
           </a:solidFill>
           <a:ln>
             <a:noFill/>
@@ -3787,27 +3892,27 @@
       </p:sp>
       <p:sp>
         <p:nvSpPr>
-          <p:cNvPr id="12" name="TextBox 11"/>
-          <p:cNvSpPr txBox="1"/>
-          <p:nvPr/>
-        </p:nvSpPr>
-        <p:spPr>
-          <a:xfrm>
-            <a:off x="777240" y="2596896"/>
-            <a:ext cx="2011680" cy="329184"/>
-          </a:xfrm>
-          <a:prstGeom prst="rect">
-            <a:avLst/>
-          </a:prstGeom>
-          <a:noFill/>
-        </p:spPr>
-        <p:txBody>
-          <a:bodyPr wrap="square"/>
-          <a:lstStyle/>
-          <a:p>
-            <a:pPr algn="l"/>
-            <a:r>
-              <a:rPr sz="1600" b="1">
+          <p:cNvPr id="15" name="TextBox 14"/>
+          <p:cNvSpPr txBox="1"/>
+          <p:nvPr/>
+        </p:nvSpPr>
+        <p:spPr>
+          <a:xfrm>
+            <a:off x="4480560" y="1554480"/>
+            <a:ext cx="3383280" cy="640080"/>
+          </a:xfrm>
+          <a:prstGeom prst="rect">
+            <a:avLst/>
+          </a:prstGeom>
+          <a:noFill/>
+        </p:spPr>
+        <p:txBody>
+          <a:bodyPr wrap="square"/>
+          <a:lstStyle/>
+          <a:p>
+            <a:pPr algn="l"/>
+            <a:r>
+              <a:rPr sz="1800" b="1">
                 <a:solidFill>
                   <a:srgbClr val="1B3A4B"/>
                 </a:solidFill>
@@ -3815,34 +3920,69 @@
                 <a:ea typeface="WenQuanYi Micro Hei"/>
                 <a:cs typeface="WenQuanYi Micro Hei"/>
               </a:rPr>
-              <a:t>已接到机器人</a:t>
-            </a:r>
-          </a:p>
-        </p:txBody>
-      </p:sp>
-      <p:sp>
-        <p:nvSpPr>
-          <p:cNvPr id="13" name="TextBox 12"/>
-          <p:cNvSpPr txBox="1"/>
-          <p:nvPr/>
-        </p:nvSpPr>
-        <p:spPr>
-          <a:xfrm>
-            <a:off x="2834640" y="2633472"/>
-            <a:ext cx="8503920" cy="768096"/>
-          </a:xfrm>
-          <a:prstGeom prst="rect">
-            <a:avLst/>
-          </a:prstGeom>
-          <a:noFill/>
-        </p:spPr>
-        <p:txBody>
-          <a:bodyPr wrap="square"/>
-          <a:lstStyle/>
-          <a:p>
-            <a:pPr algn="l"/>
-            <a:r>
-              <a:rPr sz="1600" b="0">
+              <a:t>2  端侧判断</a:t>
+            </a:r>
+          </a:p>
+        </p:txBody>
+      </p:sp>
+      <p:sp>
+        <p:nvSpPr>
+          <p:cNvPr id="16" name="TextBox 15"/>
+          <p:cNvSpPr txBox="1"/>
+          <p:nvPr/>
+        </p:nvSpPr>
+        <p:spPr>
+          <a:xfrm>
+            <a:off x="4480560" y="2286000"/>
+            <a:ext cx="3383280" cy="365760"/>
+          </a:xfrm>
+          <a:prstGeom prst="rect">
+            <a:avLst/>
+          </a:prstGeom>
+          <a:noFill/>
+        </p:spPr>
+        <p:txBody>
+          <a:bodyPr wrap="square"/>
+          <a:lstStyle/>
+          <a:p>
+            <a:pPr algn="l"/>
+            <a:r>
+              <a:rPr sz="1500" b="1">
+                <a:solidFill>
+                  <a:srgbClr val="2F6F4E"/>
+                </a:solidFill>
+                <a:latin typeface="WenQuanYi Micro Hei"/>
+                <a:ea typeface="WenQuanYi Micro Hei"/>
+                <a:cs typeface="WenQuanYi Micro Hei"/>
+              </a:rPr>
+              <a:t>位置：已留在机器人上</a:t>
+            </a:r>
+          </a:p>
+        </p:txBody>
+      </p:sp>
+      <p:sp>
+        <p:nvSpPr>
+          <p:cNvPr id="17" name="TextBox 16"/>
+          <p:cNvSpPr txBox="1"/>
+          <p:nvPr/>
+        </p:nvSpPr>
+        <p:spPr>
+          <a:xfrm>
+            <a:off x="4480560" y="2697480"/>
+            <a:ext cx="3383280" cy="1051560"/>
+          </a:xfrm>
+          <a:prstGeom prst="rect">
+            <a:avLst/>
+          </a:prstGeom>
+          <a:noFill/>
+        </p:spPr>
+        <p:txBody>
+          <a:bodyPr wrap="square"/>
+          <a:lstStyle/>
+          <a:p>
+            <a:pPr algn="l"/>
+            <a:r>
+              <a:rPr sz="1400" b="0">
                 <a:solidFill>
                   <a:srgbClr val="1C2430"/>
                 </a:solidFill>
@@ -3850,21 +3990,91 @@
                 <a:ea typeface="WenQuanYi Micro Hei"/>
                 <a:cs typeface="WenQuanYi Micro Hei"/>
               </a:rPr>
-              <a:t>WonderPi 里原有的「人脸检测」就是入口，没有新按钮。点进去会先挥手，脸留在画面里就播一组动作。</a:t>
-            </a:r>
-          </a:p>
-        </p:txBody>
-      </p:sp>
-      <p:sp>
-        <p:nvSpPr>
-          <p:cNvPr id="14" name="Rounded Rectangle 13"/>
+              <a:t>不走云端。Qwen 权重已在机内。决策接口按端侧来接。</a:t>
+            </a:r>
+          </a:p>
+        </p:txBody>
+      </p:sp>
+      <p:sp>
+        <p:nvSpPr>
+          <p:cNvPr id="18" name="TextBox 17"/>
+          <p:cNvSpPr txBox="1"/>
+          <p:nvPr/>
+        </p:nvSpPr>
+        <p:spPr>
+          <a:xfrm>
+            <a:off x="4480560" y="3840480"/>
+            <a:ext cx="3383280" cy="411480"/>
+          </a:xfrm>
+          <a:prstGeom prst="rect">
+            <a:avLst/>
+          </a:prstGeom>
+          <a:noFill/>
+        </p:spPr>
+        <p:txBody>
+          <a:bodyPr wrap="square"/>
+          <a:lstStyle/>
+          <a:p>
+            <a:pPr algn="l"/>
+            <a:r>
+              <a:rPr sz="1500" b="1">
+                <a:solidFill>
+                  <a:srgbClr val="A33B2B"/>
+                </a:solidFill>
+                <a:latin typeface="WenQuanYi Micro Hei"/>
+                <a:ea typeface="WenQuanYi Micro Hei"/>
+                <a:cs typeface="WenQuanYi Micro Hei"/>
+              </a:rPr>
+              <a:t>模型：这一轮没跑</a:t>
+            </a:r>
+          </a:p>
+        </p:txBody>
+      </p:sp>
+      <p:sp>
+        <p:nvSpPr>
+          <p:cNvPr id="19" name="TextBox 18"/>
+          <p:cNvSpPr txBox="1"/>
+          <p:nvPr/>
+        </p:nvSpPr>
+        <p:spPr>
+          <a:xfrm>
+            <a:off x="4480560" y="4297680"/>
+            <a:ext cx="3383280" cy="1188720"/>
+          </a:xfrm>
+          <a:prstGeom prst="rect">
+            <a:avLst/>
+          </a:prstGeom>
+          <a:noFill/>
+        </p:spPr>
+        <p:txBody>
+          <a:bodyPr wrap="square"/>
+          <a:lstStyle/>
+          <a:p>
+            <a:pPr algn="l"/>
+            <a:r>
+              <a:rPr sz="1400" b="0">
+                <a:solidFill>
+                  <a:srgbClr val="1C2430"/>
+                </a:solidFill>
+                <a:latin typeface="WenQuanYi Micro Hei"/>
+                <a:ea typeface="WenQuanYi Micro Hei"/>
+                <a:cs typeface="WenQuanYi Micro Hei"/>
+              </a:rPr>
+              <a:t>实际是规则，约 0.001 秒。原因是没有 llama_cpp。</a:t>
+            </a:r>
+          </a:p>
+        </p:txBody>
+      </p:sp>
+      <p:sp>
+        <p:nvSpPr>
+          <p:cNvPr id="20" name="Rounded Rectangle 19"/>
           <p:cNvSpPr/>
           <p:nvPr/>
         </p:nvSpPr>
         <p:spPr>
           <a:xfrm>
-            <a:off x="457200" y="3657600"/>
-            <a:ext cx="11247120" cy="1078992"/>
+            <a:off x="8193024" y="1325880"/>
+            <a:ext cx="3749039" cy="4892040"/>
           </a:xfrm>
           <a:prstGeom prst="roundRect">
             <a:avLst/>
@@ -3903,20 +4113,20 @@
       </p:sp>
       <p:sp>
         <p:nvSpPr>
-          <p:cNvPr id="15" name="Rectangle 14"/>
+          <p:cNvPr id="21" name="Rectangle 20"/>
           <p:cNvSpPr/>
           <p:nvPr/>
         </p:nvSpPr>
         <p:spPr>
           <a:xfrm>
-            <a:off x="457200" y="3657600"/>
-            <a:ext cx="91440" cy="1078992"/>
+            <a:off x="8193024" y="1325880"/>
+            <a:ext cx="3749039" cy="109728"/>
           </a:xfrm>
           <a:prstGeom prst="rect">
             <a:avLst/>
           </a:prstGeom>
           <a:solidFill>
-            <a:srgbClr val="1B3A4B"/>
+            <a:srgbClr val="C45C26"/>
           </a:solidFill>
           <a:ln>
             <a:noFill/>
@@ -3947,27 +4157,27 @@
       </p:sp>
       <p:sp>
         <p:nvSpPr>
-          <p:cNvPr id="16" name="TextBox 15"/>
-          <p:cNvSpPr txBox="1"/>
-          <p:nvPr/>
-        </p:nvSpPr>
-        <p:spPr>
-          <a:xfrm>
-            <a:off x="777240" y="3785616"/>
-            <a:ext cx="2011680" cy="329184"/>
-          </a:xfrm>
-          <a:prstGeom prst="rect">
-            <a:avLst/>
-          </a:prstGeom>
-          <a:noFill/>
-        </p:spPr>
-        <p:txBody>
-          <a:bodyPr wrap="square"/>
-          <a:lstStyle/>
-          <a:p>
-            <a:pPr algn="l"/>
-            <a:r>
-              <a:rPr sz="1600" b="1">
+          <p:cNvPr id="22" name="TextBox 21"/>
+          <p:cNvSpPr txBox="1"/>
+          <p:nvPr/>
+        </p:nvSpPr>
+        <p:spPr>
+          <a:xfrm>
+            <a:off x="8394192" y="1554480"/>
+            <a:ext cx="3383280" cy="640080"/>
+          </a:xfrm>
+          <a:prstGeom prst="rect">
+            <a:avLst/>
+          </a:prstGeom>
+          <a:noFill/>
+        </p:spPr>
+        <p:txBody>
+          <a:bodyPr wrap="square"/>
+          <a:lstStyle/>
+          <a:p>
+            <a:pPr algn="l"/>
+            <a:r>
+              <a:rPr sz="1800" b="1">
                 <a:solidFill>
                   <a:srgbClr val="1B3A4B"/>
                 </a:solidFill>
@@ -3975,34 +4185,69 @@
                 <a:ea typeface="WenQuanYi Micro Hei"/>
                 <a:cs typeface="WenQuanYi Micro Hei"/>
               </a:rPr>
-              <a:t>情绪</a:t>
-            </a:r>
-          </a:p>
-        </p:txBody>
-      </p:sp>
-      <p:sp>
-        <p:nvSpPr>
-          <p:cNvPr id="17" name="TextBox 16"/>
-          <p:cNvSpPr txBox="1"/>
-          <p:nvPr/>
-        </p:nvSpPr>
-        <p:spPr>
-          <a:xfrm>
-            <a:off x="2834640" y="3822192"/>
-            <a:ext cx="8503920" cy="768096"/>
-          </a:xfrm>
-          <a:prstGeom prst="rect">
-            <a:avLst/>
-          </a:prstGeom>
-          <a:noFill/>
-        </p:spPr>
-        <p:txBody>
-          <a:bodyPr wrap="square"/>
-          <a:lstStyle/>
-          <a:p>
-            <a:pPr algn="l"/>
-            <a:r>
-              <a:rPr sz="1600" b="0">
+              <a:t>3  MoMask 生成</a:t>
+            </a:r>
+          </a:p>
+        </p:txBody>
+      </p:sp>
+      <p:sp>
+        <p:nvSpPr>
+          <p:cNvPr id="23" name="TextBox 22"/>
+          <p:cNvSpPr txBox="1"/>
+          <p:nvPr/>
+        </p:nvSpPr>
+        <p:spPr>
+          <a:xfrm>
+            <a:off x="8394192" y="2286000"/>
+            <a:ext cx="3383280" cy="365760"/>
+          </a:xfrm>
+          <a:prstGeom prst="rect">
+            <a:avLst/>
+          </a:prstGeom>
+          <a:noFill/>
+        </p:spPr>
+        <p:txBody>
+          <a:bodyPr wrap="square"/>
+          <a:lstStyle/>
+          <a:p>
+            <a:pPr algn="l"/>
+            <a:r>
+              <a:rPr sz="1500" b="1">
+                <a:solidFill>
+                  <a:srgbClr val="2F6F4E"/>
+                </a:solidFill>
+                <a:latin typeface="WenQuanYi Micro Hei"/>
+                <a:ea typeface="WenQuanYi Micro Hei"/>
+                <a:cs typeface="WenQuanYi Micro Hei"/>
+              </a:rPr>
+              <a:t>接口：能出关节，不驱动身体</a:t>
+            </a:r>
+          </a:p>
+        </p:txBody>
+      </p:sp>
+      <p:sp>
+        <p:nvSpPr>
+          <p:cNvPr id="24" name="TextBox 23"/>
+          <p:cNvSpPr txBox="1"/>
+          <p:nvPr/>
+        </p:nvSpPr>
+        <p:spPr>
+          <a:xfrm>
+            <a:off x="8394192" y="2697480"/>
+            <a:ext cx="3383280" cy="1051560"/>
+          </a:xfrm>
+          <a:prstGeom prst="rect">
+            <a:avLst/>
+          </a:prstGeom>
+          <a:noFill/>
+        </p:spPr>
+        <p:txBody>
+          <a:bodyPr wrap="square"/>
+          <a:lstStyle/>
+          <a:p>
+            <a:pPr algn="l"/>
+            <a:r>
+              <a:rPr sz="1400" b="0">
                 <a:solidFill>
                   <a:srgbClr val="1C2430"/>
                 </a:solidFill>
@@ -4010,159 +4255,69 @@
                 <a:ea typeface="WenQuanYi Micro Hei"/>
                 <a:cs typeface="WenQuanYi Micro Hei"/>
               </a:rPr>
-              <a:t>使用板上的 FaceExpression。四类都出现过：高兴、中性、不高兴、惊讶。单帧大约 0.02 秒。</a:t>
-            </a:r>
-          </a:p>
-        </p:txBody>
-      </p:sp>
-      <p:sp>
-        <p:nvSpPr>
-          <p:cNvPr id="18" name="Rounded Rectangle 17"/>
-          <p:cNvSpPr/>
-          <p:nvPr/>
-        </p:nvSpPr>
-        <p:spPr>
-          <a:xfrm>
-            <a:off x="457200" y="4846320"/>
-            <a:ext cx="11247120" cy="1078992"/>
-          </a:xfrm>
-          <a:prstGeom prst="roundRect">
-            <a:avLst/>
-          </a:prstGeom>
-          <a:solidFill>
-            <a:srgbClr val="FFFFFF"/>
-          </a:solidFill>
-          <a:ln>
-            <a:solidFill>
-              <a:srgbClr val="E2DBD2"/>
-            </a:solidFill>
-          </a:ln>
-          <a:effectLst/>
-        </p:spPr>
-        <p:style>
-          <a:lnRef idx="1">
-            <a:schemeClr val="accent1"/>
-          </a:lnRef>
-          <a:fillRef idx="3">
-            <a:schemeClr val="accent1"/>
-          </a:fillRef>
-          <a:effectRef idx="2">
-            <a:schemeClr val="accent1"/>
-          </a:effectRef>
-          <a:fontRef idx="minor">
-            <a:schemeClr val="lt1"/>
-          </a:fontRef>
-        </p:style>
-        <p:txBody>
-          <a:bodyPr rtlCol="0" anchor="ctr"/>
-          <a:lstStyle/>
-          <a:p>
-            <a:pPr algn="ctr"/>
-          </a:p>
-        </p:txBody>
-      </p:sp>
-      <p:sp>
-        <p:nvSpPr>
-          <p:cNvPr id="19" name="Rectangle 18"/>
-          <p:cNvSpPr/>
-          <p:nvPr/>
-        </p:nvSpPr>
-        <p:spPr>
-          <a:xfrm>
-            <a:off x="457200" y="4846320"/>
-            <a:ext cx="91440" cy="1078992"/>
-          </a:xfrm>
-          <a:prstGeom prst="rect">
-            <a:avLst/>
-          </a:prstGeom>
-          <a:solidFill>
-            <a:srgbClr val="1B3A4B"/>
-          </a:solidFill>
-          <a:ln>
-            <a:noFill/>
-          </a:ln>
-          <a:effectLst/>
-        </p:spPr>
-        <p:style>
-          <a:lnRef idx="1">
-            <a:schemeClr val="accent1"/>
-          </a:lnRef>
-          <a:fillRef idx="3">
-            <a:schemeClr val="accent1"/>
-          </a:fillRef>
-          <a:effectRef idx="2">
-            <a:schemeClr val="accent1"/>
-          </a:effectRef>
-          <a:fontRef idx="minor">
-            <a:schemeClr val="lt1"/>
-          </a:fontRef>
-        </p:style>
-        <p:txBody>
-          <a:bodyPr rtlCol="0" anchor="ctr"/>
-          <a:lstStyle/>
-          <a:p>
-            <a:pPr algn="ctr"/>
-          </a:p>
-        </p:txBody>
-      </p:sp>
-      <p:sp>
-        <p:nvSpPr>
-          <p:cNvPr id="20" name="TextBox 19"/>
-          <p:cNvSpPr txBox="1"/>
-          <p:nvPr/>
-        </p:nvSpPr>
-        <p:spPr>
-          <a:xfrm>
-            <a:off x="777240" y="4974336"/>
-            <a:ext cx="2011680" cy="329184"/>
-          </a:xfrm>
-          <a:prstGeom prst="rect">
-            <a:avLst/>
-          </a:prstGeom>
-          <a:noFill/>
-        </p:spPr>
-        <p:txBody>
-          <a:bodyPr wrap="square"/>
-          <a:lstStyle/>
-          <a:p>
-            <a:pPr algn="l"/>
-            <a:r>
-              <a:rPr sz="1600" b="1">
-                <a:solidFill>
-                  <a:srgbClr val="1B3A4B"/>
-                </a:solidFill>
-                <a:latin typeface="WenQuanYi Micro Hei"/>
-                <a:ea typeface="WenQuanYi Micro Hei"/>
-                <a:cs typeface="WenQuanYi Micro Hei"/>
-              </a:rPr>
-              <a:t>动作</a:t>
-            </a:r>
-          </a:p>
-        </p:txBody>
-      </p:sp>
-      <p:sp>
-        <p:nvSpPr>
-          <p:cNvPr id="21" name="TextBox 20"/>
-          <p:cNvSpPr txBox="1"/>
-          <p:nvPr/>
-        </p:nvSpPr>
-        <p:spPr>
-          <a:xfrm>
-            <a:off x="2834640" y="5010912"/>
-            <a:ext cx="8503920" cy="768096"/>
-          </a:xfrm>
-          <a:prstGeom prst="rect">
-            <a:avLst/>
-          </a:prstGeom>
-          <a:noFill/>
-        </p:spPr>
-        <p:txBody>
-          <a:bodyPr wrap="square"/>
-          <a:lstStyle/>
-          <a:p>
-            <a:pPr algn="l"/>
-            <a:r>
-              <a:rPr sz="1600" b="0">
+              <a:t>同一条判断可以写出动作描述，再交给 MoMask 出关节文件。</a:t>
+            </a:r>
+          </a:p>
+        </p:txBody>
+      </p:sp>
+      <p:sp>
+        <p:nvSpPr>
+          <p:cNvPr id="25" name="TextBox 24"/>
+          <p:cNvSpPr txBox="1"/>
+          <p:nvPr/>
+        </p:nvSpPr>
+        <p:spPr>
+          <a:xfrm>
+            <a:off x="8394192" y="3840480"/>
+            <a:ext cx="3383280" cy="411480"/>
+          </a:xfrm>
+          <a:prstGeom prst="rect">
+            <a:avLst/>
+          </a:prstGeom>
+          <a:noFill/>
+        </p:spPr>
+        <p:txBody>
+          <a:bodyPr wrap="square"/>
+          <a:lstStyle/>
+          <a:p>
+            <a:pPr algn="l"/>
+            <a:r>
+              <a:rPr sz="1500" b="1">
+                <a:solidFill>
+                  <a:srgbClr val="A33B2B"/>
+                </a:solidFill>
+                <a:latin typeface="WenQuanYi Micro Hei"/>
+                <a:ea typeface="WenQuanYi Micro Hei"/>
+                <a:cs typeface="WenQuanYi Micro Hei"/>
+              </a:rPr>
+              <a:t>真机身体：仍是临时出口</a:t>
+            </a:r>
+          </a:p>
+        </p:txBody>
+      </p:sp>
+      <p:sp>
+        <p:nvSpPr>
+          <p:cNvPr id="26" name="TextBox 25"/>
+          <p:cNvSpPr txBox="1"/>
+          <p:nvPr/>
+        </p:nvSpPr>
+        <p:spPr>
+          <a:xfrm>
+            <a:off x="8394192" y="4297680"/>
+            <a:ext cx="3383280" cy="1188720"/>
+          </a:xfrm>
+          <a:prstGeom prst="rect">
+            <a:avLst/>
+          </a:prstGeom>
+          <a:noFill/>
+        </p:spPr>
+        <p:txBody>
+          <a:bodyPr wrap="square"/>
+          <a:lstStyle/>
+          <a:p>
+            <a:pPr algn="l"/>
+            <a:r>
+              <a:rPr sz="1400" b="0">
                 <a:solidFill>
                   <a:srgbClr val="1C2430"/>
                 </a:solidFill>
@@ -4170,21 +4325,21 @@
                 <a:ea typeface="WenQuanYi Micro Hei"/>
                 <a:cs typeface="WenQuanYi Micro Hei"/>
               </a:rPr>
-              <a:t>778 条社交短语。踢、打类不播。身体仍播工厂动作文件。16 路舵机坐标是按机身尺寸算的对照表，不直接驱动舵机。</a:t>
-            </a:r>
-          </a:p>
-        </p:txBody>
-      </p:sp>
-      <p:sp>
-        <p:nvSpPr>
-          <p:cNvPr id="22" name="TextBox 21"/>
+              <a:t>舵机播的是预设短语。关节还没有换成 16 个舵机。</a:t>
+            </a:r>
+          </a:p>
+        </p:txBody>
+      </p:sp>
+      <p:sp>
+        <p:nvSpPr>
+          <p:cNvPr id="27" name="TextBox 26"/>
           <p:cNvSpPr txBox="1"/>
           <p:nvPr/>
         </p:nvSpPr>
         <p:spPr>
           <a:xfrm>
             <a:off x="502920" y="6510528"/>
-            <a:ext cx="7315200" cy="256032"/>
+            <a:ext cx="8229600" cy="256032"/>
           </a:xfrm>
           <a:prstGeom prst="rect">
             <a:avLst/>
@@ -4205,14 +4360,14 @@
                 <a:ea typeface="WenQuanYi Micro Hei"/>
                 <a:cs typeface="WenQuanYi Micro Hei"/>
               </a:rPr>
-              <a:t>TonyPi 多模态情绪动作  ·  组会汇报</a:t>
-            </a:r>
-          </a:p>
-        </p:txBody>
-      </p:sp>
-      <p:sp>
-        <p:nvSpPr>
-          <p:cNvPr id="23" name="TextBox 22"/>
+              <a:t>标准路径：多模态输入 → 端侧判断 → MoMask 生成</a:t>
+            </a:r>
+          </a:p>
+        </p:txBody>
+      </p:sp>
+      <p:sp>
+        <p:nvSpPr>
+          <p:cNvPr id="28" name="TextBox 27"/>
           <p:cNvSpPr txBox="1"/>
           <p:nvPr/>
         </p:nvSpPr>
@@ -4381,7 +4536,7 @@
                 <a:ea typeface="WenQuanYi Micro Hei"/>
                 <a:cs typeface="WenQuanYi Micro Hei"/>
               </a:rPr>
-              <a:t>现在的链路</a:t>
+              <a:t>这一阶段适合汇报的内容</a:t>
             </a:r>
           </a:p>
         </p:txBody>
@@ -4416,7 +4571,7 @@
                 <a:ea typeface="WenQuanYi Micro Hei"/>
                 <a:cs typeface="WenQuanYi Micro Hei"/>
               </a:rPr>
-              <a:t>手机只负责打开「人脸检测」。识别和选动作都在机器人里。</a:t>
+              <a:t>每条都回答标准路径上的一个问题，不把临时出口说成目标。</a:t>
             </a:r>
           </a:p>
         </p:txBody>
@@ -4429,8 +4584,8 @@
         </p:nvSpPr>
         <p:spPr>
           <a:xfrm>
-            <a:off x="411480" y="1554480"/>
-            <a:ext cx="2148840" cy="2286000"/>
+            <a:off x="457200" y="1280160"/>
+            <a:ext cx="11247120" cy="1097280"/>
           </a:xfrm>
           <a:prstGeom prst="roundRect">
             <a:avLst/>
@@ -4469,36 +4624,45 @@
       </p:sp>
       <p:sp>
         <p:nvSpPr>
-          <p:cNvPr id="7" name="TextBox 6"/>
-          <p:cNvSpPr txBox="1"/>
-          <p:nvPr/>
-        </p:nvSpPr>
-        <p:spPr>
-          <a:xfrm>
-            <a:off x="548640" y="1691640"/>
-            <a:ext cx="1828800" cy="365760"/>
-          </a:xfrm>
-          <a:prstGeom prst="rect">
-            <a:avLst/>
-          </a:prstGeom>
-          <a:noFill/>
-        </p:spPr>
-        <p:txBody>
-          <a:bodyPr wrap="square"/>
-          <a:lstStyle/>
-          <a:p>
-            <a:pPr algn="l"/>
-            <a:r>
-              <a:rPr sz="2000" b="1">
-                <a:solidFill>
-                  <a:srgbClr val="C45C26"/>
-                </a:solidFill>
-                <a:latin typeface="WenQuanYi Micro Hei"/>
-                <a:ea typeface="WenQuanYi Micro Hei"/>
-                <a:cs typeface="WenQuanYi Micro Hei"/>
-              </a:rPr>
-              <a:t>1</a:t>
-            </a:r>
+          <p:cNvPr id="7" name="Rectangle 6"/>
+          <p:cNvSpPr/>
+          <p:nvPr/>
+        </p:nvSpPr>
+        <p:spPr>
+          <a:xfrm>
+            <a:off x="457200" y="1280160"/>
+            <a:ext cx="91440" cy="1097280"/>
+          </a:xfrm>
+          <a:prstGeom prst="rect">
+            <a:avLst/>
+          </a:prstGeom>
+          <a:solidFill>
+            <a:srgbClr val="1B3A4B"/>
+          </a:solidFill>
+          <a:ln>
+            <a:noFill/>
+          </a:ln>
+          <a:effectLst/>
+        </p:spPr>
+        <p:style>
+          <a:lnRef idx="1">
+            <a:schemeClr val="accent1"/>
+          </a:lnRef>
+          <a:fillRef idx="3">
+            <a:schemeClr val="accent1"/>
+          </a:fillRef>
+          <a:effectRef idx="2">
+            <a:schemeClr val="accent1"/>
+          </a:effectRef>
+          <a:fontRef idx="minor">
+            <a:schemeClr val="lt1"/>
+          </a:fontRef>
+        </p:style>
+        <p:txBody>
+          <a:bodyPr rtlCol="0" anchor="ctr"/>
+          <a:lstStyle/>
+          <a:p>
+            <a:pPr algn="ctr"/>
           </a:p>
         </p:txBody>
       </p:sp>
@@ -4510,21 +4674,21 @@
         </p:nvSpPr>
         <p:spPr>
           <a:xfrm>
-            <a:off x="548640" y="2103120"/>
-            <a:ext cx="1828800" cy="365760"/>
-          </a:xfrm>
-          <a:prstGeom prst="rect">
-            <a:avLst/>
-          </a:prstGeom>
-          <a:noFill/>
-        </p:spPr>
-        <p:txBody>
-          <a:bodyPr wrap="square"/>
-          <a:lstStyle/>
-          <a:p>
-            <a:pPr algn="l"/>
-            <a:r>
-              <a:rPr sz="2000" b="1">
+            <a:off x="777240" y="1389888"/>
+            <a:ext cx="10607040" cy="329184"/>
+          </a:xfrm>
+          <a:prstGeom prst="rect">
+            <a:avLst/>
+          </a:prstGeom>
+          <a:noFill/>
+        </p:spPr>
+        <p:txBody>
+          <a:bodyPr wrap="square"/>
+          <a:lstStyle/>
+          <a:p>
+            <a:pPr algn="l"/>
+            <a:r>
+              <a:rPr sz="1800" b="1">
                 <a:solidFill>
                   <a:srgbClr val="1B3A4B"/>
                 </a:solidFill>
@@ -4532,7 +4696,7 @@
                 <a:ea typeface="WenQuanYi Micro Hei"/>
                 <a:cs typeface="WenQuanYi Micro Hei"/>
               </a:rPr>
-              <a:t>人脸</a:t>
+              <a:t>输入已经能进机器人</a:t>
             </a:r>
           </a:p>
         </p:txBody>
@@ -4545,79 +4709,43 @@
         </p:nvSpPr>
         <p:spPr>
           <a:xfrm>
-            <a:off x="548640" y="2606040"/>
-            <a:ext cx="1874519" cy="822960"/>
-          </a:xfrm>
-          <a:prstGeom prst="rect">
-            <a:avLst/>
-          </a:prstGeom>
-          <a:noFill/>
-        </p:spPr>
-        <p:txBody>
-          <a:bodyPr wrap="square"/>
-          <a:lstStyle/>
-          <a:p>
-            <a:pPr algn="l"/>
-            <a:r>
-              <a:rPr sz="1400" b="0">
-                <a:solidFill>
-                  <a:srgbClr val="5C6B73"/>
-                </a:solidFill>
-                <a:latin typeface="WenQuanYi Micro Hei"/>
-                <a:ea typeface="WenQuanYi Micro Hei"/>
-                <a:cs typeface="WenQuanYi Micro Hei"/>
-              </a:rPr>
-              <a:t>FaceExpression
-约 0.02 秒</a:t>
-            </a:r>
-          </a:p>
-        </p:txBody>
-      </p:sp>
-      <p:sp>
-        <p:nvSpPr>
-          <p:cNvPr id="10" name="TextBox 9"/>
-          <p:cNvSpPr txBox="1"/>
-          <p:nvPr/>
-        </p:nvSpPr>
-        <p:spPr>
-          <a:xfrm>
-            <a:off x="2423160" y="2331720"/>
-            <a:ext cx="365760" cy="365760"/>
-          </a:xfrm>
-          <a:prstGeom prst="rect">
-            <a:avLst/>
-          </a:prstGeom>
-          <a:noFill/>
-        </p:spPr>
-        <p:txBody>
-          <a:bodyPr wrap="square"/>
-          <a:lstStyle/>
-          <a:p>
-            <a:pPr algn="l"/>
-            <a:r>
-              <a:rPr sz="2000" b="1">
-                <a:solidFill>
-                  <a:srgbClr val="C45C26"/>
-                </a:solidFill>
-                <a:latin typeface="WenQuanYi Micro Hei"/>
-                <a:ea typeface="WenQuanYi Micro Hei"/>
-                <a:cs typeface="WenQuanYi Micro Hei"/>
-              </a:rPr>
-              <a:t>→</a:t>
-            </a:r>
-          </a:p>
-        </p:txBody>
-      </p:sp>
-      <p:sp>
-        <p:nvSpPr>
-          <p:cNvPr id="11" name="Rounded Rectangle 10"/>
+            <a:off x="777240" y="1755648"/>
+            <a:ext cx="10607040" cy="502920"/>
+          </a:xfrm>
+          <a:prstGeom prst="rect">
+            <a:avLst/>
+          </a:prstGeom>
+          <a:noFill/>
+        </p:spPr>
+        <p:txBody>
+          <a:bodyPr wrap="square"/>
+          <a:lstStyle/>
+          <a:p>
+            <a:pPr algn="l"/>
+            <a:r>
+              <a:rPr sz="1500" b="0">
+                <a:solidFill>
+                  <a:srgbClr val="1C2430"/>
+                </a:solidFill>
+                <a:latin typeface="WenQuanYi Micro Hei"/>
+                <a:ea typeface="WenQuanYi Micro Hei"/>
+                <a:cs typeface="WenQuanYi Micro Hei"/>
+              </a:rPr>
+              <a:t>WonderPi 的「人脸检测」打开后，摄像头画面和表情类别能进到决策。这是多模态里的视觉一路。</a:t>
+            </a:r>
+          </a:p>
+        </p:txBody>
+      </p:sp>
+      <p:sp>
+        <p:nvSpPr>
+          <p:cNvPr id="10" name="Rounded Rectangle 9"/>
           <p:cNvSpPr/>
           <p:nvPr/>
         </p:nvSpPr>
         <p:spPr>
           <a:xfrm>
-            <a:off x="2743200" y="1554480"/>
-            <a:ext cx="2148840" cy="2286000"/>
+            <a:off x="457200" y="2487168"/>
+            <a:ext cx="11247120" cy="1097280"/>
           </a:xfrm>
           <a:prstGeom prst="roundRect">
             <a:avLst/>
@@ -4656,35 +4784,79 @@
       </p:sp>
       <p:sp>
         <p:nvSpPr>
+          <p:cNvPr id="11" name="Rectangle 10"/>
+          <p:cNvSpPr/>
+          <p:nvPr/>
+        </p:nvSpPr>
+        <p:spPr>
+          <a:xfrm>
+            <a:off x="457200" y="2487168"/>
+            <a:ext cx="91440" cy="1097280"/>
+          </a:xfrm>
+          <a:prstGeom prst="rect">
+            <a:avLst/>
+          </a:prstGeom>
+          <a:solidFill>
+            <a:srgbClr val="C45C26"/>
+          </a:solidFill>
+          <a:ln>
+            <a:noFill/>
+          </a:ln>
+          <a:effectLst/>
+        </p:spPr>
+        <p:style>
+          <a:lnRef idx="1">
+            <a:schemeClr val="accent1"/>
+          </a:lnRef>
+          <a:fillRef idx="3">
+            <a:schemeClr val="accent1"/>
+          </a:fillRef>
+          <a:effectRef idx="2">
+            <a:schemeClr val="accent1"/>
+          </a:effectRef>
+          <a:fontRef idx="minor">
+            <a:schemeClr val="lt1"/>
+          </a:fontRef>
+        </p:style>
+        <p:txBody>
+          <a:bodyPr rtlCol="0" anchor="ctr"/>
+          <a:lstStyle/>
+          <a:p>
+            <a:pPr algn="ctr"/>
+          </a:p>
+        </p:txBody>
+      </p:sp>
+      <p:sp>
+        <p:nvSpPr>
           <p:cNvPr id="12" name="TextBox 11"/>
           <p:cNvSpPr txBox="1"/>
           <p:nvPr/>
         </p:nvSpPr>
         <p:spPr>
           <a:xfrm>
-            <a:off x="2880360" y="1691640"/>
-            <a:ext cx="1828800" cy="365760"/>
-          </a:xfrm>
-          <a:prstGeom prst="rect">
-            <a:avLst/>
-          </a:prstGeom>
-          <a:noFill/>
-        </p:spPr>
-        <p:txBody>
-          <a:bodyPr wrap="square"/>
-          <a:lstStyle/>
-          <a:p>
-            <a:pPr algn="l"/>
-            <a:r>
-              <a:rPr sz="2000" b="1">
-                <a:solidFill>
-                  <a:srgbClr val="C45C26"/>
-                </a:solidFill>
-                <a:latin typeface="WenQuanYi Micro Hei"/>
-                <a:ea typeface="WenQuanYi Micro Hei"/>
-                <a:cs typeface="WenQuanYi Micro Hei"/>
-              </a:rPr>
-              <a:t>2</a:t>
+            <a:off x="777240" y="2596896"/>
+            <a:ext cx="10607040" cy="329184"/>
+          </a:xfrm>
+          <a:prstGeom prst="rect">
+            <a:avLst/>
+          </a:prstGeom>
+          <a:noFill/>
+        </p:spPr>
+        <p:txBody>
+          <a:bodyPr wrap="square"/>
+          <a:lstStyle/>
+          <a:p>
+            <a:pPr algn="l"/>
+            <a:r>
+              <a:rPr sz="1800" b="1">
+                <a:solidFill>
+                  <a:srgbClr val="1B3A4B"/>
+                </a:solidFill>
+                <a:latin typeface="WenQuanYi Micro Hei"/>
+                <a:ea typeface="WenQuanYi Micro Hei"/>
+                <a:cs typeface="WenQuanYi Micro Hei"/>
+              </a:rPr>
+              <a:t>判断被放在端侧</a:t>
             </a:r>
           </a:p>
         </p:txBody>
@@ -4697,114 +4869,43 @@
         </p:nvSpPr>
         <p:spPr>
           <a:xfrm>
-            <a:off x="2880360" y="2103120"/>
-            <a:ext cx="1828800" cy="365760"/>
-          </a:xfrm>
-          <a:prstGeom prst="rect">
-            <a:avLst/>
-          </a:prstGeom>
-          <a:noFill/>
-        </p:spPr>
-        <p:txBody>
-          <a:bodyPr wrap="square"/>
-          <a:lstStyle/>
-          <a:p>
-            <a:pPr algn="l"/>
-            <a:r>
-              <a:rPr sz="2000" b="1">
-                <a:solidFill>
-                  <a:srgbClr val="1B3A4B"/>
-                </a:solidFill>
-                <a:latin typeface="WenQuanYi Micro Hei"/>
-                <a:ea typeface="WenQuanYi Micro Hei"/>
-                <a:cs typeface="WenQuanYi Micro Hei"/>
-              </a:rPr>
-              <a:t>语音</a:t>
-            </a:r>
-          </a:p>
-        </p:txBody>
-      </p:sp>
-      <p:sp>
-        <p:nvSpPr>
-          <p:cNvPr id="14" name="TextBox 13"/>
-          <p:cNvSpPr txBox="1"/>
-          <p:nvPr/>
-        </p:nvSpPr>
-        <p:spPr>
-          <a:xfrm>
-            <a:off x="2880360" y="2606040"/>
-            <a:ext cx="1874519" cy="822960"/>
-          </a:xfrm>
-          <a:prstGeom prst="rect">
-            <a:avLst/>
-          </a:prstGeom>
-          <a:noFill/>
-        </p:spPr>
-        <p:txBody>
-          <a:bodyPr wrap="square"/>
-          <a:lstStyle/>
-          <a:p>
-            <a:pPr algn="l"/>
-            <a:r>
-              <a:rPr sz="1400" b="0">
-                <a:solidFill>
-                  <a:srgbClr val="5C6B73"/>
-                </a:solidFill>
-                <a:latin typeface="WenQuanYi Micro Hei"/>
-                <a:ea typeface="WenQuanYi Micro Hei"/>
-                <a:cs typeface="WenQuanYi Micro Hei"/>
-              </a:rPr>
-              <a:t>唤醒后录音
-本轮未进入</a:t>
-            </a:r>
-          </a:p>
-        </p:txBody>
-      </p:sp>
-      <p:sp>
-        <p:nvSpPr>
-          <p:cNvPr id="15" name="TextBox 14"/>
-          <p:cNvSpPr txBox="1"/>
-          <p:nvPr/>
-        </p:nvSpPr>
-        <p:spPr>
-          <a:xfrm>
-            <a:off x="4754880" y="2331720"/>
-            <a:ext cx="365760" cy="365760"/>
-          </a:xfrm>
-          <a:prstGeom prst="rect">
-            <a:avLst/>
-          </a:prstGeom>
-          <a:noFill/>
-        </p:spPr>
-        <p:txBody>
-          <a:bodyPr wrap="square"/>
-          <a:lstStyle/>
-          <a:p>
-            <a:pPr algn="l"/>
-            <a:r>
-              <a:rPr sz="2000" b="1">
-                <a:solidFill>
-                  <a:srgbClr val="C45C26"/>
-                </a:solidFill>
-                <a:latin typeface="WenQuanYi Micro Hei"/>
-                <a:ea typeface="WenQuanYi Micro Hei"/>
-                <a:cs typeface="WenQuanYi Micro Hei"/>
-              </a:rPr>
-              <a:t>→</a:t>
-            </a:r>
-          </a:p>
-        </p:txBody>
-      </p:sp>
-      <p:sp>
-        <p:nvSpPr>
-          <p:cNvPr id="16" name="Rounded Rectangle 15"/>
+            <a:off x="777240" y="2962656"/>
+            <a:ext cx="10607040" cy="502920"/>
+          </a:xfrm>
+          <a:prstGeom prst="rect">
+            <a:avLst/>
+          </a:prstGeom>
+          <a:noFill/>
+        </p:spPr>
+        <p:txBody>
+          <a:bodyPr wrap="square"/>
+          <a:lstStyle/>
+          <a:p>
+            <a:pPr algn="l"/>
+            <a:r>
+              <a:rPr sz="1500" b="0">
+                <a:solidFill>
+                  <a:srgbClr val="1C2430"/>
+                </a:solidFill>
+                <a:latin typeface="WenQuanYi Micro Hei"/>
+                <a:ea typeface="WenQuanYi Micro Hei"/>
+                <a:cs typeface="WenQuanYi Micro Hei"/>
+              </a:rPr>
+              <a:t>真机不调用云端中转。权重用的是 Qwen2.5-1.5B、4-bit。这一轮没装上运行库，所以表里看到的是规则退回。</a:t>
+            </a:r>
+          </a:p>
+        </p:txBody>
+      </p:sp>
+      <p:sp>
+        <p:nvSpPr>
+          <p:cNvPr id="14" name="Rounded Rectangle 13"/>
           <p:cNvSpPr/>
           <p:nvPr/>
         </p:nvSpPr>
         <p:spPr>
           <a:xfrm>
-            <a:off x="5074920" y="1554480"/>
-            <a:ext cx="2148840" cy="2286000"/>
+            <a:off x="457200" y="3694176"/>
+            <a:ext cx="11247120" cy="1097280"/>
           </a:xfrm>
           <a:prstGeom prst="roundRect">
             <a:avLst/>
@@ -4843,155 +4944,128 @@
       </p:sp>
       <p:sp>
         <p:nvSpPr>
+          <p:cNvPr id="15" name="Rectangle 14"/>
+          <p:cNvSpPr/>
+          <p:nvPr/>
+        </p:nvSpPr>
+        <p:spPr>
+          <a:xfrm>
+            <a:off x="457200" y="3694176"/>
+            <a:ext cx="91440" cy="1097280"/>
+          </a:xfrm>
+          <a:prstGeom prst="rect">
+            <a:avLst/>
+          </a:prstGeom>
+          <a:solidFill>
+            <a:srgbClr val="1B3A4B"/>
+          </a:solidFill>
+          <a:ln>
+            <a:noFill/>
+          </a:ln>
+          <a:effectLst/>
+        </p:spPr>
+        <p:style>
+          <a:lnRef idx="1">
+            <a:schemeClr val="accent1"/>
+          </a:lnRef>
+          <a:fillRef idx="3">
+            <a:schemeClr val="accent1"/>
+          </a:fillRef>
+          <a:effectRef idx="2">
+            <a:schemeClr val="accent1"/>
+          </a:effectRef>
+          <a:fontRef idx="minor">
+            <a:schemeClr val="lt1"/>
+          </a:fontRef>
+        </p:style>
+        <p:txBody>
+          <a:bodyPr rtlCol="0" anchor="ctr"/>
+          <a:lstStyle/>
+          <a:p>
+            <a:pPr algn="ctr"/>
+          </a:p>
+        </p:txBody>
+      </p:sp>
+      <p:sp>
+        <p:nvSpPr>
+          <p:cNvPr id="16" name="TextBox 15"/>
+          <p:cNvSpPr txBox="1"/>
+          <p:nvPr/>
+        </p:nvSpPr>
+        <p:spPr>
+          <a:xfrm>
+            <a:off x="777240" y="3803904"/>
+            <a:ext cx="10607040" cy="329184"/>
+          </a:xfrm>
+          <a:prstGeom prst="rect">
+            <a:avLst/>
+          </a:prstGeom>
+          <a:noFill/>
+        </p:spPr>
+        <p:txBody>
+          <a:bodyPr wrap="square"/>
+          <a:lstStyle/>
+          <a:p>
+            <a:pPr algn="l"/>
+            <a:r>
+              <a:rPr sz="1800" b="1">
+                <a:solidFill>
+                  <a:srgbClr val="1B3A4B"/>
+                </a:solidFill>
+                <a:latin typeface="WenQuanYi Micro Hei"/>
+                <a:ea typeface="WenQuanYi Micro Hei"/>
+                <a:cs typeface="WenQuanYi Micro Hei"/>
+              </a:rPr>
+              <a:t>判断结果已经能带动身体</a:t>
+            </a:r>
+          </a:p>
+        </p:txBody>
+      </p:sp>
+      <p:sp>
+        <p:nvSpPr>
           <p:cNvPr id="17" name="TextBox 16"/>
           <p:cNvSpPr txBox="1"/>
           <p:nvPr/>
         </p:nvSpPr>
         <p:spPr>
           <a:xfrm>
-            <a:off x="5212080" y="1691640"/>
-            <a:ext cx="1828800" cy="365760"/>
-          </a:xfrm>
-          <a:prstGeom prst="rect">
-            <a:avLst/>
-          </a:prstGeom>
-          <a:noFill/>
-        </p:spPr>
-        <p:txBody>
-          <a:bodyPr wrap="square"/>
-          <a:lstStyle/>
-          <a:p>
-            <a:pPr algn="l"/>
-            <a:r>
-              <a:rPr sz="2000" b="1">
-                <a:solidFill>
-                  <a:srgbClr val="C45C26"/>
-                </a:solidFill>
-                <a:latin typeface="WenQuanYi Micro Hei"/>
-                <a:ea typeface="WenQuanYi Micro Hei"/>
-                <a:cs typeface="WenQuanYi Micro Hei"/>
-              </a:rPr>
-              <a:t>3</a:t>
-            </a:r>
-          </a:p>
-        </p:txBody>
-      </p:sp>
-      <p:sp>
-        <p:nvSpPr>
-          <p:cNvPr id="18" name="TextBox 17"/>
-          <p:cNvSpPr txBox="1"/>
-          <p:nvPr/>
-        </p:nvSpPr>
-        <p:spPr>
-          <a:xfrm>
-            <a:off x="5212080" y="2103120"/>
-            <a:ext cx="1828800" cy="365760"/>
-          </a:xfrm>
-          <a:prstGeom prst="rect">
-            <a:avLst/>
-          </a:prstGeom>
-          <a:noFill/>
-        </p:spPr>
-        <p:txBody>
-          <a:bodyPr wrap="square"/>
-          <a:lstStyle/>
-          <a:p>
-            <a:pPr algn="l"/>
-            <a:r>
-              <a:rPr sz="2000" b="1">
-                <a:solidFill>
-                  <a:srgbClr val="1B3A4B"/>
-                </a:solidFill>
-                <a:latin typeface="WenQuanYi Micro Hei"/>
-                <a:ea typeface="WenQuanYi Micro Hei"/>
-                <a:cs typeface="WenQuanYi Micro Hei"/>
-              </a:rPr>
-              <a:t>决策</a:t>
-            </a:r>
-          </a:p>
-        </p:txBody>
-      </p:sp>
-      <p:sp>
-        <p:nvSpPr>
-          <p:cNvPr id="19" name="TextBox 18"/>
-          <p:cNvSpPr txBox="1"/>
-          <p:nvPr/>
-        </p:nvSpPr>
-        <p:spPr>
-          <a:xfrm>
-            <a:off x="5212080" y="2606040"/>
-            <a:ext cx="1874519" cy="822960"/>
-          </a:xfrm>
-          <a:prstGeom prst="rect">
-            <a:avLst/>
-          </a:prstGeom>
-          <a:noFill/>
-        </p:spPr>
-        <p:txBody>
-          <a:bodyPr wrap="square"/>
-          <a:lstStyle/>
-          <a:p>
-            <a:pPr algn="l"/>
-            <a:r>
-              <a:rPr sz="1400" b="0">
-                <a:solidFill>
-                  <a:srgbClr val="5C6B73"/>
-                </a:solidFill>
-                <a:latin typeface="WenQuanYi Micro Hei"/>
-                <a:ea typeface="WenQuanYi Micro Hei"/>
-                <a:cs typeface="WenQuanYi Micro Hei"/>
-              </a:rPr>
-              <a:t>想用端侧 Qwen
-实际落到规则</a:t>
-            </a:r>
-          </a:p>
-        </p:txBody>
-      </p:sp>
-      <p:sp>
-        <p:nvSpPr>
-          <p:cNvPr id="20" name="TextBox 19"/>
-          <p:cNvSpPr txBox="1"/>
-          <p:nvPr/>
-        </p:nvSpPr>
-        <p:spPr>
-          <a:xfrm>
-            <a:off x="7086600" y="2331720"/>
-            <a:ext cx="365760" cy="365760"/>
-          </a:xfrm>
-          <a:prstGeom prst="rect">
-            <a:avLst/>
-          </a:prstGeom>
-          <a:noFill/>
-        </p:spPr>
-        <p:txBody>
-          <a:bodyPr wrap="square"/>
-          <a:lstStyle/>
-          <a:p>
-            <a:pPr algn="l"/>
-            <a:r>
-              <a:rPr sz="2000" b="1">
-                <a:solidFill>
-                  <a:srgbClr val="C45C26"/>
-                </a:solidFill>
-                <a:latin typeface="WenQuanYi Micro Hei"/>
-                <a:ea typeface="WenQuanYi Micro Hei"/>
-                <a:cs typeface="WenQuanYi Micro Hei"/>
-              </a:rPr>
-              <a:t>→</a:t>
-            </a:r>
-          </a:p>
-        </p:txBody>
-      </p:sp>
-      <p:sp>
-        <p:nvSpPr>
-          <p:cNvPr id="21" name="Rounded Rectangle 20"/>
+            <a:off x="777240" y="4169664"/>
+            <a:ext cx="10607040" cy="502920"/>
+          </a:xfrm>
+          <a:prstGeom prst="rect">
+            <a:avLst/>
+          </a:prstGeom>
+          <a:noFill/>
+        </p:spPr>
+        <p:txBody>
+          <a:bodyPr wrap="square"/>
+          <a:lstStyle/>
+          <a:p>
+            <a:pPr algn="l"/>
+            <a:r>
+              <a:rPr sz="1500" b="0">
+                <a:solidFill>
+                  <a:srgbClr val="1C2430"/>
+                </a:solidFill>
+                <a:latin typeface="WenQuanYi Micro Hei"/>
+                <a:ea typeface="WenQuanYi Micro Hei"/>
+                <a:cs typeface="WenQuanYi Micro Hei"/>
+              </a:rPr>
+              <a:t>情绪出来之后会选一组动作并让舵机播出来。用来证明「判断 → 动作」这条线是通的。</a:t>
+            </a:r>
+          </a:p>
+        </p:txBody>
+      </p:sp>
+      <p:sp>
+        <p:nvSpPr>
+          <p:cNvPr id="18" name="Rounded Rectangle 17"/>
           <p:cNvSpPr/>
           <p:nvPr/>
         </p:nvSpPr>
         <p:spPr>
           <a:xfrm>
-            <a:off x="7406639" y="1554480"/>
-            <a:ext cx="2148840" cy="2286000"/>
+            <a:off x="457200" y="4901184"/>
+            <a:ext cx="11247120" cy="1097280"/>
           </a:xfrm>
           <a:prstGeom prst="roundRect">
             <a:avLst/>
@@ -5030,166 +5104,23 @@
       </p:sp>
       <p:sp>
         <p:nvSpPr>
-          <p:cNvPr id="22" name="TextBox 21"/>
-          <p:cNvSpPr txBox="1"/>
-          <p:nvPr/>
-        </p:nvSpPr>
-        <p:spPr>
-          <a:xfrm>
-            <a:off x="7543799" y="1691640"/>
-            <a:ext cx="1828800" cy="365760"/>
-          </a:xfrm>
-          <a:prstGeom prst="rect">
-            <a:avLst/>
-          </a:prstGeom>
-          <a:noFill/>
-        </p:spPr>
-        <p:txBody>
-          <a:bodyPr wrap="square"/>
-          <a:lstStyle/>
-          <a:p>
-            <a:pPr algn="l"/>
-            <a:r>
-              <a:rPr sz="2000" b="1">
-                <a:solidFill>
-                  <a:srgbClr val="C45C26"/>
-                </a:solidFill>
-                <a:latin typeface="WenQuanYi Micro Hei"/>
-                <a:ea typeface="WenQuanYi Micro Hei"/>
-                <a:cs typeface="WenQuanYi Micro Hei"/>
-              </a:rPr>
-              <a:t>4</a:t>
-            </a:r>
-          </a:p>
-        </p:txBody>
-      </p:sp>
-      <p:sp>
-        <p:nvSpPr>
-          <p:cNvPr id="23" name="TextBox 22"/>
-          <p:cNvSpPr txBox="1"/>
-          <p:nvPr/>
-        </p:nvSpPr>
-        <p:spPr>
-          <a:xfrm>
-            <a:off x="7543799" y="2103120"/>
-            <a:ext cx="1828800" cy="365760"/>
-          </a:xfrm>
-          <a:prstGeom prst="rect">
-            <a:avLst/>
-          </a:prstGeom>
-          <a:noFill/>
-        </p:spPr>
-        <p:txBody>
-          <a:bodyPr wrap="square"/>
-          <a:lstStyle/>
-          <a:p>
-            <a:pPr algn="l"/>
-            <a:r>
-              <a:rPr sz="2000" b="1">
-                <a:solidFill>
-                  <a:srgbClr val="1B3A4B"/>
-                </a:solidFill>
-                <a:latin typeface="WenQuanYi Micro Hei"/>
-                <a:ea typeface="WenQuanYi Micro Hei"/>
-                <a:cs typeface="WenQuanYi Micro Hei"/>
-              </a:rPr>
-              <a:t>短语</a:t>
-            </a:r>
-          </a:p>
-        </p:txBody>
-      </p:sp>
-      <p:sp>
-        <p:nvSpPr>
-          <p:cNvPr id="24" name="TextBox 23"/>
-          <p:cNvSpPr txBox="1"/>
-          <p:nvPr/>
-        </p:nvSpPr>
-        <p:spPr>
-          <a:xfrm>
-            <a:off x="7543799" y="2606040"/>
-            <a:ext cx="1874519" cy="822960"/>
-          </a:xfrm>
-          <a:prstGeom prst="rect">
-            <a:avLst/>
-          </a:prstGeom>
-          <a:noFill/>
-        </p:spPr>
-        <p:txBody>
-          <a:bodyPr wrap="square"/>
-          <a:lstStyle/>
-          <a:p>
-            <a:pPr algn="l"/>
-            <a:r>
-              <a:rPr sz="1400" b="0">
-                <a:solidFill>
-                  <a:srgbClr val="5C6B73"/>
-                </a:solidFill>
-                <a:latin typeface="WenQuanYi Micro Hei"/>
-                <a:ea typeface="WenQuanYi Micro Hei"/>
-                <a:cs typeface="WenQuanYi Micro Hei"/>
-              </a:rPr>
-              <a:t>778 选 1 组
-2–3 个动作</a:t>
-            </a:r>
-          </a:p>
-        </p:txBody>
-      </p:sp>
-      <p:sp>
-        <p:nvSpPr>
-          <p:cNvPr id="25" name="TextBox 24"/>
-          <p:cNvSpPr txBox="1"/>
-          <p:nvPr/>
-        </p:nvSpPr>
-        <p:spPr>
-          <a:xfrm>
-            <a:off x="9418319" y="2331720"/>
-            <a:ext cx="365760" cy="365760"/>
-          </a:xfrm>
-          <a:prstGeom prst="rect">
-            <a:avLst/>
-          </a:prstGeom>
-          <a:noFill/>
-        </p:spPr>
-        <p:txBody>
-          <a:bodyPr wrap="square"/>
-          <a:lstStyle/>
-          <a:p>
-            <a:pPr algn="l"/>
-            <a:r>
-              <a:rPr sz="2000" b="1">
-                <a:solidFill>
-                  <a:srgbClr val="C45C26"/>
-                </a:solidFill>
-                <a:latin typeface="WenQuanYi Micro Hei"/>
-                <a:ea typeface="WenQuanYi Micro Hei"/>
-                <a:cs typeface="WenQuanYi Micro Hei"/>
-              </a:rPr>
-              <a:t>→</a:t>
-            </a:r>
-          </a:p>
-        </p:txBody>
-      </p:sp>
-      <p:sp>
-        <p:nvSpPr>
-          <p:cNvPr id="26" name="Rounded Rectangle 25"/>
+          <p:cNvPr id="19" name="Rectangle 18"/>
           <p:cNvSpPr/>
           <p:nvPr/>
         </p:nvSpPr>
         <p:spPr>
           <a:xfrm>
-            <a:off x="9738360" y="1554480"/>
-            <a:ext cx="2148840" cy="2286000"/>
-          </a:xfrm>
-          <a:prstGeom prst="roundRect">
+            <a:off x="457200" y="4901184"/>
+            <a:ext cx="91440" cy="1097280"/>
+          </a:xfrm>
+          <a:prstGeom prst="rect">
             <a:avLst/>
           </a:prstGeom>
           <a:solidFill>
-            <a:srgbClr val="FFFFFF"/>
+            <a:srgbClr val="C45C26"/>
           </a:solidFill>
           <a:ln>
-            <a:solidFill>
-              <a:srgbClr val="E2DBD2"/>
-            </a:solidFill>
+            <a:noFill/>
           </a:ln>
           <a:effectLst/>
         </p:spPr>
@@ -5217,62 +5148,27 @@
       </p:sp>
       <p:sp>
         <p:nvSpPr>
-          <p:cNvPr id="27" name="TextBox 26"/>
-          <p:cNvSpPr txBox="1"/>
-          <p:nvPr/>
-        </p:nvSpPr>
-        <p:spPr>
-          <a:xfrm>
-            <a:off x="9875520" y="1691640"/>
-            <a:ext cx="1828800" cy="365760"/>
-          </a:xfrm>
-          <a:prstGeom prst="rect">
-            <a:avLst/>
-          </a:prstGeom>
-          <a:noFill/>
-        </p:spPr>
-        <p:txBody>
-          <a:bodyPr wrap="square"/>
-          <a:lstStyle/>
-          <a:p>
-            <a:pPr algn="l"/>
-            <a:r>
-              <a:rPr sz="2000" b="1">
-                <a:solidFill>
-                  <a:srgbClr val="C45C26"/>
-                </a:solidFill>
-                <a:latin typeface="WenQuanYi Micro Hei"/>
-                <a:ea typeface="WenQuanYi Micro Hei"/>
-                <a:cs typeface="WenQuanYi Micro Hei"/>
-              </a:rPr>
-              <a:t>5</a:t>
-            </a:r>
-          </a:p>
-        </p:txBody>
-      </p:sp>
-      <p:sp>
-        <p:nvSpPr>
-          <p:cNvPr id="28" name="TextBox 27"/>
-          <p:cNvSpPr txBox="1"/>
-          <p:nvPr/>
-        </p:nvSpPr>
-        <p:spPr>
-          <a:xfrm>
-            <a:off x="9875520" y="2103120"/>
-            <a:ext cx="1828800" cy="365760"/>
-          </a:xfrm>
-          <a:prstGeom prst="rect">
-            <a:avLst/>
-          </a:prstGeom>
-          <a:noFill/>
-        </p:spPr>
-        <p:txBody>
-          <a:bodyPr wrap="square"/>
-          <a:lstStyle/>
-          <a:p>
-            <a:pPr algn="l"/>
-            <a:r>
-              <a:rPr sz="2000" b="1">
+          <p:cNvPr id="20" name="TextBox 19"/>
+          <p:cNvSpPr txBox="1"/>
+          <p:nvPr/>
+        </p:nvSpPr>
+        <p:spPr>
+          <a:xfrm>
+            <a:off x="777240" y="5010912"/>
+            <a:ext cx="10607040" cy="329184"/>
+          </a:xfrm>
+          <a:prstGeom prst="rect">
+            <a:avLst/>
+          </a:prstGeom>
+          <a:noFill/>
+        </p:spPr>
+        <p:txBody>
+          <a:bodyPr wrap="square"/>
+          <a:lstStyle/>
+          <a:p>
+            <a:pPr algn="l"/>
+            <a:r>
+              <a:rPr sz="1800" b="1">
                 <a:solidFill>
                   <a:srgbClr val="1B3A4B"/>
                 </a:solidFill>
@@ -5280,34 +5176,69 @@
                 <a:ea typeface="WenQuanYi Micro Hei"/>
                 <a:cs typeface="WenQuanYi Micro Hei"/>
               </a:rPr>
-              <a:t>记录</a:t>
-            </a:r>
-          </a:p>
-        </p:txBody>
-      </p:sp>
-      <p:sp>
-        <p:nvSpPr>
-          <p:cNvPr id="29" name="TextBox 28"/>
-          <p:cNvSpPr txBox="1"/>
-          <p:nvPr/>
-        </p:nvSpPr>
-        <p:spPr>
-          <a:xfrm>
-            <a:off x="9875520" y="2606040"/>
-            <a:ext cx="1874519" cy="822960"/>
-          </a:xfrm>
-          <a:prstGeom prst="rect">
-            <a:avLst/>
-          </a:prstGeom>
-          <a:noFill/>
-        </p:spPr>
-        <p:txBody>
-          <a:bodyPr wrap="square"/>
-          <a:lstStyle/>
-          <a:p>
-            <a:pPr algn="l"/>
-            <a:r>
-              <a:rPr sz="1400" b="0">
+              <a:t>耗时被拆开了</a:t>
+            </a:r>
+          </a:p>
+        </p:txBody>
+      </p:sp>
+      <p:sp>
+        <p:nvSpPr>
+          <p:cNvPr id="21" name="TextBox 20"/>
+          <p:cNvSpPr txBox="1"/>
+          <p:nvPr/>
+        </p:nvSpPr>
+        <p:spPr>
+          <a:xfrm>
+            <a:off x="777240" y="5376672"/>
+            <a:ext cx="10607040" cy="502920"/>
+          </a:xfrm>
+          <a:prstGeom prst="rect">
+            <a:avLst/>
+          </a:prstGeom>
+          <a:noFill/>
+        </p:spPr>
+        <p:txBody>
+          <a:bodyPr wrap="square"/>
+          <a:lstStyle/>
+          <a:p>
+            <a:pPr algn="l"/>
+            <a:r>
+              <a:rPr sz="1500" b="0">
+                <a:solidFill>
+                  <a:srgbClr val="1C2430"/>
+                </a:solidFill>
+                <a:latin typeface="WenQuanYi Micro Hei"/>
+                <a:ea typeface="WenQuanYi Micro Hei"/>
+                <a:cs typeface="WenQuanYi Micro Hei"/>
+              </a:rPr>
+              <a:t>人脸约 0.02 秒，规则决策约 0.001 秒，动作播放约 2 到 9 秒。以后模型推理和 MoMask 生成可以记在同一张表里。</a:t>
+            </a:r>
+          </a:p>
+        </p:txBody>
+      </p:sp>
+      <p:sp>
+        <p:nvSpPr>
+          <p:cNvPr id="22" name="TextBox 21"/>
+          <p:cNvSpPr txBox="1"/>
+          <p:nvPr/>
+        </p:nvSpPr>
+        <p:spPr>
+          <a:xfrm>
+            <a:off x="502920" y="6510528"/>
+            <a:ext cx="8229600" cy="256032"/>
+          </a:xfrm>
+          <a:prstGeom prst="rect">
+            <a:avLst/>
+          </a:prstGeom>
+          <a:noFill/>
+        </p:spPr>
+        <p:txBody>
+          <a:bodyPr wrap="square"/>
+          <a:lstStyle/>
+          <a:p>
+            <a:pPr algn="l"/>
+            <a:r>
+              <a:rPr sz="1100" b="0">
                 <a:solidFill>
                   <a:srgbClr val="5C6B73"/>
                 </a:solidFill>
@@ -5315,127 +5246,14 @@
                 <a:ea typeface="WenQuanYi Micro Hei"/>
                 <a:cs typeface="WenQuanYi Micro Hei"/>
               </a:rPr>
-              <a:t>每轮一行
-wonderpi_latency.csv</a:t>
-            </a:r>
-          </a:p>
-        </p:txBody>
-      </p:sp>
-      <p:sp>
-        <p:nvSpPr>
-          <p:cNvPr id="30" name="TextBox 29"/>
-          <p:cNvSpPr txBox="1"/>
-          <p:nvPr/>
-        </p:nvSpPr>
-        <p:spPr>
-          <a:xfrm>
-            <a:off x="502920" y="4160520"/>
-            <a:ext cx="11155680" cy="2011680"/>
-          </a:xfrm>
-          <a:prstGeom prst="rect">
-            <a:avLst/>
-          </a:prstGeom>
-          <a:noFill/>
-        </p:spPr>
-        <p:txBody>
-          <a:bodyPr wrap="square">
-            <a:spAutoFit/>
-          </a:bodyPr>
-          <a:lstStyle/>
-          <a:p>
-            <a:pPr algn="l">
-              <a:spcAft>
-                <a:spcPts val="1000"/>
-              </a:spcAft>
-            </a:pPr>
-            <a:r>
-              <a:rPr sz="1800" b="0">
-                <a:solidFill>
-                  <a:srgbClr val="1C2430"/>
-                </a:solidFill>
-                <a:latin typeface="WenQuanYi Micro Hei"/>
-                <a:ea typeface="WenQuanYi Micro Hei"/>
-                <a:cs typeface="WenQuanYi Micro Hei"/>
-              </a:rPr>
-              <a:t>真机 17 轮：1 次是点进按钮，16 次是看到脸之后自动播。</a:t>
-            </a:r>
-          </a:p>
-          <a:p>
-            <a:pPr algn="l">
-              <a:spcAft>
-                <a:spcPts val="1000"/>
-              </a:spcAft>
-            </a:pPr>
-            <a:r>
-              <a:rPr sz="1800" b="0">
-                <a:solidFill>
-                  <a:srgbClr val="1C2430"/>
-                </a:solidFill>
-                <a:latin typeface="WenQuanYi Micro Hei"/>
-                <a:ea typeface="WenQuanYi Micro Hei"/>
-                <a:cs typeface="WenQuanYi Micro Hei"/>
-              </a:rPr>
-              <a:t>决策请求的是 edge_auto。表里每一行的实际决策都是 edge_rule。</a:t>
-            </a:r>
-          </a:p>
-          <a:p>
-            <a:pPr algn="l">
-              <a:spcAft>
-                <a:spcPts val="1000"/>
-              </a:spcAft>
-            </a:pPr>
-            <a:r>
-              <a:rPr sz="1800" b="0">
-                <a:solidFill>
-                  <a:srgbClr val="1C2430"/>
-                </a:solidFill>
-                <a:latin typeface="WenQuanYi Micro Hei"/>
-                <a:ea typeface="WenQuanYi Micro Hei"/>
-                <a:cs typeface="WenQuanYi Micro Hei"/>
-              </a:rPr>
-              <a:t>从开始到决定播哪一组，几乎等于动作播放时间，大约 2 到 9 秒。识别本身不是这段时间。</a:t>
-            </a:r>
-          </a:p>
-        </p:txBody>
-      </p:sp>
-      <p:sp>
-        <p:nvSpPr>
-          <p:cNvPr id="31" name="TextBox 30"/>
-          <p:cNvSpPr txBox="1"/>
-          <p:nvPr/>
-        </p:nvSpPr>
-        <p:spPr>
-          <a:xfrm>
-            <a:off x="502920" y="6510528"/>
-            <a:ext cx="7315200" cy="256032"/>
-          </a:xfrm>
-          <a:prstGeom prst="rect">
-            <a:avLst/>
-          </a:prstGeom>
-          <a:noFill/>
-        </p:spPr>
-        <p:txBody>
-          <a:bodyPr wrap="square"/>
-          <a:lstStyle/>
-          <a:p>
-            <a:pPr algn="l"/>
-            <a:r>
-              <a:rPr sz="1100" b="0">
-                <a:solidFill>
-                  <a:srgbClr val="5C6B73"/>
-                </a:solidFill>
-                <a:latin typeface="WenQuanYi Micro Hei"/>
-                <a:ea typeface="WenQuanYi Micro Hei"/>
-                <a:cs typeface="WenQuanYi Micro Hei"/>
-              </a:rPr>
-              <a:t>TonyPi 多模态情绪动作  ·  组会汇报</a:t>
-            </a:r>
-          </a:p>
-        </p:txBody>
-      </p:sp>
-      <p:sp>
-        <p:nvSpPr>
-          <p:cNvPr id="32" name="TextBox 31"/>
+              <a:t>标准路径：多模态输入 → 端侧判断 → MoMask 生成</a:t>
+            </a:r>
+          </a:p>
+        </p:txBody>
+      </p:sp>
+      <p:sp>
+        <p:nvSpPr>
+          <p:cNvPr id="23" name="TextBox 22"/>
           <p:cNvSpPr txBox="1"/>
           <p:nvPr/>
         </p:nvSpPr>
@@ -5604,7 +5422,7 @@
                 <a:ea typeface="WenQuanYi Micro Hei"/>
                 <a:cs typeface="WenQuanYi Micro Hei"/>
               </a:rPr>
-              <a:t>真机日志：17 轮里实际发生了什么</a:t>
+              <a:t>预设短语在标准路径里的位置</a:t>
             </a:r>
           </a:p>
         </p:txBody>
@@ -5639,30 +5457,32 @@
                 <a:ea typeface="WenQuanYi Micro Hei"/>
                 <a:cs typeface="WenQuanYi Micro Hei"/>
               </a:rPr>
-              <a:t>来源：wonderpi_latency.csv</a:t>
-            </a:r>
-          </a:p>
-        </p:txBody>
-      </p:sp>
-      <p:sp>
-        <p:nvSpPr>
-          <p:cNvPr id="6" name="Rectangle 5"/>
+              <a:t>它接在判断之后、MoMask 上身之前。</a:t>
+            </a:r>
+          </a:p>
+        </p:txBody>
+      </p:sp>
+      <p:sp>
+        <p:nvSpPr>
+          <p:cNvPr id="6" name="Rounded Rectangle 5"/>
           <p:cNvSpPr/>
           <p:nvPr/>
         </p:nvSpPr>
         <p:spPr>
           <a:xfrm>
-            <a:off x="457200" y="1280160"/>
-            <a:ext cx="11247120" cy="420624"/>
-          </a:xfrm>
-          <a:prstGeom prst="rect">
+            <a:off x="457200" y="1325880"/>
+            <a:ext cx="11247120" cy="1234440"/>
+          </a:xfrm>
+          <a:prstGeom prst="roundRect">
             <a:avLst/>
           </a:prstGeom>
           <a:solidFill>
-            <a:srgbClr val="1B3A4B"/>
+            <a:srgbClr val="FFFFFF"/>
           </a:solidFill>
           <a:ln>
-            <a:noFill/>
+            <a:solidFill>
+              <a:srgbClr val="E2DBD2"/>
+            </a:solidFill>
           </a:ln>
           <a:effectLst/>
         </p:spPr>
@@ -5696,29 +5516,29 @@
         </p:nvSpPr>
         <p:spPr>
           <a:xfrm>
-            <a:off x="594360" y="1335024"/>
-            <a:ext cx="2286000" cy="310896"/>
-          </a:xfrm>
-          <a:prstGeom prst="rect">
-            <a:avLst/>
-          </a:prstGeom>
-          <a:noFill/>
-        </p:spPr>
-        <p:txBody>
-          <a:bodyPr wrap="square"/>
-          <a:lstStyle/>
-          <a:p>
-            <a:pPr algn="l"/>
-            <a:r>
-              <a:rPr sz="1400" b="1">
-                <a:solidFill>
-                  <a:srgbClr val="FFFFFF"/>
-                </a:solidFill>
-                <a:latin typeface="WenQuanYi Micro Hei"/>
-                <a:ea typeface="WenQuanYi Micro Hei"/>
-                <a:cs typeface="WenQuanYi Micro Hei"/>
-              </a:rPr>
-              <a:t>项目</a:t>
+            <a:off x="685800" y="1508760"/>
+            <a:ext cx="10789920" cy="365760"/>
+          </a:xfrm>
+          <a:prstGeom prst="rect">
+            <a:avLst/>
+          </a:prstGeom>
+          <a:noFill/>
+        </p:spPr>
+        <p:txBody>
+          <a:bodyPr wrap="square"/>
+          <a:lstStyle/>
+          <a:p>
+            <a:pPr algn="l"/>
+            <a:r>
+              <a:rPr sz="1800" b="1">
+                <a:solidFill>
+                  <a:srgbClr val="1B3A4B"/>
+                </a:solidFill>
+                <a:latin typeface="WenQuanYi Micro Hei"/>
+                <a:ea typeface="WenQuanYi Micro Hei"/>
+                <a:cs typeface="WenQuanYi Micro Hei"/>
+              </a:rPr>
+              <a:t>现在：  脸（语音空着）  →  规则判断  →  778 条短语里的一组  →  舵机</a:t>
             </a:r>
           </a:p>
         </p:txBody>
@@ -5731,29 +5551,29 @@
         </p:nvSpPr>
         <p:spPr>
           <a:xfrm>
-            <a:off x="3017520" y="1335024"/>
-            <a:ext cx="3566160" cy="310896"/>
-          </a:xfrm>
-          <a:prstGeom prst="rect">
-            <a:avLst/>
-          </a:prstGeom>
-          <a:noFill/>
-        </p:spPr>
-        <p:txBody>
-          <a:bodyPr wrap="square"/>
-          <a:lstStyle/>
-          <a:p>
-            <a:pPr algn="l"/>
-            <a:r>
-              <a:rPr sz="1400" b="1">
-                <a:solidFill>
-                  <a:srgbClr val="FFFFFF"/>
-                </a:solidFill>
-                <a:latin typeface="WenQuanYi Micro Hei"/>
-                <a:ea typeface="WenQuanYi Micro Hei"/>
-                <a:cs typeface="WenQuanYi Micro Hei"/>
-              </a:rPr>
-              <a:t>日志里的结果</a:t>
+            <a:off x="685800" y="1965960"/>
+            <a:ext cx="10789920" cy="365760"/>
+          </a:xfrm>
+          <a:prstGeom prst="rect">
+            <a:avLst/>
+          </a:prstGeom>
+          <a:noFill/>
+        </p:spPr>
+        <p:txBody>
+          <a:bodyPr wrap="square"/>
+          <a:lstStyle/>
+          <a:p>
+            <a:pPr algn="l"/>
+            <a:r>
+              <a:rPr sz="1800" b="1">
+                <a:solidFill>
+                  <a:srgbClr val="C45C26"/>
+                </a:solidFill>
+                <a:latin typeface="WenQuanYi Micro Hei"/>
+                <a:ea typeface="WenQuanYi Micro Hei"/>
+                <a:cs typeface="WenQuanYi Micro Hei"/>
+              </a:rPr>
+              <a:t>目标：  脸 + 语音  →  端侧模型判断  →  MoMask 生成关节  →  重定向到 16 个舵机</a:t>
             </a:r>
           </a:p>
         </p:txBody>
@@ -5766,1114 +5586,113 @@
         </p:nvSpPr>
         <p:spPr>
           <a:xfrm>
-            <a:off x="6766560" y="1335024"/>
-            <a:ext cx="4663440" cy="310896"/>
-          </a:xfrm>
-          <a:prstGeom prst="rect">
-            <a:avLst/>
-          </a:prstGeom>
-          <a:noFill/>
-        </p:spPr>
-        <p:txBody>
-          <a:bodyPr wrap="square"/>
-          <a:lstStyle/>
-          <a:p>
-            <a:pPr algn="l"/>
-            <a:r>
-              <a:rPr sz="1400" b="1">
-                <a:solidFill>
-                  <a:srgbClr val="FFFFFF"/>
-                </a:solidFill>
-                <a:latin typeface="WenQuanYi Micro Hei"/>
-                <a:ea typeface="WenQuanYi Micro Hei"/>
-                <a:cs typeface="WenQuanYi Micro Hei"/>
-              </a:rPr>
-              <a:t>说明</a:t>
-            </a:r>
-          </a:p>
-        </p:txBody>
-      </p:sp>
-      <p:sp>
-        <p:nvSpPr>
-          <p:cNvPr id="10" name="Rectangle 9"/>
-          <p:cNvSpPr/>
-          <p:nvPr/>
-        </p:nvSpPr>
-        <p:spPr>
-          <a:xfrm>
-            <a:off x="457200" y="1700784"/>
-            <a:ext cx="11247120" cy="621792"/>
-          </a:xfrm>
-          <a:prstGeom prst="rect">
-            <a:avLst/>
-          </a:prstGeom>
-          <a:solidFill>
-            <a:srgbClr val="FFFFFF"/>
-          </a:solidFill>
-          <a:ln>
-            <a:noFill/>
-          </a:ln>
-          <a:effectLst/>
-        </p:spPr>
-        <p:style>
-          <a:lnRef idx="1">
-            <a:schemeClr val="accent1"/>
-          </a:lnRef>
-          <a:fillRef idx="3">
-            <a:schemeClr val="accent1"/>
-          </a:fillRef>
-          <a:effectRef idx="2">
-            <a:schemeClr val="accent1"/>
-          </a:effectRef>
-          <a:fontRef idx="minor">
-            <a:schemeClr val="lt1"/>
-          </a:fontRef>
-        </p:style>
-        <p:txBody>
-          <a:bodyPr rtlCol="0" anchor="ctr"/>
-          <a:lstStyle/>
-          <a:p>
-            <a:pPr algn="ctr"/>
+            <a:off x="548640" y="2834640"/>
+            <a:ext cx="11064240" cy="2926080"/>
+          </a:xfrm>
+          <a:prstGeom prst="rect">
+            <a:avLst/>
+          </a:prstGeom>
+          <a:noFill/>
+        </p:spPr>
+        <p:txBody>
+          <a:bodyPr wrap="square">
+            <a:spAutoFit/>
+          </a:bodyPr>
+          <a:lstStyle/>
+          <a:p>
+            <a:pPr algn="l">
+              <a:spcAft>
+                <a:spcPts val="1400"/>
+              </a:spcAft>
+            </a:pPr>
+            <a:r>
+              <a:rPr sz="1800" b="0">
+                <a:solidFill>
+                  <a:srgbClr val="1C2430"/>
+                </a:solidFill>
+                <a:latin typeface="WenQuanYi Micro Hei"/>
+                <a:ea typeface="WenQuanYi Micro Hei"/>
+                <a:cs typeface="WenQuanYi Micro Hei"/>
+              </a:rPr>
+              <a:t>可以讲：短语让我们在生成模型还不能驱动舵机时，先看到情绪对应的身体反应，并暴露动作质量问题。</a:t>
+            </a:r>
+          </a:p>
+          <a:p>
+            <a:pPr algn="l">
+              <a:spcAft>
+                <a:spcPts val="1400"/>
+              </a:spcAft>
+            </a:pPr>
+            <a:r>
+              <a:rPr sz="1800" b="0">
+                <a:solidFill>
+                  <a:srgbClr val="1C2430"/>
+                </a:solidFill>
+                <a:latin typeface="WenQuanYi Micro Hei"/>
+                <a:ea typeface="WenQuanYi Micro Hei"/>
+                <a:cs typeface="WenQuanYi Micro Hei"/>
+              </a:rPr>
+              <a:t>不要讲成：系统已经用 778 条短语完成了动作生成。</a:t>
+            </a:r>
+          </a:p>
+          <a:p>
+            <a:pPr algn="l">
+              <a:spcAft>
+                <a:spcPts val="1400"/>
+              </a:spcAft>
+            </a:pPr>
+            <a:r>
+              <a:rPr sz="1800" b="0">
+                <a:solidFill>
+                  <a:srgbClr val="1C2430"/>
+                </a:solidFill>
+                <a:latin typeface="WenQuanYi Micro Hei"/>
+                <a:ea typeface="WenQuanYi Micro Hei"/>
+                <a:cs typeface="WenQuanYi Micro Hei"/>
+              </a:rPr>
+              <a:t>短语上已经看到两个问题，留在临时出口里修，不改变终点：同类转身隔几轮重复；举手再下蹲时手臂碰到腿。规则已改，尚未再次上机。</a:t>
+            </a:r>
+          </a:p>
+        </p:txBody>
+      </p:sp>
+      <p:sp>
+        <p:nvSpPr>
+          <p:cNvPr id="10" name="TextBox 9"/>
+          <p:cNvSpPr txBox="1"/>
+          <p:nvPr/>
+        </p:nvSpPr>
+        <p:spPr>
+          <a:xfrm>
+            <a:off x="502920" y="6510528"/>
+            <a:ext cx="8229600" cy="256032"/>
+          </a:xfrm>
+          <a:prstGeom prst="rect">
+            <a:avLst/>
+          </a:prstGeom>
+          <a:noFill/>
+        </p:spPr>
+        <p:txBody>
+          <a:bodyPr wrap="square"/>
+          <a:lstStyle/>
+          <a:p>
+            <a:pPr algn="l"/>
+            <a:r>
+              <a:rPr sz="1100" b="0">
+                <a:solidFill>
+                  <a:srgbClr val="5C6B73"/>
+                </a:solidFill>
+                <a:latin typeface="WenQuanYi Micro Hei"/>
+                <a:ea typeface="WenQuanYi Micro Hei"/>
+                <a:cs typeface="WenQuanYi Micro Hei"/>
+              </a:rPr>
+              <a:t>标准路径：多模态输入 → 端侧判断 → MoMask 生成</a:t>
+            </a:r>
           </a:p>
         </p:txBody>
       </p:sp>
       <p:sp>
         <p:nvSpPr>
           <p:cNvPr id="11" name="TextBox 10"/>
-          <p:cNvSpPr txBox="1"/>
-          <p:nvPr/>
-        </p:nvSpPr>
-        <p:spPr>
-          <a:xfrm>
-            <a:off x="594360" y="1828800"/>
-            <a:ext cx="2286000" cy="365760"/>
-          </a:xfrm>
-          <a:prstGeom prst="rect">
-            <a:avLst/>
-          </a:prstGeom>
-          <a:noFill/>
-        </p:spPr>
-        <p:txBody>
-          <a:bodyPr wrap="square"/>
-          <a:lstStyle/>
-          <a:p>
-            <a:pPr algn="l"/>
-            <a:r>
-              <a:rPr sz="1400" b="0">
-                <a:solidFill>
-                  <a:srgbClr val="1C2430"/>
-                </a:solidFill>
-                <a:latin typeface="WenQuanYi Micro Hei"/>
-                <a:ea typeface="WenQuanYi Micro Hei"/>
-                <a:cs typeface="WenQuanYi Micro Hei"/>
-              </a:rPr>
-              <a:t>触发</a:t>
-            </a:r>
-          </a:p>
-        </p:txBody>
-      </p:sp>
-      <p:sp>
-        <p:nvSpPr>
-          <p:cNvPr id="12" name="TextBox 11"/>
-          <p:cNvSpPr txBox="1"/>
-          <p:nvPr/>
-        </p:nvSpPr>
-        <p:spPr>
-          <a:xfrm>
-            <a:off x="3017520" y="1828800"/>
-            <a:ext cx="3566160" cy="365760"/>
-          </a:xfrm>
-          <a:prstGeom prst="rect">
-            <a:avLst/>
-          </a:prstGeom>
-          <a:noFill/>
-        </p:spPr>
-        <p:txBody>
-          <a:bodyPr wrap="square"/>
-          <a:lstStyle/>
-          <a:p>
-            <a:pPr algn="l"/>
-            <a:r>
-              <a:rPr sz="1400" b="0">
-                <a:solidFill>
-                  <a:srgbClr val="1C2430"/>
-                </a:solidFill>
-                <a:latin typeface="WenQuanYi Micro Hei"/>
-                <a:ea typeface="WenQuanYi Micro Hei"/>
-                <a:cs typeface="WenQuanYi Micro Hei"/>
-              </a:rPr>
-              <a:t>enter ×1，face ×16</a:t>
-            </a:r>
-          </a:p>
-        </p:txBody>
-      </p:sp>
-      <p:sp>
-        <p:nvSpPr>
-          <p:cNvPr id="13" name="TextBox 12"/>
-          <p:cNvSpPr txBox="1"/>
-          <p:nvPr/>
-        </p:nvSpPr>
-        <p:spPr>
-          <a:xfrm>
-            <a:off x="6766560" y="1828800"/>
-            <a:ext cx="4663440" cy="365760"/>
-          </a:xfrm>
-          <a:prstGeom prst="rect">
-            <a:avLst/>
-          </a:prstGeom>
-          <a:noFill/>
-        </p:spPr>
-        <p:txBody>
-          <a:bodyPr wrap="square"/>
-          <a:lstStyle/>
-          <a:p>
-            <a:pPr algn="l"/>
-            <a:r>
-              <a:rPr sz="1400" b="0">
-                <a:solidFill>
-                  <a:srgbClr val="1C2430"/>
-                </a:solidFill>
-                <a:latin typeface="WenQuanYi Micro Hei"/>
-                <a:ea typeface="WenQuanYi Micro Hei"/>
-                <a:cs typeface="WenQuanYi Micro Hei"/>
-              </a:rPr>
-              <a:t>没有 wakeup</a:t>
-            </a:r>
-          </a:p>
-        </p:txBody>
-      </p:sp>
-      <p:sp>
-        <p:nvSpPr>
-          <p:cNvPr id="14" name="Rectangle 13"/>
-          <p:cNvSpPr/>
-          <p:nvPr/>
-        </p:nvSpPr>
-        <p:spPr>
-          <a:xfrm>
-            <a:off x="457200" y="2322576"/>
-            <a:ext cx="11247120" cy="621792"/>
-          </a:xfrm>
-          <a:prstGeom prst="rect">
-            <a:avLst/>
-          </a:prstGeom>
-          <a:solidFill>
-            <a:srgbClr val="FBF8F4"/>
-          </a:solidFill>
-          <a:ln>
-            <a:noFill/>
-          </a:ln>
-          <a:effectLst/>
-        </p:spPr>
-        <p:style>
-          <a:lnRef idx="1">
-            <a:schemeClr val="accent1"/>
-          </a:lnRef>
-          <a:fillRef idx="3">
-            <a:schemeClr val="accent1"/>
-          </a:fillRef>
-          <a:effectRef idx="2">
-            <a:schemeClr val="accent1"/>
-          </a:effectRef>
-          <a:fontRef idx="minor">
-            <a:schemeClr val="lt1"/>
-          </a:fontRef>
-        </p:style>
-        <p:txBody>
-          <a:bodyPr rtlCol="0" anchor="ctr"/>
-          <a:lstStyle/>
-          <a:p>
-            <a:pPr algn="ctr"/>
-          </a:p>
-        </p:txBody>
-      </p:sp>
-      <p:sp>
-        <p:nvSpPr>
-          <p:cNvPr id="15" name="TextBox 14"/>
-          <p:cNvSpPr txBox="1"/>
-          <p:nvPr/>
-        </p:nvSpPr>
-        <p:spPr>
-          <a:xfrm>
-            <a:off x="594360" y="2450592"/>
-            <a:ext cx="2286000" cy="365760"/>
-          </a:xfrm>
-          <a:prstGeom prst="rect">
-            <a:avLst/>
-          </a:prstGeom>
-          <a:noFill/>
-        </p:spPr>
-        <p:txBody>
-          <a:bodyPr wrap="square"/>
-          <a:lstStyle/>
-          <a:p>
-            <a:pPr algn="l"/>
-            <a:r>
-              <a:rPr sz="1400" b="0">
-                <a:solidFill>
-                  <a:srgbClr val="1C2430"/>
-                </a:solidFill>
-                <a:latin typeface="WenQuanYi Micro Hei"/>
-                <a:ea typeface="WenQuanYi Micro Hei"/>
-                <a:cs typeface="WenQuanYi Micro Hei"/>
-              </a:rPr>
-              <a:t>录音 / 语音识别</a:t>
-            </a:r>
-          </a:p>
-        </p:txBody>
-      </p:sp>
-      <p:sp>
-        <p:nvSpPr>
-          <p:cNvPr id="16" name="TextBox 15"/>
-          <p:cNvSpPr txBox="1"/>
-          <p:nvPr/>
-        </p:nvSpPr>
-        <p:spPr>
-          <a:xfrm>
-            <a:off x="3017520" y="2450592"/>
-            <a:ext cx="3566160" cy="365760"/>
-          </a:xfrm>
-          <a:prstGeom prst="rect">
-            <a:avLst/>
-          </a:prstGeom>
-          <a:noFill/>
-        </p:spPr>
-        <p:txBody>
-          <a:bodyPr wrap="square"/>
-          <a:lstStyle/>
-          <a:p>
-            <a:pPr algn="l"/>
-            <a:r>
-              <a:rPr sz="1400" b="0">
-                <a:solidFill>
-                  <a:srgbClr val="1C2430"/>
-                </a:solidFill>
-                <a:latin typeface="WenQuanYi Micro Hei"/>
-                <a:ea typeface="WenQuanYi Micro Hei"/>
-                <a:cs typeface="WenQuanYi Micro Hei"/>
-              </a:rPr>
-              <a:t>全部为 0，文本为空</a:t>
-            </a:r>
-          </a:p>
-        </p:txBody>
-      </p:sp>
-      <p:sp>
-        <p:nvSpPr>
-          <p:cNvPr id="17" name="TextBox 16"/>
-          <p:cNvSpPr txBox="1"/>
-          <p:nvPr/>
-        </p:nvSpPr>
-        <p:spPr>
-          <a:xfrm>
-            <a:off x="6766560" y="2450592"/>
-            <a:ext cx="4663440" cy="365760"/>
-          </a:xfrm>
-          <a:prstGeom prst="rect">
-            <a:avLst/>
-          </a:prstGeom>
-          <a:noFill/>
-        </p:spPr>
-        <p:txBody>
-          <a:bodyPr wrap="square"/>
-          <a:lstStyle/>
-          <a:p>
-            <a:pPr algn="l"/>
-            <a:r>
-              <a:rPr sz="1400" b="0">
-                <a:solidFill>
-                  <a:srgbClr val="1C2430"/>
-                </a:solidFill>
-                <a:latin typeface="WenQuanYi Micro Hei"/>
-                <a:ea typeface="WenQuanYi Micro Hei"/>
-                <a:cs typeface="WenQuanYi Micro Hei"/>
-              </a:rPr>
-              <a:t>唤醒词没有进程序</a:t>
-            </a:r>
-          </a:p>
-        </p:txBody>
-      </p:sp>
-      <p:sp>
-        <p:nvSpPr>
-          <p:cNvPr id="18" name="Rectangle 17"/>
-          <p:cNvSpPr/>
-          <p:nvPr/>
-        </p:nvSpPr>
-        <p:spPr>
-          <a:xfrm>
-            <a:off x="457200" y="2944368"/>
-            <a:ext cx="11247120" cy="621792"/>
-          </a:xfrm>
-          <a:prstGeom prst="rect">
-            <a:avLst/>
-          </a:prstGeom>
-          <a:solidFill>
-            <a:srgbClr val="FFFFFF"/>
-          </a:solidFill>
-          <a:ln>
-            <a:noFill/>
-          </a:ln>
-          <a:effectLst/>
-        </p:spPr>
-        <p:style>
-          <a:lnRef idx="1">
-            <a:schemeClr val="accent1"/>
-          </a:lnRef>
-          <a:fillRef idx="3">
-            <a:schemeClr val="accent1"/>
-          </a:fillRef>
-          <a:effectRef idx="2">
-            <a:schemeClr val="accent1"/>
-          </a:effectRef>
-          <a:fontRef idx="minor">
-            <a:schemeClr val="lt1"/>
-          </a:fontRef>
-        </p:style>
-        <p:txBody>
-          <a:bodyPr rtlCol="0" anchor="ctr"/>
-          <a:lstStyle/>
-          <a:p>
-            <a:pPr algn="ctr"/>
-          </a:p>
-        </p:txBody>
-      </p:sp>
-      <p:sp>
-        <p:nvSpPr>
-          <p:cNvPr id="19" name="TextBox 18"/>
-          <p:cNvSpPr txBox="1"/>
-          <p:nvPr/>
-        </p:nvSpPr>
-        <p:spPr>
-          <a:xfrm>
-            <a:off x="594360" y="3072384"/>
-            <a:ext cx="2286000" cy="365760"/>
-          </a:xfrm>
-          <a:prstGeom prst="rect">
-            <a:avLst/>
-          </a:prstGeom>
-          <a:noFill/>
-        </p:spPr>
-        <p:txBody>
-          <a:bodyPr wrap="square"/>
-          <a:lstStyle/>
-          <a:p>
-            <a:pPr algn="l"/>
-            <a:r>
-              <a:rPr sz="1400" b="0">
-                <a:solidFill>
-                  <a:srgbClr val="1C2430"/>
-                </a:solidFill>
-                <a:latin typeface="WenQuanYi Micro Hei"/>
-                <a:ea typeface="WenQuanYi Micro Hei"/>
-                <a:cs typeface="WenQuanYi Micro Hei"/>
-              </a:rPr>
-              <a:t>人脸情绪</a:t>
-            </a:r>
-          </a:p>
-        </p:txBody>
-      </p:sp>
-      <p:sp>
-        <p:nvSpPr>
-          <p:cNvPr id="20" name="TextBox 19"/>
-          <p:cNvSpPr txBox="1"/>
-          <p:nvPr/>
-        </p:nvSpPr>
-        <p:spPr>
-          <a:xfrm>
-            <a:off x="3017520" y="3072384"/>
-            <a:ext cx="3566160" cy="365760"/>
-          </a:xfrm>
-          <a:prstGeom prst="rect">
-            <a:avLst/>
-          </a:prstGeom>
-          <a:noFill/>
-        </p:spPr>
-        <p:txBody>
-          <a:bodyPr wrap="square"/>
-          <a:lstStyle/>
-          <a:p>
-            <a:pPr algn="l"/>
-            <a:r>
-              <a:rPr sz="1400" b="0">
-                <a:solidFill>
-                  <a:srgbClr val="1C2430"/>
-                </a:solidFill>
-                <a:latin typeface="WenQuanYi Micro Hei"/>
-                <a:ea typeface="WenQuanYi Micro Hei"/>
-                <a:cs typeface="WenQuanYi Micro Hei"/>
-              </a:rPr>
-              <a:t>高兴、中性、不高兴、惊讶</a:t>
-            </a:r>
-          </a:p>
-        </p:txBody>
-      </p:sp>
-      <p:sp>
-        <p:nvSpPr>
-          <p:cNvPr id="21" name="TextBox 20"/>
-          <p:cNvSpPr txBox="1"/>
-          <p:nvPr/>
-        </p:nvSpPr>
-        <p:spPr>
-          <a:xfrm>
-            <a:off x="6766560" y="3072384"/>
-            <a:ext cx="4663440" cy="365760"/>
-          </a:xfrm>
-          <a:prstGeom prst="rect">
-            <a:avLst/>
-          </a:prstGeom>
-          <a:noFill/>
-        </p:spPr>
-        <p:txBody>
-          <a:bodyPr wrap="square"/>
-          <a:lstStyle/>
-          <a:p>
-            <a:pPr algn="l"/>
-            <a:r>
-              <a:rPr sz="1400" b="0">
-                <a:solidFill>
-                  <a:srgbClr val="1C2430"/>
-                </a:solidFill>
-                <a:latin typeface="WenQuanYi Micro Hei"/>
-                <a:ea typeface="WenQuanYi Micro Hei"/>
-                <a:cs typeface="WenQuanYi Micro Hei"/>
-              </a:rPr>
-              <a:t>脸这条是通的</a:t>
-            </a:r>
-          </a:p>
-        </p:txBody>
-      </p:sp>
-      <p:sp>
-        <p:nvSpPr>
-          <p:cNvPr id="22" name="Rectangle 21"/>
-          <p:cNvSpPr/>
-          <p:nvPr/>
-        </p:nvSpPr>
-        <p:spPr>
-          <a:xfrm>
-            <a:off x="457200" y="3566160"/>
-            <a:ext cx="11247120" cy="621792"/>
-          </a:xfrm>
-          <a:prstGeom prst="rect">
-            <a:avLst/>
-          </a:prstGeom>
-          <a:solidFill>
-            <a:srgbClr val="FBF8F4"/>
-          </a:solidFill>
-          <a:ln>
-            <a:noFill/>
-          </a:ln>
-          <a:effectLst/>
-        </p:spPr>
-        <p:style>
-          <a:lnRef idx="1">
-            <a:schemeClr val="accent1"/>
-          </a:lnRef>
-          <a:fillRef idx="3">
-            <a:schemeClr val="accent1"/>
-          </a:fillRef>
-          <a:effectRef idx="2">
-            <a:schemeClr val="accent1"/>
-          </a:effectRef>
-          <a:fontRef idx="minor">
-            <a:schemeClr val="lt1"/>
-          </a:fontRef>
-        </p:style>
-        <p:txBody>
-          <a:bodyPr rtlCol="0" anchor="ctr"/>
-          <a:lstStyle/>
-          <a:p>
-            <a:pPr algn="ctr"/>
-          </a:p>
-        </p:txBody>
-      </p:sp>
-      <p:sp>
-        <p:nvSpPr>
-          <p:cNvPr id="23" name="TextBox 22"/>
-          <p:cNvSpPr txBox="1"/>
-          <p:nvPr/>
-        </p:nvSpPr>
-        <p:spPr>
-          <a:xfrm>
-            <a:off x="594360" y="3694176"/>
-            <a:ext cx="2286000" cy="365760"/>
-          </a:xfrm>
-          <a:prstGeom prst="rect">
-            <a:avLst/>
-          </a:prstGeom>
-          <a:noFill/>
-        </p:spPr>
-        <p:txBody>
-          <a:bodyPr wrap="square"/>
-          <a:lstStyle/>
-          <a:p>
-            <a:pPr algn="l"/>
-            <a:r>
-              <a:rPr sz="1400" b="0">
-                <a:solidFill>
-                  <a:srgbClr val="1C2430"/>
-                </a:solidFill>
-                <a:latin typeface="WenQuanYi Micro Hei"/>
-                <a:ea typeface="WenQuanYi Micro Hei"/>
-                <a:cs typeface="WenQuanYi Micro Hei"/>
-              </a:rPr>
-              <a:t>人脸耗时</a:t>
-            </a:r>
-          </a:p>
-        </p:txBody>
-      </p:sp>
-      <p:sp>
-        <p:nvSpPr>
-          <p:cNvPr id="24" name="TextBox 23"/>
-          <p:cNvSpPr txBox="1"/>
-          <p:nvPr/>
-        </p:nvSpPr>
-        <p:spPr>
-          <a:xfrm>
-            <a:off x="3017520" y="3694176"/>
-            <a:ext cx="3566160" cy="365760"/>
-          </a:xfrm>
-          <a:prstGeom prst="rect">
-            <a:avLst/>
-          </a:prstGeom>
-          <a:noFill/>
-        </p:spPr>
-        <p:txBody>
-          <a:bodyPr wrap="square"/>
-          <a:lstStyle/>
-          <a:p>
-            <a:pPr algn="l"/>
-            <a:r>
-              <a:rPr sz="1400" b="0">
-                <a:solidFill>
-                  <a:srgbClr val="1C2430"/>
-                </a:solidFill>
-                <a:latin typeface="WenQuanYi Micro Hei"/>
-                <a:ea typeface="WenQuanYi Micro Hei"/>
-                <a:cs typeface="WenQuanYi Micro Hei"/>
-              </a:rPr>
-              <a:t>约 0.018–0.022 秒</a:t>
-            </a:r>
-          </a:p>
-        </p:txBody>
-      </p:sp>
-      <p:sp>
-        <p:nvSpPr>
-          <p:cNvPr id="25" name="TextBox 24"/>
-          <p:cNvSpPr txBox="1"/>
-          <p:nvPr/>
-        </p:nvSpPr>
-        <p:spPr>
-          <a:xfrm>
-            <a:off x="6766560" y="3694176"/>
-            <a:ext cx="4663440" cy="365760"/>
-          </a:xfrm>
-          <a:prstGeom prst="rect">
-            <a:avLst/>
-          </a:prstGeom>
-          <a:noFill/>
-        </p:spPr>
-        <p:txBody>
-          <a:bodyPr wrap="square"/>
-          <a:lstStyle/>
-          <a:p>
-            <a:pPr algn="l"/>
-            <a:r>
-              <a:rPr sz="1400" b="0">
-                <a:solidFill>
-                  <a:srgbClr val="1C2430"/>
-                </a:solidFill>
-                <a:latin typeface="WenQuanYi Micro Hei"/>
-                <a:ea typeface="WenQuanYi Micro Hei"/>
-                <a:cs typeface="WenQuanYi Micro Hei"/>
-              </a:rPr>
-              <a:t>不是瓶颈</a:t>
-            </a:r>
-          </a:p>
-        </p:txBody>
-      </p:sp>
-      <p:sp>
-        <p:nvSpPr>
-          <p:cNvPr id="26" name="Rectangle 25"/>
-          <p:cNvSpPr/>
-          <p:nvPr/>
-        </p:nvSpPr>
-        <p:spPr>
-          <a:xfrm>
-            <a:off x="457200" y="4187952"/>
-            <a:ext cx="11247120" cy="621792"/>
-          </a:xfrm>
-          <a:prstGeom prst="rect">
-            <a:avLst/>
-          </a:prstGeom>
-          <a:solidFill>
-            <a:srgbClr val="FFFFFF"/>
-          </a:solidFill>
-          <a:ln>
-            <a:noFill/>
-          </a:ln>
-          <a:effectLst/>
-        </p:spPr>
-        <p:style>
-          <a:lnRef idx="1">
-            <a:schemeClr val="accent1"/>
-          </a:lnRef>
-          <a:fillRef idx="3">
-            <a:schemeClr val="accent1"/>
-          </a:fillRef>
-          <a:effectRef idx="2">
-            <a:schemeClr val="accent1"/>
-          </a:effectRef>
-          <a:fontRef idx="minor">
-            <a:schemeClr val="lt1"/>
-          </a:fontRef>
-        </p:style>
-        <p:txBody>
-          <a:bodyPr rtlCol="0" anchor="ctr"/>
-          <a:lstStyle/>
-          <a:p>
-            <a:pPr algn="ctr"/>
-          </a:p>
-        </p:txBody>
-      </p:sp>
-      <p:sp>
-        <p:nvSpPr>
-          <p:cNvPr id="27" name="TextBox 26"/>
-          <p:cNvSpPr txBox="1"/>
-          <p:nvPr/>
-        </p:nvSpPr>
-        <p:spPr>
-          <a:xfrm>
-            <a:off x="594360" y="4315968"/>
-            <a:ext cx="2286000" cy="365760"/>
-          </a:xfrm>
-          <a:prstGeom prst="rect">
-            <a:avLst/>
-          </a:prstGeom>
-          <a:noFill/>
-        </p:spPr>
-        <p:txBody>
-          <a:bodyPr wrap="square"/>
-          <a:lstStyle/>
-          <a:p>
-            <a:pPr algn="l"/>
-            <a:r>
-              <a:rPr sz="1400" b="0">
-                <a:solidFill>
-                  <a:srgbClr val="1C2430"/>
-                </a:solidFill>
-                <a:latin typeface="WenQuanYi Micro Hei"/>
-                <a:ea typeface="WenQuanYi Micro Hei"/>
-                <a:cs typeface="WenQuanYi Micro Hei"/>
-              </a:rPr>
-              <a:t>决策</a:t>
-            </a:r>
-          </a:p>
-        </p:txBody>
-      </p:sp>
-      <p:sp>
-        <p:nvSpPr>
-          <p:cNvPr id="28" name="TextBox 27"/>
-          <p:cNvSpPr txBox="1"/>
-          <p:nvPr/>
-        </p:nvSpPr>
-        <p:spPr>
-          <a:xfrm>
-            <a:off x="3017520" y="4315968"/>
-            <a:ext cx="3566160" cy="365760"/>
-          </a:xfrm>
-          <a:prstGeom prst="rect">
-            <a:avLst/>
-          </a:prstGeom>
-          <a:noFill/>
-        </p:spPr>
-        <p:txBody>
-          <a:bodyPr wrap="square"/>
-          <a:lstStyle/>
-          <a:p>
-            <a:pPr algn="l"/>
-            <a:r>
-              <a:rPr sz="1400" b="0">
-                <a:solidFill>
-                  <a:srgbClr val="1C2430"/>
-                </a:solidFill>
-                <a:latin typeface="WenQuanYi Micro Hei"/>
-                <a:ea typeface="WenQuanYi Micro Hei"/>
-                <a:cs typeface="WenQuanYi Micro Hei"/>
-              </a:rPr>
-              <a:t>请求 edge_auto，实际 edge_rule</a:t>
-            </a:r>
-          </a:p>
-        </p:txBody>
-      </p:sp>
-      <p:sp>
-        <p:nvSpPr>
-          <p:cNvPr id="29" name="TextBox 28"/>
-          <p:cNvSpPr txBox="1"/>
-          <p:nvPr/>
-        </p:nvSpPr>
-        <p:spPr>
-          <a:xfrm>
-            <a:off x="6766560" y="4315968"/>
-            <a:ext cx="4663440" cy="365760"/>
-          </a:xfrm>
-          <a:prstGeom prst="rect">
-            <a:avLst/>
-          </a:prstGeom>
-          <a:noFill/>
-        </p:spPr>
-        <p:txBody>
-          <a:bodyPr wrap="square"/>
-          <a:lstStyle/>
-          <a:p>
-            <a:pPr algn="l"/>
-            <a:r>
-              <a:rPr sz="1400" b="0">
-                <a:solidFill>
-                  <a:srgbClr val="1C2430"/>
-                </a:solidFill>
-                <a:latin typeface="WenQuanYi Micro Hei"/>
-                <a:ea typeface="WenQuanYi Micro Hei"/>
-                <a:cs typeface="WenQuanYi Micro Hei"/>
-              </a:rPr>
-              <a:t>No module named llama_cpp</a:t>
-            </a:r>
-          </a:p>
-        </p:txBody>
-      </p:sp>
-      <p:sp>
-        <p:nvSpPr>
-          <p:cNvPr id="30" name="Rectangle 29"/>
-          <p:cNvSpPr/>
-          <p:nvPr/>
-        </p:nvSpPr>
-        <p:spPr>
-          <a:xfrm>
-            <a:off x="457200" y="4809744"/>
-            <a:ext cx="11247120" cy="621792"/>
-          </a:xfrm>
-          <a:prstGeom prst="rect">
-            <a:avLst/>
-          </a:prstGeom>
-          <a:solidFill>
-            <a:srgbClr val="FBF8F4"/>
-          </a:solidFill>
-          <a:ln>
-            <a:noFill/>
-          </a:ln>
-          <a:effectLst/>
-        </p:spPr>
-        <p:style>
-          <a:lnRef idx="1">
-            <a:schemeClr val="accent1"/>
-          </a:lnRef>
-          <a:fillRef idx="3">
-            <a:schemeClr val="accent1"/>
-          </a:fillRef>
-          <a:effectRef idx="2">
-            <a:schemeClr val="accent1"/>
-          </a:effectRef>
-          <a:fontRef idx="minor">
-            <a:schemeClr val="lt1"/>
-          </a:fontRef>
-        </p:style>
-        <p:txBody>
-          <a:bodyPr rtlCol="0" anchor="ctr"/>
-          <a:lstStyle/>
-          <a:p>
-            <a:pPr algn="ctr"/>
-          </a:p>
-        </p:txBody>
-      </p:sp>
-      <p:sp>
-        <p:nvSpPr>
-          <p:cNvPr id="31" name="TextBox 30"/>
-          <p:cNvSpPr txBox="1"/>
-          <p:nvPr/>
-        </p:nvSpPr>
-        <p:spPr>
-          <a:xfrm>
-            <a:off x="594360" y="4937760"/>
-            <a:ext cx="2286000" cy="365760"/>
-          </a:xfrm>
-          <a:prstGeom prst="rect">
-            <a:avLst/>
-          </a:prstGeom>
-          <a:noFill/>
-        </p:spPr>
-        <p:txBody>
-          <a:bodyPr wrap="square"/>
-          <a:lstStyle/>
-          <a:p>
-            <a:pPr algn="l"/>
-            <a:r>
-              <a:rPr sz="1400" b="0">
-                <a:solidFill>
-                  <a:srgbClr val="1C2430"/>
-                </a:solidFill>
-                <a:latin typeface="WenQuanYi Micro Hei"/>
-                <a:ea typeface="WenQuanYi Micro Hei"/>
-                <a:cs typeface="WenQuanYi Micro Hei"/>
-              </a:rPr>
-              <a:t>决策耗时</a:t>
-            </a:r>
-          </a:p>
-        </p:txBody>
-      </p:sp>
-      <p:sp>
-        <p:nvSpPr>
-          <p:cNvPr id="32" name="TextBox 31"/>
-          <p:cNvSpPr txBox="1"/>
-          <p:nvPr/>
-        </p:nvSpPr>
-        <p:spPr>
-          <a:xfrm>
-            <a:off x="3017520" y="4937760"/>
-            <a:ext cx="3566160" cy="365760"/>
-          </a:xfrm>
-          <a:prstGeom prst="rect">
-            <a:avLst/>
-          </a:prstGeom>
-          <a:noFill/>
-        </p:spPr>
-        <p:txBody>
-          <a:bodyPr wrap="square"/>
-          <a:lstStyle/>
-          <a:p>
-            <a:pPr algn="l"/>
-            <a:r>
-              <a:rPr sz="1400" b="0">
-                <a:solidFill>
-                  <a:srgbClr val="1C2430"/>
-                </a:solidFill>
-                <a:latin typeface="WenQuanYi Micro Hei"/>
-                <a:ea typeface="WenQuanYi Micro Hei"/>
-                <a:cs typeface="WenQuanYi Micro Hei"/>
-              </a:rPr>
-              <a:t>约 0.001 秒</a:t>
-            </a:r>
-          </a:p>
-        </p:txBody>
-      </p:sp>
-      <p:sp>
-        <p:nvSpPr>
-          <p:cNvPr id="33" name="TextBox 32"/>
-          <p:cNvSpPr txBox="1"/>
-          <p:nvPr/>
-        </p:nvSpPr>
-        <p:spPr>
-          <a:xfrm>
-            <a:off x="6766560" y="4937760"/>
-            <a:ext cx="4663440" cy="365760"/>
-          </a:xfrm>
-          <a:prstGeom prst="rect">
-            <a:avLst/>
-          </a:prstGeom>
-          <a:noFill/>
-        </p:spPr>
-        <p:txBody>
-          <a:bodyPr wrap="square"/>
-          <a:lstStyle/>
-          <a:p>
-            <a:pPr algn="l"/>
-            <a:r>
-              <a:rPr sz="1400" b="0">
-                <a:solidFill>
-                  <a:srgbClr val="1C2430"/>
-                </a:solidFill>
-                <a:latin typeface="WenQuanYi Micro Hei"/>
-                <a:ea typeface="WenQuanYi Micro Hei"/>
-                <a:cs typeface="WenQuanYi Micro Hei"/>
-              </a:rPr>
-              <a:t>规则，不是大模型</a:t>
-            </a:r>
-          </a:p>
-        </p:txBody>
-      </p:sp>
-      <p:sp>
-        <p:nvSpPr>
-          <p:cNvPr id="34" name="Rectangle 33"/>
-          <p:cNvSpPr/>
-          <p:nvPr/>
-        </p:nvSpPr>
-        <p:spPr>
-          <a:xfrm>
-            <a:off x="457200" y="5431536"/>
-            <a:ext cx="11247120" cy="621792"/>
-          </a:xfrm>
-          <a:prstGeom prst="rect">
-            <a:avLst/>
-          </a:prstGeom>
-          <a:solidFill>
-            <a:srgbClr val="FFFFFF"/>
-          </a:solidFill>
-          <a:ln>
-            <a:noFill/>
-          </a:ln>
-          <a:effectLst/>
-        </p:spPr>
-        <p:style>
-          <a:lnRef idx="1">
-            <a:schemeClr val="accent1"/>
-          </a:lnRef>
-          <a:fillRef idx="3">
-            <a:schemeClr val="accent1"/>
-          </a:fillRef>
-          <a:effectRef idx="2">
-            <a:schemeClr val="accent1"/>
-          </a:effectRef>
-          <a:fontRef idx="minor">
-            <a:schemeClr val="lt1"/>
-          </a:fontRef>
-        </p:style>
-        <p:txBody>
-          <a:bodyPr rtlCol="0" anchor="ctr"/>
-          <a:lstStyle/>
-          <a:p>
-            <a:pPr algn="ctr"/>
-          </a:p>
-        </p:txBody>
-      </p:sp>
-      <p:sp>
-        <p:nvSpPr>
-          <p:cNvPr id="35" name="TextBox 34"/>
-          <p:cNvSpPr txBox="1"/>
-          <p:nvPr/>
-        </p:nvSpPr>
-        <p:spPr>
-          <a:xfrm>
-            <a:off x="594360" y="5559552"/>
-            <a:ext cx="2286000" cy="365760"/>
-          </a:xfrm>
-          <a:prstGeom prst="rect">
-            <a:avLst/>
-          </a:prstGeom>
-          <a:noFill/>
-        </p:spPr>
-        <p:txBody>
-          <a:bodyPr wrap="square"/>
-          <a:lstStyle/>
-          <a:p>
-            <a:pPr algn="l"/>
-            <a:r>
-              <a:rPr sz="1400" b="0">
-                <a:solidFill>
-                  <a:srgbClr val="1C2430"/>
-                </a:solidFill>
-                <a:latin typeface="WenQuanYi Micro Hei"/>
-                <a:ea typeface="WenQuanYi Micro Hei"/>
-                <a:cs typeface="WenQuanYi Micro Hei"/>
-              </a:rPr>
-              <a:t>动作播放</a:t>
-            </a:r>
-          </a:p>
-        </p:txBody>
-      </p:sp>
-      <p:sp>
-        <p:nvSpPr>
-          <p:cNvPr id="36" name="TextBox 35"/>
-          <p:cNvSpPr txBox="1"/>
-          <p:nvPr/>
-        </p:nvSpPr>
-        <p:spPr>
-          <a:xfrm>
-            <a:off x="3017520" y="5559552"/>
-            <a:ext cx="3566160" cy="365760"/>
-          </a:xfrm>
-          <a:prstGeom prst="rect">
-            <a:avLst/>
-          </a:prstGeom>
-          <a:noFill/>
-        </p:spPr>
-        <p:txBody>
-          <a:bodyPr wrap="square"/>
-          <a:lstStyle/>
-          <a:p>
-            <a:pPr algn="l"/>
-            <a:r>
-              <a:rPr sz="1400" b="0">
-                <a:solidFill>
-                  <a:srgbClr val="1C2430"/>
-                </a:solidFill>
-                <a:latin typeface="WenQuanYi Micro Hei"/>
-                <a:ea typeface="WenQuanYi Micro Hei"/>
-                <a:cs typeface="WenQuanYi Micro Hei"/>
-              </a:rPr>
-              <a:t>约 2.3–8.8 秒</a:t>
-            </a:r>
-          </a:p>
-        </p:txBody>
-      </p:sp>
-      <p:sp>
-        <p:nvSpPr>
-          <p:cNvPr id="37" name="TextBox 36"/>
-          <p:cNvSpPr txBox="1"/>
-          <p:nvPr/>
-        </p:nvSpPr>
-        <p:spPr>
-          <a:xfrm>
-            <a:off x="6766560" y="5559552"/>
-            <a:ext cx="4663440" cy="365760"/>
-          </a:xfrm>
-          <a:prstGeom prst="rect">
-            <a:avLst/>
-          </a:prstGeom>
-          <a:noFill/>
-        </p:spPr>
-        <p:txBody>
-          <a:bodyPr wrap="square"/>
-          <a:lstStyle/>
-          <a:p>
-            <a:pPr algn="l"/>
-            <a:r>
-              <a:rPr sz="1400" b="0">
-                <a:solidFill>
-                  <a:srgbClr val="1C2430"/>
-                </a:solidFill>
-                <a:latin typeface="WenQuanYi Micro Hei"/>
-                <a:ea typeface="WenQuanYi Micro Hei"/>
-                <a:cs typeface="WenQuanYi Micro Hei"/>
-              </a:rPr>
-              <a:t>身体在动，所以总时间长</a:t>
-            </a:r>
-          </a:p>
-        </p:txBody>
-      </p:sp>
-      <p:sp>
-        <p:nvSpPr>
-          <p:cNvPr id="38" name="TextBox 37"/>
-          <p:cNvSpPr txBox="1"/>
-          <p:nvPr/>
-        </p:nvSpPr>
-        <p:spPr>
-          <a:xfrm>
-            <a:off x="502920" y="6510528"/>
-            <a:ext cx="7315200" cy="256032"/>
-          </a:xfrm>
-          <a:prstGeom prst="rect">
-            <a:avLst/>
-          </a:prstGeom>
-          <a:noFill/>
-        </p:spPr>
-        <p:txBody>
-          <a:bodyPr wrap="square"/>
-          <a:lstStyle/>
-          <a:p>
-            <a:pPr algn="l"/>
-            <a:r>
-              <a:rPr sz="1100" b="0">
-                <a:solidFill>
-                  <a:srgbClr val="5C6B73"/>
-                </a:solidFill>
-                <a:latin typeface="WenQuanYi Micro Hei"/>
-                <a:ea typeface="WenQuanYi Micro Hei"/>
-                <a:cs typeface="WenQuanYi Micro Hei"/>
-              </a:rPr>
-              <a:t>TonyPi 多模态情绪动作  ·  组会汇报</a:t>
-            </a:r>
-          </a:p>
-        </p:txBody>
-      </p:sp>
-      <p:sp>
-        <p:nvSpPr>
-          <p:cNvPr id="39" name="TextBox 38"/>
           <p:cNvSpPr txBox="1"/>
           <p:nvPr/>
         </p:nvSpPr>
@@ -7042,7 +5861,7 @@
                 <a:ea typeface="WenQuanYi Micro Hei"/>
                 <a:cs typeface="WenQuanYi Micro Hei"/>
               </a:rPr>
-              <a:t>存在的问题</a:t>
+              <a:t>真机 17 轮，对照标准路径</a:t>
             </a:r>
           </a:p>
         </p:txBody>
@@ -7077,547 +5896,21 @@
                 <a:ea typeface="WenQuanYi Micro Hei"/>
                 <a:cs typeface="WenQuanYi Micro Hei"/>
               </a:rPr>
-              <a:t>都对应这张表，或对应表里能看到的动作名字。</a:t>
-            </a:r>
-          </a:p>
-        </p:txBody>
-      </p:sp>
-      <p:sp>
-        <p:nvSpPr>
-          <p:cNvPr id="6" name="Rounded Rectangle 5"/>
+              <a:t>来源：wonderpi_latency.csv。这张表还没有 MoMask 的生成时间。</a:t>
+            </a:r>
+          </a:p>
+        </p:txBody>
+      </p:sp>
+      <p:sp>
+        <p:nvSpPr>
+          <p:cNvPr id="6" name="Rectangle 5"/>
           <p:cNvSpPr/>
           <p:nvPr/>
         </p:nvSpPr>
         <p:spPr>
           <a:xfrm>
-            <a:off x="411480" y="1325880"/>
-            <a:ext cx="5623560" cy="2194560"/>
-          </a:xfrm>
-          <a:prstGeom prst="roundRect">
-            <a:avLst/>
-          </a:prstGeom>
-          <a:solidFill>
-            <a:srgbClr val="FFFFFF"/>
-          </a:solidFill>
-          <a:ln>
-            <a:solidFill>
-              <a:srgbClr val="E2DBD2"/>
-            </a:solidFill>
-          </a:ln>
-          <a:effectLst/>
-        </p:spPr>
-        <p:style>
-          <a:lnRef idx="1">
-            <a:schemeClr val="accent1"/>
-          </a:lnRef>
-          <a:fillRef idx="3">
-            <a:schemeClr val="accent1"/>
-          </a:fillRef>
-          <a:effectRef idx="2">
-            <a:schemeClr val="accent1"/>
-          </a:effectRef>
-          <a:fontRef idx="minor">
-            <a:schemeClr val="lt1"/>
-          </a:fontRef>
-        </p:style>
-        <p:txBody>
-          <a:bodyPr rtlCol="0" anchor="ctr"/>
-          <a:lstStyle/>
-          <a:p>
-            <a:pPr algn="ctr"/>
-          </a:p>
-        </p:txBody>
-      </p:sp>
-      <p:sp>
-        <p:nvSpPr>
-          <p:cNvPr id="7" name="Rectangle 6"/>
-          <p:cNvSpPr/>
-          <p:nvPr/>
-        </p:nvSpPr>
-        <p:spPr>
-          <a:xfrm>
-            <a:off x="411480" y="1325880"/>
-            <a:ext cx="91440" cy="2194560"/>
-          </a:xfrm>
-          <a:prstGeom prst="rect">
-            <a:avLst/>
-          </a:prstGeom>
-          <a:solidFill>
-            <a:srgbClr val="A33B2B"/>
-          </a:solidFill>
-          <a:ln>
-            <a:noFill/>
-          </a:ln>
-          <a:effectLst/>
-        </p:spPr>
-        <p:style>
-          <a:lnRef idx="1">
-            <a:schemeClr val="accent1"/>
-          </a:lnRef>
-          <a:fillRef idx="3">
-            <a:schemeClr val="accent1"/>
-          </a:fillRef>
-          <a:effectRef idx="2">
-            <a:schemeClr val="accent1"/>
-          </a:effectRef>
-          <a:fontRef idx="minor">
-            <a:schemeClr val="lt1"/>
-          </a:fontRef>
-        </p:style>
-        <p:txBody>
-          <a:bodyPr rtlCol="0" anchor="ctr"/>
-          <a:lstStyle/>
-          <a:p>
-            <a:pPr algn="ctr"/>
-          </a:p>
-        </p:txBody>
-      </p:sp>
-      <p:sp>
-        <p:nvSpPr>
-          <p:cNvPr id="8" name="TextBox 7"/>
-          <p:cNvSpPr txBox="1"/>
-          <p:nvPr/>
-        </p:nvSpPr>
-        <p:spPr>
-          <a:xfrm>
-            <a:off x="685800" y="1508760"/>
-            <a:ext cx="5120640" cy="411480"/>
-          </a:xfrm>
-          <a:prstGeom prst="rect">
-            <a:avLst/>
-          </a:prstGeom>
-          <a:noFill/>
-        </p:spPr>
-        <p:txBody>
-          <a:bodyPr wrap="square"/>
-          <a:lstStyle/>
-          <a:p>
-            <a:pPr algn="l"/>
-            <a:r>
-              <a:rPr sz="1800" b="1">
-                <a:solidFill>
-                  <a:srgbClr val="1B3A4B"/>
-                </a:solidFill>
-                <a:latin typeface="WenQuanYi Micro Hei"/>
-                <a:ea typeface="WenQuanYi Micro Hei"/>
-                <a:cs typeface="WenQuanYi Micro Hei"/>
-              </a:rPr>
-              <a:t>语音完全没有唤醒</a:t>
-            </a:r>
-          </a:p>
-        </p:txBody>
-      </p:sp>
-      <p:sp>
-        <p:nvSpPr>
-          <p:cNvPr id="9" name="TextBox 8"/>
-          <p:cNvSpPr txBox="1"/>
-          <p:nvPr/>
-        </p:nvSpPr>
-        <p:spPr>
-          <a:xfrm>
-            <a:off x="685800" y="2011680"/>
-            <a:ext cx="5120640" cy="1325880"/>
-          </a:xfrm>
-          <a:prstGeom prst="rect">
-            <a:avLst/>
-          </a:prstGeom>
-          <a:noFill/>
-        </p:spPr>
-        <p:txBody>
-          <a:bodyPr wrap="square"/>
-          <a:lstStyle/>
-          <a:p>
-            <a:pPr algn="l"/>
-            <a:r>
-              <a:rPr sz="1500" b="0">
-                <a:solidFill>
-                  <a:srgbClr val="1C2430"/>
-                </a:solidFill>
-                <a:latin typeface="WenQuanYi Micro Hei"/>
-                <a:ea typeface="WenQuanYi Micro Hei"/>
-                <a:cs typeface="WenQuanYi Micro Hei"/>
-              </a:rPr>
-              <a:t>17 轮的触发只有 enter 和 face。录音、识别、文本都是空的，连识别错误都没有。程序没收到「小幻小幻」，语音小板没有把词送进 /dev/ttyUSB0。</a:t>
-            </a:r>
-          </a:p>
-        </p:txBody>
-      </p:sp>
-      <p:sp>
-        <p:nvSpPr>
-          <p:cNvPr id="10" name="Rounded Rectangle 9"/>
-          <p:cNvSpPr/>
-          <p:nvPr/>
-        </p:nvSpPr>
-        <p:spPr>
-          <a:xfrm>
-            <a:off x="6263640" y="1325880"/>
-            <a:ext cx="5623560" cy="2194560"/>
-          </a:xfrm>
-          <a:prstGeom prst="roundRect">
-            <a:avLst/>
-          </a:prstGeom>
-          <a:solidFill>
-            <a:srgbClr val="FFFFFF"/>
-          </a:solidFill>
-          <a:ln>
-            <a:solidFill>
-              <a:srgbClr val="E2DBD2"/>
-            </a:solidFill>
-          </a:ln>
-          <a:effectLst/>
-        </p:spPr>
-        <p:style>
-          <a:lnRef idx="1">
-            <a:schemeClr val="accent1"/>
-          </a:lnRef>
-          <a:fillRef idx="3">
-            <a:schemeClr val="accent1"/>
-          </a:fillRef>
-          <a:effectRef idx="2">
-            <a:schemeClr val="accent1"/>
-          </a:effectRef>
-          <a:fontRef idx="minor">
-            <a:schemeClr val="lt1"/>
-          </a:fontRef>
-        </p:style>
-        <p:txBody>
-          <a:bodyPr rtlCol="0" anchor="ctr"/>
-          <a:lstStyle/>
-          <a:p>
-            <a:pPr algn="ctr"/>
-          </a:p>
-        </p:txBody>
-      </p:sp>
-      <p:sp>
-        <p:nvSpPr>
-          <p:cNvPr id="11" name="Rectangle 10"/>
-          <p:cNvSpPr/>
-          <p:nvPr/>
-        </p:nvSpPr>
-        <p:spPr>
-          <a:xfrm>
-            <a:off x="6263640" y="1325880"/>
-            <a:ext cx="91440" cy="2194560"/>
-          </a:xfrm>
-          <a:prstGeom prst="rect">
-            <a:avLst/>
-          </a:prstGeom>
-          <a:solidFill>
-            <a:srgbClr val="8A5A12"/>
-          </a:solidFill>
-          <a:ln>
-            <a:noFill/>
-          </a:ln>
-          <a:effectLst/>
-        </p:spPr>
-        <p:style>
-          <a:lnRef idx="1">
-            <a:schemeClr val="accent1"/>
-          </a:lnRef>
-          <a:fillRef idx="3">
-            <a:schemeClr val="accent1"/>
-          </a:fillRef>
-          <a:effectRef idx="2">
-            <a:schemeClr val="accent1"/>
-          </a:effectRef>
-          <a:fontRef idx="minor">
-            <a:schemeClr val="lt1"/>
-          </a:fontRef>
-        </p:style>
-        <p:txBody>
-          <a:bodyPr rtlCol="0" anchor="ctr"/>
-          <a:lstStyle/>
-          <a:p>
-            <a:pPr algn="ctr"/>
-          </a:p>
-        </p:txBody>
-      </p:sp>
-      <p:sp>
-        <p:nvSpPr>
-          <p:cNvPr id="12" name="TextBox 11"/>
-          <p:cNvSpPr txBox="1"/>
-          <p:nvPr/>
-        </p:nvSpPr>
-        <p:spPr>
-          <a:xfrm>
-            <a:off x="6537960" y="1508760"/>
-            <a:ext cx="5120640" cy="411480"/>
-          </a:xfrm>
-          <a:prstGeom prst="rect">
-            <a:avLst/>
-          </a:prstGeom>
-          <a:noFill/>
-        </p:spPr>
-        <p:txBody>
-          <a:bodyPr wrap="square"/>
-          <a:lstStyle/>
-          <a:p>
-            <a:pPr algn="l"/>
-            <a:r>
-              <a:rPr sz="1800" b="1">
-                <a:solidFill>
-                  <a:srgbClr val="1B3A4B"/>
-                </a:solidFill>
-                <a:latin typeface="WenQuanYi Micro Hei"/>
-                <a:ea typeface="WenQuanYi Micro Hei"/>
-                <a:cs typeface="WenQuanYi Micro Hei"/>
-              </a:rPr>
-              <a:t>端侧大模型没有跑</a:t>
-            </a:r>
-          </a:p>
-        </p:txBody>
-      </p:sp>
-      <p:sp>
-        <p:nvSpPr>
-          <p:cNvPr id="13" name="TextBox 12"/>
-          <p:cNvSpPr txBox="1"/>
-          <p:nvPr/>
-        </p:nvSpPr>
-        <p:spPr>
-          <a:xfrm>
-            <a:off x="6537960" y="2011680"/>
-            <a:ext cx="5120640" cy="1325880"/>
-          </a:xfrm>
-          <a:prstGeom prst="rect">
-            <a:avLst/>
-          </a:prstGeom>
-          <a:noFill/>
-        </p:spPr>
-        <p:txBody>
-          <a:bodyPr wrap="square"/>
-          <a:lstStyle/>
-          <a:p>
-            <a:pPr algn="l"/>
-            <a:r>
-              <a:rPr sz="1500" b="0">
-                <a:solidFill>
-                  <a:srgbClr val="1C2430"/>
-                </a:solidFill>
-                <a:latin typeface="WenQuanYi Micro Hei"/>
-                <a:ea typeface="WenQuanYi Micro Hei"/>
-                <a:cs typeface="WenQuanYi Micro Hei"/>
-              </a:rPr>
-              <a:t>权重文件在机器人上，运行库没有。每一行都退回规则，决策约 0.001 秒。这不是 Qwen 的耗时。</a:t>
-            </a:r>
-          </a:p>
-        </p:txBody>
-      </p:sp>
-      <p:sp>
-        <p:nvSpPr>
-          <p:cNvPr id="14" name="Rounded Rectangle 13"/>
-          <p:cNvSpPr/>
-          <p:nvPr/>
-        </p:nvSpPr>
-        <p:spPr>
-          <a:xfrm>
-            <a:off x="411480" y="3703320"/>
-            <a:ext cx="5623560" cy="2194560"/>
-          </a:xfrm>
-          <a:prstGeom prst="roundRect">
-            <a:avLst/>
-          </a:prstGeom>
-          <a:solidFill>
-            <a:srgbClr val="FFFFFF"/>
-          </a:solidFill>
-          <a:ln>
-            <a:solidFill>
-              <a:srgbClr val="E2DBD2"/>
-            </a:solidFill>
-          </a:ln>
-          <a:effectLst/>
-        </p:spPr>
-        <p:style>
-          <a:lnRef idx="1">
-            <a:schemeClr val="accent1"/>
-          </a:lnRef>
-          <a:fillRef idx="3">
-            <a:schemeClr val="accent1"/>
-          </a:fillRef>
-          <a:effectRef idx="2">
-            <a:schemeClr val="accent1"/>
-          </a:effectRef>
-          <a:fontRef idx="minor">
-            <a:schemeClr val="lt1"/>
-          </a:fontRef>
-        </p:style>
-        <p:txBody>
-          <a:bodyPr rtlCol="0" anchor="ctr"/>
-          <a:lstStyle/>
-          <a:p>
-            <a:pPr algn="ctr"/>
-          </a:p>
-        </p:txBody>
-      </p:sp>
-      <p:sp>
-        <p:nvSpPr>
-          <p:cNvPr id="15" name="Rectangle 14"/>
-          <p:cNvSpPr/>
-          <p:nvPr/>
-        </p:nvSpPr>
-        <p:spPr>
-          <a:xfrm>
-            <a:off x="411480" y="3703320"/>
-            <a:ext cx="91440" cy="2194560"/>
-          </a:xfrm>
-          <a:prstGeom prst="rect">
-            <a:avLst/>
-          </a:prstGeom>
-          <a:solidFill>
-            <a:srgbClr val="C45C26"/>
-          </a:solidFill>
-          <a:ln>
-            <a:noFill/>
-          </a:ln>
-          <a:effectLst/>
-        </p:spPr>
-        <p:style>
-          <a:lnRef idx="1">
-            <a:schemeClr val="accent1"/>
-          </a:lnRef>
-          <a:fillRef idx="3">
-            <a:schemeClr val="accent1"/>
-          </a:fillRef>
-          <a:effectRef idx="2">
-            <a:schemeClr val="accent1"/>
-          </a:effectRef>
-          <a:fontRef idx="minor">
-            <a:schemeClr val="lt1"/>
-          </a:fontRef>
-        </p:style>
-        <p:txBody>
-          <a:bodyPr rtlCol="0" anchor="ctr"/>
-          <a:lstStyle/>
-          <a:p>
-            <a:pPr algn="ctr"/>
-          </a:p>
-        </p:txBody>
-      </p:sp>
-      <p:sp>
-        <p:nvSpPr>
-          <p:cNvPr id="16" name="TextBox 15"/>
-          <p:cNvSpPr txBox="1"/>
-          <p:nvPr/>
-        </p:nvSpPr>
-        <p:spPr>
-          <a:xfrm>
-            <a:off x="685800" y="3886200"/>
-            <a:ext cx="5120640" cy="411480"/>
-          </a:xfrm>
-          <a:prstGeom prst="rect">
-            <a:avLst/>
-          </a:prstGeom>
-          <a:noFill/>
-        </p:spPr>
-        <p:txBody>
-          <a:bodyPr wrap="square"/>
-          <a:lstStyle/>
-          <a:p>
-            <a:pPr algn="l"/>
-            <a:r>
-              <a:rPr sz="1800" b="1">
-                <a:solidFill>
-                  <a:srgbClr val="1B3A4B"/>
-                </a:solidFill>
-                <a:latin typeface="WenQuanYi Micro Hei"/>
-                <a:ea typeface="WenQuanYi Micro Hei"/>
-                <a:cs typeface="WenQuanYi Micro Hei"/>
-              </a:rPr>
-              <a:t>动作看起来在重复</a:t>
-            </a:r>
-          </a:p>
-        </p:txBody>
-      </p:sp>
-      <p:sp>
-        <p:nvSpPr>
-          <p:cNvPr id="17" name="TextBox 16"/>
-          <p:cNvSpPr txBox="1"/>
-          <p:nvPr/>
-        </p:nvSpPr>
-        <p:spPr>
-          <a:xfrm>
-            <a:off x="685800" y="4389120"/>
-            <a:ext cx="5120640" cy="1325880"/>
-          </a:xfrm>
-          <a:prstGeom prst="rect">
-            <a:avLst/>
-          </a:prstGeom>
-          <a:noFill/>
-        </p:spPr>
-        <p:txBody>
-          <a:bodyPr wrap="square"/>
-          <a:lstStyle/>
-          <a:p>
-            <a:pPr algn="l"/>
-            <a:r>
-              <a:rPr sz="1500" b="0">
-                <a:solidFill>
-                  <a:srgbClr val="1C2430"/>
-                </a:solidFill>
-                <a:latin typeface="WenQuanYi Micro Hei"/>
-                <a:ea typeface="WenQuanYi Micro Hei"/>
-                <a:cs typeface="WenQuanYi Micro Hei"/>
-              </a:rPr>
-              <a:t>规则只禁止完全同名的片段，而且只禁 3 轮。左转和右转算两个名字，所以隔几轮又是一次转身。</a:t>
-            </a:r>
-          </a:p>
-        </p:txBody>
-      </p:sp>
-      <p:sp>
-        <p:nvSpPr>
-          <p:cNvPr id="18" name="Rounded Rectangle 17"/>
-          <p:cNvSpPr/>
-          <p:nvPr/>
-        </p:nvSpPr>
-        <p:spPr>
-          <a:xfrm>
-            <a:off x="6263640" y="3703320"/>
-            <a:ext cx="5623560" cy="2194560"/>
-          </a:xfrm>
-          <a:prstGeom prst="roundRect">
-            <a:avLst/>
-          </a:prstGeom>
-          <a:solidFill>
-            <a:srgbClr val="FFFFFF"/>
-          </a:solidFill>
-          <a:ln>
-            <a:solidFill>
-              <a:srgbClr val="E2DBD2"/>
-            </a:solidFill>
-          </a:ln>
-          <a:effectLst/>
-        </p:spPr>
-        <p:style>
-          <a:lnRef idx="1">
-            <a:schemeClr val="accent1"/>
-          </a:lnRef>
-          <a:fillRef idx="3">
-            <a:schemeClr val="accent1"/>
-          </a:fillRef>
-          <a:effectRef idx="2">
-            <a:schemeClr val="accent1"/>
-          </a:effectRef>
-          <a:fontRef idx="minor">
-            <a:schemeClr val="lt1"/>
-          </a:fontRef>
-        </p:style>
-        <p:txBody>
-          <a:bodyPr rtlCol="0" anchor="ctr"/>
-          <a:lstStyle/>
-          <a:p>
-            <a:pPr algn="ctr"/>
-          </a:p>
-        </p:txBody>
-      </p:sp>
-      <p:sp>
-        <p:nvSpPr>
-          <p:cNvPr id="19" name="Rectangle 18"/>
-          <p:cNvSpPr/>
-          <p:nvPr/>
-        </p:nvSpPr>
-        <p:spPr>
-          <a:xfrm>
-            <a:off x="6263640" y="3703320"/>
-            <a:ext cx="91440" cy="2194560"/>
+            <a:off x="457200" y="1280160"/>
+            <a:ext cx="11247120" cy="438912"/>
           </a:xfrm>
           <a:prstGeom prst="rect">
             <a:avLst/>
@@ -7654,35 +5947,517 @@
       </p:sp>
       <p:sp>
         <p:nvSpPr>
+          <p:cNvPr id="7" name="TextBox 6"/>
+          <p:cNvSpPr txBox="1"/>
+          <p:nvPr/>
+        </p:nvSpPr>
+        <p:spPr>
+          <a:xfrm>
+            <a:off x="640080" y="1353312"/>
+            <a:ext cx="3200400" cy="292608"/>
+          </a:xfrm>
+          <a:prstGeom prst="rect">
+            <a:avLst/>
+          </a:prstGeom>
+          <a:noFill/>
+        </p:spPr>
+        <p:txBody>
+          <a:bodyPr wrap="square"/>
+          <a:lstStyle/>
+          <a:p>
+            <a:pPr algn="l"/>
+            <a:r>
+              <a:rPr sz="1400" b="1">
+                <a:solidFill>
+                  <a:srgbClr val="FFFFFF"/>
+                </a:solidFill>
+                <a:latin typeface="WenQuanYi Micro Hei"/>
+                <a:ea typeface="WenQuanYi Micro Hei"/>
+                <a:cs typeface="WenQuanYi Micro Hei"/>
+              </a:rPr>
+              <a:t>标准路径上的一步</a:t>
+            </a:r>
+          </a:p>
+        </p:txBody>
+      </p:sp>
+      <p:sp>
+        <p:nvSpPr>
+          <p:cNvPr id="8" name="TextBox 7"/>
+          <p:cNvSpPr txBox="1"/>
+          <p:nvPr/>
+        </p:nvSpPr>
+        <p:spPr>
+          <a:xfrm>
+            <a:off x="3931920" y="1353312"/>
+            <a:ext cx="3200400" cy="292608"/>
+          </a:xfrm>
+          <a:prstGeom prst="rect">
+            <a:avLst/>
+          </a:prstGeom>
+          <a:noFill/>
+        </p:spPr>
+        <p:txBody>
+          <a:bodyPr wrap="square"/>
+          <a:lstStyle/>
+          <a:p>
+            <a:pPr algn="l"/>
+            <a:r>
+              <a:rPr sz="1400" b="1">
+                <a:solidFill>
+                  <a:srgbClr val="FFFFFF"/>
+                </a:solidFill>
+                <a:latin typeface="WenQuanYi Micro Hei"/>
+                <a:ea typeface="WenQuanYi Micro Hei"/>
+                <a:cs typeface="WenQuanYi Micro Hei"/>
+              </a:rPr>
+              <a:t>这 17 轮</a:t>
+            </a:r>
+          </a:p>
+        </p:txBody>
+      </p:sp>
+      <p:sp>
+        <p:nvSpPr>
+          <p:cNvPr id="9" name="TextBox 8"/>
+          <p:cNvSpPr txBox="1"/>
+          <p:nvPr/>
+        </p:nvSpPr>
+        <p:spPr>
+          <a:xfrm>
+            <a:off x="8686800" y="1353312"/>
+            <a:ext cx="3200400" cy="292608"/>
+          </a:xfrm>
+          <a:prstGeom prst="rect">
+            <a:avLst/>
+          </a:prstGeom>
+          <a:noFill/>
+        </p:spPr>
+        <p:txBody>
+          <a:bodyPr wrap="square"/>
+          <a:lstStyle/>
+          <a:p>
+            <a:pPr algn="l"/>
+            <a:r>
+              <a:rPr sz="1400" b="1">
+                <a:solidFill>
+                  <a:srgbClr val="FFFFFF"/>
+                </a:solidFill>
+                <a:latin typeface="WenQuanYi Micro Hei"/>
+                <a:ea typeface="WenQuanYi Micro Hei"/>
+                <a:cs typeface="WenQuanYi Micro Hei"/>
+              </a:rPr>
+              <a:t>能不能当成完成</a:t>
+            </a:r>
+          </a:p>
+        </p:txBody>
+      </p:sp>
+      <p:sp>
+        <p:nvSpPr>
+          <p:cNvPr id="10" name="Rectangle 9"/>
+          <p:cNvSpPr/>
+          <p:nvPr/>
+        </p:nvSpPr>
+        <p:spPr>
+          <a:xfrm>
+            <a:off x="457200" y="1719072"/>
+            <a:ext cx="11247120" cy="713232"/>
+          </a:xfrm>
+          <a:prstGeom prst="rect">
+            <a:avLst/>
+          </a:prstGeom>
+          <a:solidFill>
+            <a:srgbClr val="FFFFFF"/>
+          </a:solidFill>
+          <a:ln>
+            <a:noFill/>
+          </a:ln>
+          <a:effectLst/>
+        </p:spPr>
+        <p:style>
+          <a:lnRef idx="1">
+            <a:schemeClr val="accent1"/>
+          </a:lnRef>
+          <a:fillRef idx="3">
+            <a:schemeClr val="accent1"/>
+          </a:fillRef>
+          <a:effectRef idx="2">
+            <a:schemeClr val="accent1"/>
+          </a:effectRef>
+          <a:fontRef idx="minor">
+            <a:schemeClr val="lt1"/>
+          </a:fontRef>
+        </p:style>
+        <p:txBody>
+          <a:bodyPr rtlCol="0" anchor="ctr"/>
+          <a:lstStyle/>
+          <a:p>
+            <a:pPr algn="ctr"/>
+          </a:p>
+        </p:txBody>
+      </p:sp>
+      <p:sp>
+        <p:nvSpPr>
+          <p:cNvPr id="11" name="TextBox 10"/>
+          <p:cNvSpPr txBox="1"/>
+          <p:nvPr/>
+        </p:nvSpPr>
+        <p:spPr>
+          <a:xfrm>
+            <a:off x="640080" y="1883664"/>
+            <a:ext cx="3108960" cy="384048"/>
+          </a:xfrm>
+          <a:prstGeom prst="rect">
+            <a:avLst/>
+          </a:prstGeom>
+          <a:noFill/>
+        </p:spPr>
+        <p:txBody>
+          <a:bodyPr wrap="square"/>
+          <a:lstStyle/>
+          <a:p>
+            <a:pPr algn="l"/>
+            <a:r>
+              <a:rPr sz="1600" b="1">
+                <a:solidFill>
+                  <a:srgbClr val="1C2430"/>
+                </a:solidFill>
+                <a:latin typeface="WenQuanYi Micro Hei"/>
+                <a:ea typeface="WenQuanYi Micro Hei"/>
+                <a:cs typeface="WenQuanYi Micro Hei"/>
+              </a:rPr>
+              <a:t>视觉输入</a:t>
+            </a:r>
+          </a:p>
+        </p:txBody>
+      </p:sp>
+      <p:sp>
+        <p:nvSpPr>
+          <p:cNvPr id="12" name="TextBox 11"/>
+          <p:cNvSpPr txBox="1"/>
+          <p:nvPr/>
+        </p:nvSpPr>
+        <p:spPr>
+          <a:xfrm>
+            <a:off x="3931920" y="1883664"/>
+            <a:ext cx="4572000" cy="384048"/>
+          </a:xfrm>
+          <a:prstGeom prst="rect">
+            <a:avLst/>
+          </a:prstGeom>
+          <a:noFill/>
+        </p:spPr>
+        <p:txBody>
+          <a:bodyPr wrap="square"/>
+          <a:lstStyle/>
+          <a:p>
+            <a:pPr algn="l"/>
+            <a:r>
+              <a:rPr sz="1600" b="0">
+                <a:solidFill>
+                  <a:srgbClr val="1C2430"/>
+                </a:solidFill>
+                <a:latin typeface="WenQuanYi Micro Hei"/>
+                <a:ea typeface="WenQuanYi Micro Hei"/>
+                <a:cs typeface="WenQuanYi Micro Hei"/>
+              </a:rPr>
+              <a:t>16 轮由脸触发，四类情绪都有</a:t>
+            </a:r>
+          </a:p>
+        </p:txBody>
+      </p:sp>
+      <p:sp>
+        <p:nvSpPr>
+          <p:cNvPr id="13" name="TextBox 12"/>
+          <p:cNvSpPr txBox="1"/>
+          <p:nvPr/>
+        </p:nvSpPr>
+        <p:spPr>
+          <a:xfrm>
+            <a:off x="8686800" y="1883664"/>
+            <a:ext cx="2560320" cy="384048"/>
+          </a:xfrm>
+          <a:prstGeom prst="rect">
+            <a:avLst/>
+          </a:prstGeom>
+          <a:noFill/>
+        </p:spPr>
+        <p:txBody>
+          <a:bodyPr wrap="square"/>
+          <a:lstStyle/>
+          <a:p>
+            <a:pPr algn="l"/>
+            <a:r>
+              <a:rPr sz="1600" b="1">
+                <a:solidFill>
+                  <a:srgbClr val="2F6F4E"/>
+                </a:solidFill>
+                <a:latin typeface="WenQuanYi Micro Hei"/>
+                <a:ea typeface="WenQuanYi Micro Hei"/>
+                <a:cs typeface="WenQuanYi Micro Hei"/>
+              </a:rPr>
+              <a:t>能</a:t>
+            </a:r>
+          </a:p>
+        </p:txBody>
+      </p:sp>
+      <p:sp>
+        <p:nvSpPr>
+          <p:cNvPr id="14" name="Rectangle 13"/>
+          <p:cNvSpPr/>
+          <p:nvPr/>
+        </p:nvSpPr>
+        <p:spPr>
+          <a:xfrm>
+            <a:off x="457200" y="2432304"/>
+            <a:ext cx="11247120" cy="713232"/>
+          </a:xfrm>
+          <a:prstGeom prst="rect">
+            <a:avLst/>
+          </a:prstGeom>
+          <a:solidFill>
+            <a:srgbClr val="FBF8F4"/>
+          </a:solidFill>
+          <a:ln>
+            <a:noFill/>
+          </a:ln>
+          <a:effectLst/>
+        </p:spPr>
+        <p:style>
+          <a:lnRef idx="1">
+            <a:schemeClr val="accent1"/>
+          </a:lnRef>
+          <a:fillRef idx="3">
+            <a:schemeClr val="accent1"/>
+          </a:fillRef>
+          <a:effectRef idx="2">
+            <a:schemeClr val="accent1"/>
+          </a:effectRef>
+          <a:fontRef idx="minor">
+            <a:schemeClr val="lt1"/>
+          </a:fontRef>
+        </p:style>
+        <p:txBody>
+          <a:bodyPr rtlCol="0" anchor="ctr"/>
+          <a:lstStyle/>
+          <a:p>
+            <a:pPr algn="ctr"/>
+          </a:p>
+        </p:txBody>
+      </p:sp>
+      <p:sp>
+        <p:nvSpPr>
+          <p:cNvPr id="15" name="TextBox 14"/>
+          <p:cNvSpPr txBox="1"/>
+          <p:nvPr/>
+        </p:nvSpPr>
+        <p:spPr>
+          <a:xfrm>
+            <a:off x="640080" y="2596896"/>
+            <a:ext cx="3108960" cy="384048"/>
+          </a:xfrm>
+          <a:prstGeom prst="rect">
+            <a:avLst/>
+          </a:prstGeom>
+          <a:noFill/>
+        </p:spPr>
+        <p:txBody>
+          <a:bodyPr wrap="square"/>
+          <a:lstStyle/>
+          <a:p>
+            <a:pPr algn="l"/>
+            <a:r>
+              <a:rPr sz="1600" b="1">
+                <a:solidFill>
+                  <a:srgbClr val="1C2430"/>
+                </a:solidFill>
+                <a:latin typeface="WenQuanYi Micro Hei"/>
+                <a:ea typeface="WenQuanYi Micro Hei"/>
+                <a:cs typeface="WenQuanYi Micro Hei"/>
+              </a:rPr>
+              <a:t>语音输入</a:t>
+            </a:r>
+          </a:p>
+        </p:txBody>
+      </p:sp>
+      <p:sp>
+        <p:nvSpPr>
+          <p:cNvPr id="16" name="TextBox 15"/>
+          <p:cNvSpPr txBox="1"/>
+          <p:nvPr/>
+        </p:nvSpPr>
+        <p:spPr>
+          <a:xfrm>
+            <a:off x="3931920" y="2596896"/>
+            <a:ext cx="4572000" cy="384048"/>
+          </a:xfrm>
+          <a:prstGeom prst="rect">
+            <a:avLst/>
+          </a:prstGeom>
+          <a:noFill/>
+        </p:spPr>
+        <p:txBody>
+          <a:bodyPr wrap="square"/>
+          <a:lstStyle/>
+          <a:p>
+            <a:pPr algn="l"/>
+            <a:r>
+              <a:rPr sz="1600" b="0">
+                <a:solidFill>
+                  <a:srgbClr val="1C2430"/>
+                </a:solidFill>
+                <a:latin typeface="WenQuanYi Micro Hei"/>
+                <a:ea typeface="WenQuanYi Micro Hei"/>
+                <a:cs typeface="WenQuanYi Micro Hei"/>
+              </a:rPr>
+              <a:t>录音和识别都是 0，没有唤醒行</a:t>
+            </a:r>
+          </a:p>
+        </p:txBody>
+      </p:sp>
+      <p:sp>
+        <p:nvSpPr>
+          <p:cNvPr id="17" name="TextBox 16"/>
+          <p:cNvSpPr txBox="1"/>
+          <p:nvPr/>
+        </p:nvSpPr>
+        <p:spPr>
+          <a:xfrm>
+            <a:off x="8686800" y="2596896"/>
+            <a:ext cx="2560320" cy="384048"/>
+          </a:xfrm>
+          <a:prstGeom prst="rect">
+            <a:avLst/>
+          </a:prstGeom>
+          <a:noFill/>
+        </p:spPr>
+        <p:txBody>
+          <a:bodyPr wrap="square"/>
+          <a:lstStyle/>
+          <a:p>
+            <a:pPr algn="l"/>
+            <a:r>
+              <a:rPr sz="1600" b="1">
+                <a:solidFill>
+                  <a:srgbClr val="A33B2B"/>
+                </a:solidFill>
+                <a:latin typeface="WenQuanYi Micro Hei"/>
+                <a:ea typeface="WenQuanYi Micro Hei"/>
+                <a:cs typeface="WenQuanYi Micro Hei"/>
+              </a:rPr>
+              <a:t>不能</a:t>
+            </a:r>
+          </a:p>
+        </p:txBody>
+      </p:sp>
+      <p:sp>
+        <p:nvSpPr>
+          <p:cNvPr id="18" name="Rectangle 17"/>
+          <p:cNvSpPr/>
+          <p:nvPr/>
+        </p:nvSpPr>
+        <p:spPr>
+          <a:xfrm>
+            <a:off x="457200" y="3145536"/>
+            <a:ext cx="11247120" cy="713232"/>
+          </a:xfrm>
+          <a:prstGeom prst="rect">
+            <a:avLst/>
+          </a:prstGeom>
+          <a:solidFill>
+            <a:srgbClr val="FFFFFF"/>
+          </a:solidFill>
+          <a:ln>
+            <a:noFill/>
+          </a:ln>
+          <a:effectLst/>
+        </p:spPr>
+        <p:style>
+          <a:lnRef idx="1">
+            <a:schemeClr val="accent1"/>
+          </a:lnRef>
+          <a:fillRef idx="3">
+            <a:schemeClr val="accent1"/>
+          </a:fillRef>
+          <a:effectRef idx="2">
+            <a:schemeClr val="accent1"/>
+          </a:effectRef>
+          <a:fontRef idx="minor">
+            <a:schemeClr val="lt1"/>
+          </a:fontRef>
+        </p:style>
+        <p:txBody>
+          <a:bodyPr rtlCol="0" anchor="ctr"/>
+          <a:lstStyle/>
+          <a:p>
+            <a:pPr algn="ctr"/>
+          </a:p>
+        </p:txBody>
+      </p:sp>
+      <p:sp>
+        <p:nvSpPr>
+          <p:cNvPr id="19" name="TextBox 18"/>
+          <p:cNvSpPr txBox="1"/>
+          <p:nvPr/>
+        </p:nvSpPr>
+        <p:spPr>
+          <a:xfrm>
+            <a:off x="640080" y="3310128"/>
+            <a:ext cx="3108960" cy="384048"/>
+          </a:xfrm>
+          <a:prstGeom prst="rect">
+            <a:avLst/>
+          </a:prstGeom>
+          <a:noFill/>
+        </p:spPr>
+        <p:txBody>
+          <a:bodyPr wrap="square"/>
+          <a:lstStyle/>
+          <a:p>
+            <a:pPr algn="l"/>
+            <a:r>
+              <a:rPr sz="1600" b="1">
+                <a:solidFill>
+                  <a:srgbClr val="1C2430"/>
+                </a:solidFill>
+                <a:latin typeface="WenQuanYi Micro Hei"/>
+                <a:ea typeface="WenQuanYi Micro Hei"/>
+                <a:cs typeface="WenQuanYi Micro Hei"/>
+              </a:rPr>
+              <a:t>端侧模型判断</a:t>
+            </a:r>
+          </a:p>
+        </p:txBody>
+      </p:sp>
+      <p:sp>
+        <p:nvSpPr>
           <p:cNvPr id="20" name="TextBox 19"/>
           <p:cNvSpPr txBox="1"/>
           <p:nvPr/>
         </p:nvSpPr>
         <p:spPr>
           <a:xfrm>
-            <a:off x="6537960" y="3886200"/>
-            <a:ext cx="5120640" cy="411480"/>
-          </a:xfrm>
-          <a:prstGeom prst="rect">
-            <a:avLst/>
-          </a:prstGeom>
-          <a:noFill/>
-        </p:spPr>
-        <p:txBody>
-          <a:bodyPr wrap="square"/>
-          <a:lstStyle/>
-          <a:p>
-            <a:pPr algn="l"/>
-            <a:r>
-              <a:rPr sz="1800" b="1">
-                <a:solidFill>
-                  <a:srgbClr val="1B3A4B"/>
-                </a:solidFill>
-                <a:latin typeface="WenQuanYi Micro Hei"/>
-                <a:ea typeface="WenQuanYi Micro Hei"/>
-                <a:cs typeface="WenQuanYi Micro Hei"/>
-              </a:rPr>
-              <a:t>手臂和腿会碰到</a:t>
+            <a:off x="3931920" y="3310128"/>
+            <a:ext cx="4572000" cy="384048"/>
+          </a:xfrm>
+          <a:prstGeom prst="rect">
+            <a:avLst/>
+          </a:prstGeom>
+          <a:noFill/>
+        </p:spPr>
+        <p:txBody>
+          <a:bodyPr wrap="square"/>
+          <a:lstStyle/>
+          <a:p>
+            <a:pPr algn="l"/>
+            <a:r>
+              <a:rPr sz="1600" b="0">
+                <a:solidFill>
+                  <a:srgbClr val="1C2430"/>
+                </a:solidFill>
+                <a:latin typeface="WenQuanYi Micro Hei"/>
+                <a:ea typeface="WenQuanYi Micro Hei"/>
+                <a:cs typeface="WenQuanYi Micro Hei"/>
+              </a:rPr>
+              <a:t>请求了端侧模型，实际是规则</a:t>
             </a:r>
           </a:p>
         </p:txBody>
@@ -7695,21 +6470,100 @@
         </p:nvSpPr>
         <p:spPr>
           <a:xfrm>
-            <a:off x="6537960" y="4389120"/>
-            <a:ext cx="5120640" cy="1325880"/>
-          </a:xfrm>
-          <a:prstGeom prst="rect">
-            <a:avLst/>
-          </a:prstGeom>
-          <a:noFill/>
-        </p:spPr>
-        <p:txBody>
-          <a:bodyPr wrap="square"/>
-          <a:lstStyle/>
-          <a:p>
-            <a:pPr algn="l"/>
-            <a:r>
-              <a:rPr sz="1500" b="0">
+            <a:off x="8686800" y="3310128"/>
+            <a:ext cx="2560320" cy="384048"/>
+          </a:xfrm>
+          <a:prstGeom prst="rect">
+            <a:avLst/>
+          </a:prstGeom>
+          <a:noFill/>
+        </p:spPr>
+        <p:txBody>
+          <a:bodyPr wrap="square"/>
+          <a:lstStyle/>
+          <a:p>
+            <a:pPr algn="l"/>
+            <a:r>
+              <a:rPr sz="1600" b="1">
+                <a:solidFill>
+                  <a:srgbClr val="A33B2B"/>
+                </a:solidFill>
+                <a:latin typeface="WenQuanYi Micro Hei"/>
+                <a:ea typeface="WenQuanYi Micro Hei"/>
+                <a:cs typeface="WenQuanYi Micro Hei"/>
+              </a:rPr>
+              <a:t>不能</a:t>
+            </a:r>
+          </a:p>
+        </p:txBody>
+      </p:sp>
+      <p:sp>
+        <p:nvSpPr>
+          <p:cNvPr id="22" name="Rectangle 21"/>
+          <p:cNvSpPr/>
+          <p:nvPr/>
+        </p:nvSpPr>
+        <p:spPr>
+          <a:xfrm>
+            <a:off x="457200" y="3858768"/>
+            <a:ext cx="11247120" cy="713232"/>
+          </a:xfrm>
+          <a:prstGeom prst="rect">
+            <a:avLst/>
+          </a:prstGeom>
+          <a:solidFill>
+            <a:srgbClr val="FBF8F4"/>
+          </a:solidFill>
+          <a:ln>
+            <a:noFill/>
+          </a:ln>
+          <a:effectLst/>
+        </p:spPr>
+        <p:style>
+          <a:lnRef idx="1">
+            <a:schemeClr val="accent1"/>
+          </a:lnRef>
+          <a:fillRef idx="3">
+            <a:schemeClr val="accent1"/>
+          </a:fillRef>
+          <a:effectRef idx="2">
+            <a:schemeClr val="accent1"/>
+          </a:effectRef>
+          <a:fontRef idx="minor">
+            <a:schemeClr val="lt1"/>
+          </a:fontRef>
+        </p:style>
+        <p:txBody>
+          <a:bodyPr rtlCol="0" anchor="ctr"/>
+          <a:lstStyle/>
+          <a:p>
+            <a:pPr algn="ctr"/>
+          </a:p>
+        </p:txBody>
+      </p:sp>
+      <p:sp>
+        <p:nvSpPr>
+          <p:cNvPr id="23" name="TextBox 22"/>
+          <p:cNvSpPr txBox="1"/>
+          <p:nvPr/>
+        </p:nvSpPr>
+        <p:spPr>
+          <a:xfrm>
+            <a:off x="640080" y="4023360"/>
+            <a:ext cx="3108960" cy="384048"/>
+          </a:xfrm>
+          <a:prstGeom prst="rect">
+            <a:avLst/>
+          </a:prstGeom>
+          <a:noFill/>
+        </p:spPr>
+        <p:txBody>
+          <a:bodyPr wrap="square"/>
+          <a:lstStyle/>
+          <a:p>
+            <a:pPr algn="l"/>
+            <a:r>
+              <a:rPr sz="1600" b="1">
                 <a:solidFill>
                   <a:srgbClr val="1C2430"/>
                 </a:solidFill>
@@ -7717,21 +6571,389 @@
                 <a:ea typeface="WenQuanYi Micro Hei"/>
                 <a:cs typeface="WenQuanYi Micro Hei"/>
               </a:rPr>
-              <a:t>举手、挥手可以和鞠躬、下蹲排在同一组。这两组关节叠在一起，前臂会碰到腿。</a:t>
-            </a:r>
-          </a:p>
-        </p:txBody>
-      </p:sp>
-      <p:sp>
-        <p:nvSpPr>
-          <p:cNvPr id="22" name="TextBox 21"/>
+              <a:t>判断耗时</a:t>
+            </a:r>
+          </a:p>
+        </p:txBody>
+      </p:sp>
+      <p:sp>
+        <p:nvSpPr>
+          <p:cNvPr id="24" name="TextBox 23"/>
+          <p:cNvSpPr txBox="1"/>
+          <p:nvPr/>
+        </p:nvSpPr>
+        <p:spPr>
+          <a:xfrm>
+            <a:off x="3931920" y="4023360"/>
+            <a:ext cx="4572000" cy="384048"/>
+          </a:xfrm>
+          <a:prstGeom prst="rect">
+            <a:avLst/>
+          </a:prstGeom>
+          <a:noFill/>
+        </p:spPr>
+        <p:txBody>
+          <a:bodyPr wrap="square"/>
+          <a:lstStyle/>
+          <a:p>
+            <a:pPr algn="l"/>
+            <a:r>
+              <a:rPr sz="1600" b="0">
+                <a:solidFill>
+                  <a:srgbClr val="1C2430"/>
+                </a:solidFill>
+                <a:latin typeface="WenQuanYi Micro Hei"/>
+                <a:ea typeface="WenQuanYi Micro Hei"/>
+                <a:cs typeface="WenQuanYi Micro Hei"/>
+              </a:rPr>
+              <a:t>约 0.001 秒</a:t>
+            </a:r>
+          </a:p>
+        </p:txBody>
+      </p:sp>
+      <p:sp>
+        <p:nvSpPr>
+          <p:cNvPr id="25" name="TextBox 24"/>
+          <p:cNvSpPr txBox="1"/>
+          <p:nvPr/>
+        </p:nvSpPr>
+        <p:spPr>
+          <a:xfrm>
+            <a:off x="8686800" y="4023360"/>
+            <a:ext cx="2560320" cy="384048"/>
+          </a:xfrm>
+          <a:prstGeom prst="rect">
+            <a:avLst/>
+          </a:prstGeom>
+          <a:noFill/>
+        </p:spPr>
+        <p:txBody>
+          <a:bodyPr wrap="square"/>
+          <a:lstStyle/>
+          <a:p>
+            <a:pPr algn="l"/>
+            <a:r>
+              <a:rPr sz="1600" b="1">
+                <a:solidFill>
+                  <a:srgbClr val="A33B2B"/>
+                </a:solidFill>
+                <a:latin typeface="WenQuanYi Micro Hei"/>
+                <a:ea typeface="WenQuanYi Micro Hei"/>
+                <a:cs typeface="WenQuanYi Micro Hei"/>
+              </a:rPr>
+              <a:t>只代表规则</a:t>
+            </a:r>
+          </a:p>
+        </p:txBody>
+      </p:sp>
+      <p:sp>
+        <p:nvSpPr>
+          <p:cNvPr id="26" name="Rectangle 25"/>
+          <p:cNvSpPr/>
+          <p:nvPr/>
+        </p:nvSpPr>
+        <p:spPr>
+          <a:xfrm>
+            <a:off x="457200" y="4572000"/>
+            <a:ext cx="11247120" cy="713232"/>
+          </a:xfrm>
+          <a:prstGeom prst="rect">
+            <a:avLst/>
+          </a:prstGeom>
+          <a:solidFill>
+            <a:srgbClr val="FFFFFF"/>
+          </a:solidFill>
+          <a:ln>
+            <a:noFill/>
+          </a:ln>
+          <a:effectLst/>
+        </p:spPr>
+        <p:style>
+          <a:lnRef idx="1">
+            <a:schemeClr val="accent1"/>
+          </a:lnRef>
+          <a:fillRef idx="3">
+            <a:schemeClr val="accent1"/>
+          </a:fillRef>
+          <a:effectRef idx="2">
+            <a:schemeClr val="accent1"/>
+          </a:effectRef>
+          <a:fontRef idx="minor">
+            <a:schemeClr val="lt1"/>
+          </a:fontRef>
+        </p:style>
+        <p:txBody>
+          <a:bodyPr rtlCol="0" anchor="ctr"/>
+          <a:lstStyle/>
+          <a:p>
+            <a:pPr algn="ctr"/>
+          </a:p>
+        </p:txBody>
+      </p:sp>
+      <p:sp>
+        <p:nvSpPr>
+          <p:cNvPr id="27" name="TextBox 26"/>
+          <p:cNvSpPr txBox="1"/>
+          <p:nvPr/>
+        </p:nvSpPr>
+        <p:spPr>
+          <a:xfrm>
+            <a:off x="640080" y="4736592"/>
+            <a:ext cx="3108960" cy="384048"/>
+          </a:xfrm>
+          <a:prstGeom prst="rect">
+            <a:avLst/>
+          </a:prstGeom>
+          <a:noFill/>
+        </p:spPr>
+        <p:txBody>
+          <a:bodyPr wrap="square"/>
+          <a:lstStyle/>
+          <a:p>
+            <a:pPr algn="l"/>
+            <a:r>
+              <a:rPr sz="1600" b="1">
+                <a:solidFill>
+                  <a:srgbClr val="1C2430"/>
+                </a:solidFill>
+                <a:latin typeface="WenQuanYi Micro Hei"/>
+                <a:ea typeface="WenQuanYi Micro Hei"/>
+                <a:cs typeface="WenQuanYi Micro Hei"/>
+              </a:rPr>
+              <a:t>身体动作</a:t>
+            </a:r>
+          </a:p>
+        </p:txBody>
+      </p:sp>
+      <p:sp>
+        <p:nvSpPr>
+          <p:cNvPr id="28" name="TextBox 27"/>
+          <p:cNvSpPr txBox="1"/>
+          <p:nvPr/>
+        </p:nvSpPr>
+        <p:spPr>
+          <a:xfrm>
+            <a:off x="3931920" y="4736592"/>
+            <a:ext cx="4572000" cy="384048"/>
+          </a:xfrm>
+          <a:prstGeom prst="rect">
+            <a:avLst/>
+          </a:prstGeom>
+          <a:noFill/>
+        </p:spPr>
+        <p:txBody>
+          <a:bodyPr wrap="square"/>
+          <a:lstStyle/>
+          <a:p>
+            <a:pPr algn="l"/>
+            <a:r>
+              <a:rPr sz="1600" b="0">
+                <a:solidFill>
+                  <a:srgbClr val="1C2430"/>
+                </a:solidFill>
+                <a:latin typeface="WenQuanYi Micro Hei"/>
+                <a:ea typeface="WenQuanYi Micro Hei"/>
+                <a:cs typeface="WenQuanYi Micro Hei"/>
+              </a:rPr>
+              <a:t>播放约 2.3–8.8 秒</a:t>
+            </a:r>
+          </a:p>
+        </p:txBody>
+      </p:sp>
+      <p:sp>
+        <p:nvSpPr>
+          <p:cNvPr id="29" name="TextBox 28"/>
+          <p:cNvSpPr txBox="1"/>
+          <p:nvPr/>
+        </p:nvSpPr>
+        <p:spPr>
+          <a:xfrm>
+            <a:off x="8686800" y="4736592"/>
+            <a:ext cx="2560320" cy="384048"/>
+          </a:xfrm>
+          <a:prstGeom prst="rect">
+            <a:avLst/>
+          </a:prstGeom>
+          <a:noFill/>
+        </p:spPr>
+        <p:txBody>
+          <a:bodyPr wrap="square"/>
+          <a:lstStyle/>
+          <a:p>
+            <a:pPr algn="l"/>
+            <a:r>
+              <a:rPr sz="1600" b="1">
+                <a:solidFill>
+                  <a:srgbClr val="A33B2B"/>
+                </a:solidFill>
+                <a:latin typeface="WenQuanYi Micro Hei"/>
+                <a:ea typeface="WenQuanYi Micro Hei"/>
+                <a:cs typeface="WenQuanYi Micro Hei"/>
+              </a:rPr>
+              <a:t>是短语，不是 MoMask</a:t>
+            </a:r>
+          </a:p>
+        </p:txBody>
+      </p:sp>
+      <p:sp>
+        <p:nvSpPr>
+          <p:cNvPr id="30" name="Rectangle 29"/>
+          <p:cNvSpPr/>
+          <p:nvPr/>
+        </p:nvSpPr>
+        <p:spPr>
+          <a:xfrm>
+            <a:off x="457200" y="5285232"/>
+            <a:ext cx="11247120" cy="713232"/>
+          </a:xfrm>
+          <a:prstGeom prst="rect">
+            <a:avLst/>
+          </a:prstGeom>
+          <a:solidFill>
+            <a:srgbClr val="FBF8F4"/>
+          </a:solidFill>
+          <a:ln>
+            <a:noFill/>
+          </a:ln>
+          <a:effectLst/>
+        </p:spPr>
+        <p:style>
+          <a:lnRef idx="1">
+            <a:schemeClr val="accent1"/>
+          </a:lnRef>
+          <a:fillRef idx="3">
+            <a:schemeClr val="accent1"/>
+          </a:fillRef>
+          <a:effectRef idx="2">
+            <a:schemeClr val="accent1"/>
+          </a:effectRef>
+          <a:fontRef idx="minor">
+            <a:schemeClr val="lt1"/>
+          </a:fontRef>
+        </p:style>
+        <p:txBody>
+          <a:bodyPr rtlCol="0" anchor="ctr"/>
+          <a:lstStyle/>
+          <a:p>
+            <a:pPr algn="ctr"/>
+          </a:p>
+        </p:txBody>
+      </p:sp>
+      <p:sp>
+        <p:nvSpPr>
+          <p:cNvPr id="31" name="TextBox 30"/>
+          <p:cNvSpPr txBox="1"/>
+          <p:nvPr/>
+        </p:nvSpPr>
+        <p:spPr>
+          <a:xfrm>
+            <a:off x="640080" y="5449824"/>
+            <a:ext cx="3108960" cy="384048"/>
+          </a:xfrm>
+          <a:prstGeom prst="rect">
+            <a:avLst/>
+          </a:prstGeom>
+          <a:noFill/>
+        </p:spPr>
+        <p:txBody>
+          <a:bodyPr wrap="square"/>
+          <a:lstStyle/>
+          <a:p>
+            <a:pPr algn="l"/>
+            <a:r>
+              <a:rPr sz="1600" b="1">
+                <a:solidFill>
+                  <a:srgbClr val="1C2430"/>
+                </a:solidFill>
+                <a:latin typeface="WenQuanYi Micro Hei"/>
+                <a:ea typeface="WenQuanYi Micro Hei"/>
+                <a:cs typeface="WenQuanYi Micro Hei"/>
+              </a:rPr>
+              <a:t>MoMask 生成</a:t>
+            </a:r>
+          </a:p>
+        </p:txBody>
+      </p:sp>
+      <p:sp>
+        <p:nvSpPr>
+          <p:cNvPr id="32" name="TextBox 31"/>
+          <p:cNvSpPr txBox="1"/>
+          <p:nvPr/>
+        </p:nvSpPr>
+        <p:spPr>
+          <a:xfrm>
+            <a:off x="3931920" y="5449824"/>
+            <a:ext cx="4572000" cy="384048"/>
+          </a:xfrm>
+          <a:prstGeom prst="rect">
+            <a:avLst/>
+          </a:prstGeom>
+          <a:noFill/>
+        </p:spPr>
+        <p:txBody>
+          <a:bodyPr wrap="square"/>
+          <a:lstStyle/>
+          <a:p>
+            <a:pPr algn="l"/>
+            <a:r>
+              <a:rPr sz="1600" b="0">
+                <a:solidFill>
+                  <a:srgbClr val="1C2430"/>
+                </a:solidFill>
+                <a:latin typeface="WenQuanYi Micro Hei"/>
+                <a:ea typeface="WenQuanYi Micro Hei"/>
+                <a:cs typeface="WenQuanYi Micro Hei"/>
+              </a:rPr>
+              <a:t>这张表没有这一列</a:t>
+            </a:r>
+          </a:p>
+        </p:txBody>
+      </p:sp>
+      <p:sp>
+        <p:nvSpPr>
+          <p:cNvPr id="33" name="TextBox 32"/>
+          <p:cNvSpPr txBox="1"/>
+          <p:nvPr/>
+        </p:nvSpPr>
+        <p:spPr>
+          <a:xfrm>
+            <a:off x="8686800" y="5449824"/>
+            <a:ext cx="2560320" cy="384048"/>
+          </a:xfrm>
+          <a:prstGeom prst="rect">
+            <a:avLst/>
+          </a:prstGeom>
+          <a:noFill/>
+        </p:spPr>
+        <p:txBody>
+          <a:bodyPr wrap="square"/>
+          <a:lstStyle/>
+          <a:p>
+            <a:pPr algn="l"/>
+            <a:r>
+              <a:rPr sz="1600" b="1">
+                <a:solidFill>
+                  <a:srgbClr val="A33B2B"/>
+                </a:solidFill>
+                <a:latin typeface="WenQuanYi Micro Hei"/>
+                <a:ea typeface="WenQuanYi Micro Hei"/>
+                <a:cs typeface="WenQuanYi Micro Hei"/>
+              </a:rPr>
+              <a:t>还没测</a:t>
+            </a:r>
+          </a:p>
+        </p:txBody>
+      </p:sp>
+      <p:sp>
+        <p:nvSpPr>
+          <p:cNvPr id="34" name="TextBox 33"/>
           <p:cNvSpPr txBox="1"/>
           <p:nvPr/>
         </p:nvSpPr>
         <p:spPr>
           <a:xfrm>
             <a:off x="502920" y="6510528"/>
-            <a:ext cx="7315200" cy="256032"/>
+            <a:ext cx="8229600" cy="256032"/>
           </a:xfrm>
           <a:prstGeom prst="rect">
             <a:avLst/>
@@ -7752,14 +6974,14 @@
                 <a:ea typeface="WenQuanYi Micro Hei"/>
                 <a:cs typeface="WenQuanYi Micro Hei"/>
               </a:rPr>
-              <a:t>TonyPi 多模态情绪动作  ·  组会汇报</a:t>
-            </a:r>
-          </a:p>
-        </p:txBody>
-      </p:sp>
-      <p:sp>
-        <p:nvSpPr>
-          <p:cNvPr id="23" name="TextBox 22"/>
+              <a:t>标准路径：多模态输入 → 端侧判断 → MoMask 生成</a:t>
+            </a:r>
+          </a:p>
+        </p:txBody>
+      </p:sp>
+      <p:sp>
+        <p:nvSpPr>
+          <p:cNvPr id="35" name="TextBox 34"/>
           <p:cNvSpPr txBox="1"/>
           <p:nvPr/>
         </p:nvSpPr>
@@ -7928,65 +7150,32 @@
                 <a:ea typeface="WenQuanYi Micro Hei"/>
                 <a:cs typeface="WenQuanYi Micro Hei"/>
               </a:rPr>
-              <a:t>针对重复和碰撞已改的规则</a:t>
-            </a:r>
-          </a:p>
-        </p:txBody>
-      </p:sp>
-      <p:sp>
-        <p:nvSpPr>
-          <p:cNvPr id="5" name="TextBox 4"/>
-          <p:cNvSpPr txBox="1"/>
-          <p:nvPr/>
-        </p:nvSpPr>
-        <p:spPr>
-          <a:xfrm>
-            <a:off x="502920" y="768096"/>
-            <a:ext cx="10972800" cy="310896"/>
-          </a:xfrm>
-          <a:prstGeom prst="rect">
-            <a:avLst/>
-          </a:prstGeom>
-          <a:noFill/>
-        </p:spPr>
-        <p:txBody>
-          <a:bodyPr wrap="square"/>
-          <a:lstStyle/>
-          <a:p>
-            <a:pPr algn="l"/>
-            <a:r>
-              <a:rPr sz="1400" b="0">
-                <a:solidFill>
-                  <a:srgbClr val="5C6B73"/>
-                </a:solidFill>
-                <a:latin typeface="WenQuanYi Micro Hei"/>
-                <a:ea typeface="WenQuanYi Micro Hei"/>
-                <a:cs typeface="WenQuanYi Micro Hei"/>
-              </a:rPr>
-              <a:t>代码已写好。要在机器人上再装一次，才会体现在下一次测试里。</a:t>
-            </a:r>
-          </a:p>
-        </p:txBody>
-      </p:sp>
-      <p:sp>
-        <p:nvSpPr>
-          <p:cNvPr id="6" name="Rectangle 5"/>
+              <a:t>相对标准路径，还差什么</a:t>
+            </a:r>
+          </a:p>
+        </p:txBody>
+      </p:sp>
+      <p:sp>
+        <p:nvSpPr>
+          <p:cNvPr id="5" name="Rounded Rectangle 4"/>
           <p:cNvSpPr/>
           <p:nvPr/>
         </p:nvSpPr>
         <p:spPr>
           <a:xfrm>
-            <a:off x="502920" y="1371600"/>
-            <a:ext cx="11155680" cy="457200"/>
-          </a:xfrm>
-          <a:prstGeom prst="rect">
+            <a:off x="457200" y="1234440"/>
+            <a:ext cx="11247120" cy="1115568"/>
+          </a:xfrm>
+          <a:prstGeom prst="roundRect">
             <a:avLst/>
           </a:prstGeom>
           <a:solidFill>
-            <a:srgbClr val="1B3A4B"/>
+            <a:srgbClr val="FFFFFF"/>
           </a:solidFill>
           <a:ln>
-            <a:noFill/>
+            <a:solidFill>
+              <a:srgbClr val="E2DBD2"/>
+            </a:solidFill>
           </a:ln>
           <a:effectLst/>
         </p:spPr>
@@ -8014,93 +7203,95 @@
       </p:sp>
       <p:sp>
         <p:nvSpPr>
+          <p:cNvPr id="6" name="TextBox 5"/>
+          <p:cNvSpPr txBox="1"/>
+          <p:nvPr/>
+        </p:nvSpPr>
+        <p:spPr>
+          <a:xfrm>
+            <a:off x="685800" y="1344168"/>
+            <a:ext cx="10789920" cy="329184"/>
+          </a:xfrm>
+          <a:prstGeom prst="rect">
+            <a:avLst/>
+          </a:prstGeom>
+          <a:noFill/>
+        </p:spPr>
+        <p:txBody>
+          <a:bodyPr wrap="square"/>
+          <a:lstStyle/>
+          <a:p>
+            <a:pPr algn="l"/>
+            <a:r>
+              <a:rPr sz="1800" b="1">
+                <a:solidFill>
+                  <a:srgbClr val="1B3A4B"/>
+                </a:solidFill>
+                <a:latin typeface="WenQuanYi Micro Hei"/>
+                <a:ea typeface="WenQuanYi Micro Hei"/>
+                <a:cs typeface="WenQuanYi Micro Hei"/>
+              </a:rPr>
+              <a:t>输入差一路</a:t>
+            </a:r>
+          </a:p>
+        </p:txBody>
+      </p:sp>
+      <p:sp>
+        <p:nvSpPr>
           <p:cNvPr id="7" name="TextBox 6"/>
           <p:cNvSpPr txBox="1"/>
           <p:nvPr/>
         </p:nvSpPr>
         <p:spPr>
           <a:xfrm>
-            <a:off x="685800" y="1444752"/>
-            <a:ext cx="5029200" cy="320040"/>
-          </a:xfrm>
-          <a:prstGeom prst="rect">
-            <a:avLst/>
-          </a:prstGeom>
-          <a:noFill/>
-        </p:spPr>
-        <p:txBody>
-          <a:bodyPr wrap="square"/>
-          <a:lstStyle/>
-          <a:p>
-            <a:pPr algn="l"/>
-            <a:r>
-              <a:rPr sz="1600" b="1">
-                <a:solidFill>
-                  <a:srgbClr val="FFFFFF"/>
-                </a:solidFill>
-                <a:latin typeface="WenQuanYi Micro Hei"/>
-                <a:ea typeface="WenQuanYi Micro Hei"/>
-                <a:cs typeface="WenQuanYi Micro Hei"/>
-              </a:rPr>
-              <a:t>原来</a:t>
-            </a:r>
-          </a:p>
-        </p:txBody>
-      </p:sp>
-      <p:sp>
-        <p:nvSpPr>
-          <p:cNvPr id="8" name="TextBox 7"/>
-          <p:cNvSpPr txBox="1"/>
-          <p:nvPr/>
-        </p:nvSpPr>
-        <p:spPr>
-          <a:xfrm>
-            <a:off x="6217920" y="1444752"/>
-            <a:ext cx="5029200" cy="320040"/>
-          </a:xfrm>
-          <a:prstGeom prst="rect">
-            <a:avLst/>
-          </a:prstGeom>
-          <a:noFill/>
-        </p:spPr>
-        <p:txBody>
-          <a:bodyPr wrap="square"/>
-          <a:lstStyle/>
-          <a:p>
-            <a:pPr algn="l"/>
-            <a:r>
-              <a:rPr sz="1600" b="1">
-                <a:solidFill>
-                  <a:srgbClr val="FFFFFF"/>
-                </a:solidFill>
-                <a:latin typeface="WenQuanYi Micro Hei"/>
-                <a:ea typeface="WenQuanYi Micro Hei"/>
-                <a:cs typeface="WenQuanYi Micro Hei"/>
-              </a:rPr>
-              <a:t>现在</a:t>
-            </a:r>
-          </a:p>
-        </p:txBody>
-      </p:sp>
-      <p:sp>
-        <p:nvSpPr>
-          <p:cNvPr id="9" name="Rectangle 8"/>
+            <a:off x="685800" y="1709928"/>
+            <a:ext cx="10789920" cy="530352"/>
+          </a:xfrm>
+          <a:prstGeom prst="rect">
+            <a:avLst/>
+          </a:prstGeom>
+          <a:noFill/>
+        </p:spPr>
+        <p:txBody>
+          <a:bodyPr wrap="square"/>
+          <a:lstStyle/>
+          <a:p>
+            <a:pPr algn="l"/>
+            <a:r>
+              <a:rPr sz="1500" b="0">
+                <a:solidFill>
+                  <a:srgbClr val="1C2430"/>
+                </a:solidFill>
+                <a:latin typeface="WenQuanYi Micro Hei"/>
+                <a:ea typeface="WenQuanYi Micro Hei"/>
+                <a:cs typeface="WenQuanYi Micro Hei"/>
+              </a:rPr>
+              <a:t>视觉有了，听觉没有。多模态现在实际是单模态。语音小板要先把「小幻小幻」送进程序，表里出现 wakeup，并且录音时间大于 0。</a:t>
+            </a:r>
+          </a:p>
+        </p:txBody>
+      </p:sp>
+      <p:sp>
+        <p:nvSpPr>
+          <p:cNvPr id="8" name="Rounded Rectangle 7"/>
           <p:cNvSpPr/>
           <p:nvPr/>
         </p:nvSpPr>
         <p:spPr>
           <a:xfrm>
-            <a:off x="502920" y="1828800"/>
-            <a:ext cx="5486400" cy="868680"/>
-          </a:xfrm>
-          <a:prstGeom prst="rect">
+            <a:off x="457200" y="2468880"/>
+            <a:ext cx="11247120" cy="1115568"/>
+          </a:xfrm>
+          <a:prstGeom prst="roundRect">
             <a:avLst/>
           </a:prstGeom>
           <a:solidFill>
             <a:srgbClr val="FFFFFF"/>
           </a:solidFill>
           <a:ln>
-            <a:noFill/>
+            <a:solidFill>
+              <a:srgbClr val="E2DBD2"/>
+            </a:solidFill>
           </a:ln>
           <a:effectLst/>
         </p:spPr>
@@ -8128,23 +7319,95 @@
       </p:sp>
       <p:sp>
         <p:nvSpPr>
-          <p:cNvPr id="10" name="Rectangle 9"/>
+          <p:cNvPr id="9" name="TextBox 8"/>
+          <p:cNvSpPr txBox="1"/>
+          <p:nvPr/>
+        </p:nvSpPr>
+        <p:spPr>
+          <a:xfrm>
+            <a:off x="685800" y="2578608"/>
+            <a:ext cx="10789920" cy="329184"/>
+          </a:xfrm>
+          <a:prstGeom prst="rect">
+            <a:avLst/>
+          </a:prstGeom>
+          <a:noFill/>
+        </p:spPr>
+        <p:txBody>
+          <a:bodyPr wrap="square"/>
+          <a:lstStyle/>
+          <a:p>
+            <a:pPr algn="l"/>
+            <a:r>
+              <a:rPr sz="1800" b="1">
+                <a:solidFill>
+                  <a:srgbClr val="1B3A4B"/>
+                </a:solidFill>
+                <a:latin typeface="WenQuanYi Micro Hei"/>
+                <a:ea typeface="WenQuanYi Micro Hei"/>
+                <a:cs typeface="WenQuanYi Micro Hei"/>
+              </a:rPr>
+              <a:t>判断还不是模型</a:t>
+            </a:r>
+          </a:p>
+        </p:txBody>
+      </p:sp>
+      <p:sp>
+        <p:nvSpPr>
+          <p:cNvPr id="10" name="TextBox 9"/>
+          <p:cNvSpPr txBox="1"/>
+          <p:nvPr/>
+        </p:nvSpPr>
+        <p:spPr>
+          <a:xfrm>
+            <a:off x="685800" y="2944368"/>
+            <a:ext cx="10789920" cy="530352"/>
+          </a:xfrm>
+          <a:prstGeom prst="rect">
+            <a:avLst/>
+          </a:prstGeom>
+          <a:noFill/>
+        </p:spPr>
+        <p:txBody>
+          <a:bodyPr wrap="square"/>
+          <a:lstStyle/>
+          <a:p>
+            <a:pPr algn="l"/>
+            <a:r>
+              <a:rPr sz="1500" b="0">
+                <a:solidFill>
+                  <a:srgbClr val="1C2430"/>
+                </a:solidFill>
+                <a:latin typeface="WenQuanYi Micro Hei"/>
+                <a:ea typeface="WenQuanYi Micro Hei"/>
+                <a:cs typeface="WenQuanYi Micro Hei"/>
+              </a:rPr>
+              <a:t>权重在，运行库不在。树莓派是 aarch64，现成的 llama-cpp 轮子对不上。装上之前，不能汇报端侧模型的推理时间。</a:t>
+            </a:r>
+          </a:p>
+        </p:txBody>
+      </p:sp>
+      <p:sp>
+        <p:nvSpPr>
+          <p:cNvPr id="11" name="Rounded Rectangle 10"/>
           <p:cNvSpPr/>
           <p:nvPr/>
         </p:nvSpPr>
         <p:spPr>
           <a:xfrm>
-            <a:off x="6080760" y="1828800"/>
-            <a:ext cx="5577840" cy="868680"/>
-          </a:xfrm>
-          <a:prstGeom prst="rect">
+            <a:off x="457200" y="3703320"/>
+            <a:ext cx="11247120" cy="1115568"/>
+          </a:xfrm>
+          <a:prstGeom prst="roundRect">
             <a:avLst/>
           </a:prstGeom>
           <a:solidFill>
-            <a:srgbClr val="F3F7F4"/>
+            <a:srgbClr val="FFFFFF"/>
           </a:solidFill>
           <a:ln>
-            <a:noFill/>
+            <a:solidFill>
+              <a:srgbClr val="E2DBD2"/>
+            </a:solidFill>
           </a:ln>
           <a:effectLst/>
         </p:spPr>
@@ -8172,93 +7435,95 @@
       </p:sp>
       <p:sp>
         <p:nvSpPr>
-          <p:cNvPr id="11" name="TextBox 10"/>
-          <p:cNvSpPr txBox="1"/>
-          <p:nvPr/>
-        </p:nvSpPr>
-        <p:spPr>
-          <a:xfrm>
-            <a:off x="685800" y="2029968"/>
-            <a:ext cx="5120640" cy="502920"/>
-          </a:xfrm>
-          <a:prstGeom prst="rect">
-            <a:avLst/>
-          </a:prstGeom>
-          <a:noFill/>
-        </p:spPr>
-        <p:txBody>
-          <a:bodyPr wrap="square"/>
-          <a:lstStyle/>
-          <a:p>
-            <a:pPr algn="l"/>
-            <a:r>
-              <a:rPr sz="1600" b="0">
-                <a:solidFill>
-                  <a:srgbClr val="5C6B73"/>
-                </a:solidFill>
-                <a:latin typeface="WenQuanYi Micro Hei"/>
-                <a:ea typeface="WenQuanYi Micro Hei"/>
-                <a:cs typeface="WenQuanYi Micro Hei"/>
-              </a:rPr>
-              <a:t>只禁同名片段，禁 3 轮</a:t>
-            </a:r>
-          </a:p>
-        </p:txBody>
-      </p:sp>
-      <p:sp>
-        <p:nvSpPr>
           <p:cNvPr id="12" name="TextBox 11"/>
           <p:cNvSpPr txBox="1"/>
           <p:nvPr/>
         </p:nvSpPr>
         <p:spPr>
           <a:xfrm>
-            <a:off x="6263640" y="2029968"/>
-            <a:ext cx="5212080" cy="502920"/>
-          </a:xfrm>
-          <a:prstGeom prst="rect">
-            <a:avLst/>
-          </a:prstGeom>
-          <a:noFill/>
-        </p:spPr>
-        <p:txBody>
-          <a:bodyPr wrap="square"/>
-          <a:lstStyle/>
-          <a:p>
-            <a:pPr algn="l"/>
-            <a:r>
-              <a:rPr sz="1600" b="1">
-                <a:solidFill>
-                  <a:srgbClr val="2F6F4E"/>
-                </a:solidFill>
-                <a:latin typeface="WenQuanYi Micro Hei"/>
-                <a:ea typeface="WenQuanYi Micro Hei"/>
-                <a:cs typeface="WenQuanYi Micro Hei"/>
-              </a:rPr>
-              <a:t>同名片段禁 6 轮</a:t>
-            </a:r>
-          </a:p>
-        </p:txBody>
-      </p:sp>
-      <p:sp>
-        <p:nvSpPr>
-          <p:cNvPr id="13" name="Rectangle 12"/>
+            <a:off x="685800" y="3813048"/>
+            <a:ext cx="10789920" cy="329184"/>
+          </a:xfrm>
+          <a:prstGeom prst="rect">
+            <a:avLst/>
+          </a:prstGeom>
+          <a:noFill/>
+        </p:spPr>
+        <p:txBody>
+          <a:bodyPr wrap="square"/>
+          <a:lstStyle/>
+          <a:p>
+            <a:pPr algn="l"/>
+            <a:r>
+              <a:rPr sz="1800" b="1">
+                <a:solidFill>
+                  <a:srgbClr val="1B3A4B"/>
+                </a:solidFill>
+                <a:latin typeface="WenQuanYi Micro Hei"/>
+                <a:ea typeface="WenQuanYi Micro Hei"/>
+                <a:cs typeface="WenQuanYi Micro Hei"/>
+              </a:rPr>
+              <a:t>生成还没接到身体</a:t>
+            </a:r>
+          </a:p>
+        </p:txBody>
+      </p:sp>
+      <p:sp>
+        <p:nvSpPr>
+          <p:cNvPr id="13" name="TextBox 12"/>
+          <p:cNvSpPr txBox="1"/>
+          <p:nvPr/>
+        </p:nvSpPr>
+        <p:spPr>
+          <a:xfrm>
+            <a:off x="685800" y="4178808"/>
+            <a:ext cx="10789920" cy="530352"/>
+          </a:xfrm>
+          <a:prstGeom prst="rect">
+            <a:avLst/>
+          </a:prstGeom>
+          <a:noFill/>
+        </p:spPr>
+        <p:txBody>
+          <a:bodyPr wrap="square"/>
+          <a:lstStyle/>
+          <a:p>
+            <a:pPr algn="l"/>
+            <a:r>
+              <a:rPr sz="1500" b="0">
+                <a:solidFill>
+                  <a:srgbClr val="1C2430"/>
+                </a:solidFill>
+                <a:latin typeface="WenQuanYi Micro Hei"/>
+                <a:ea typeface="WenQuanYi Micro Hei"/>
+                <a:cs typeface="WenQuanYi Micro Hei"/>
+              </a:rPr>
+              <a:t>MoMask 可以按文字出关节，但没有从人体关节到 TonyPi 16 个舵机的实时对应。所以身体仍播工厂动作，不播生成结果。</a:t>
+            </a:r>
+          </a:p>
+        </p:txBody>
+      </p:sp>
+      <p:sp>
+        <p:nvSpPr>
+          <p:cNvPr id="14" name="Rounded Rectangle 13"/>
           <p:cNvSpPr/>
           <p:nvPr/>
         </p:nvSpPr>
         <p:spPr>
           <a:xfrm>
-            <a:off x="502920" y="2788920"/>
-            <a:ext cx="5486400" cy="868680"/>
-          </a:xfrm>
-          <a:prstGeom prst="rect">
+            <a:off x="457200" y="4937760"/>
+            <a:ext cx="11247120" cy="1115568"/>
+          </a:xfrm>
+          <a:prstGeom prst="roundRect">
             <a:avLst/>
           </a:prstGeom>
           <a:solidFill>
             <a:srgbClr val="FFFFFF"/>
           </a:solidFill>
           <a:ln>
-            <a:noFill/>
+            <a:solidFill>
+              <a:srgbClr val="E2DBD2"/>
+            </a:solidFill>
           </a:ln>
           <a:effectLst/>
         </p:spPr>
@@ -8286,71 +7551,97 @@
       </p:sp>
       <p:sp>
         <p:nvSpPr>
-          <p:cNvPr id="14" name="Rectangle 13"/>
-          <p:cNvSpPr/>
-          <p:nvPr/>
-        </p:nvSpPr>
-        <p:spPr>
-          <a:xfrm>
-            <a:off x="6080760" y="2788920"/>
-            <a:ext cx="5577840" cy="868680"/>
-          </a:xfrm>
-          <a:prstGeom prst="rect">
-            <a:avLst/>
-          </a:prstGeom>
-          <a:solidFill>
-            <a:srgbClr val="F3F7F4"/>
-          </a:solidFill>
-          <a:ln>
-            <a:noFill/>
-          </a:ln>
-          <a:effectLst/>
-        </p:spPr>
-        <p:style>
-          <a:lnRef idx="1">
-            <a:schemeClr val="accent1"/>
-          </a:lnRef>
-          <a:fillRef idx="3">
-            <a:schemeClr val="accent1"/>
-          </a:fillRef>
-          <a:effectRef idx="2">
-            <a:schemeClr val="accent1"/>
-          </a:effectRef>
-          <a:fontRef idx="minor">
-            <a:schemeClr val="lt1"/>
-          </a:fontRef>
-        </p:style>
-        <p:txBody>
-          <a:bodyPr rtlCol="0" anchor="ctr"/>
-          <a:lstStyle/>
-          <a:p>
-            <a:pPr algn="ctr"/>
-          </a:p>
-        </p:txBody>
-      </p:sp>
-      <p:sp>
-        <p:nvSpPr>
           <p:cNvPr id="15" name="TextBox 14"/>
           <p:cNvSpPr txBox="1"/>
           <p:nvPr/>
         </p:nvSpPr>
         <p:spPr>
           <a:xfrm>
-            <a:off x="685800" y="2990088"/>
-            <a:ext cx="5120640" cy="502920"/>
-          </a:xfrm>
-          <a:prstGeom prst="rect">
-            <a:avLst/>
-          </a:prstGeom>
-          <a:noFill/>
-        </p:spPr>
-        <p:txBody>
-          <a:bodyPr wrap="square"/>
-          <a:lstStyle/>
-          <a:p>
-            <a:pPr algn="l"/>
-            <a:r>
-              <a:rPr sz="1600" b="0">
+            <a:off x="685800" y="5047488"/>
+            <a:ext cx="10789920" cy="329184"/>
+          </a:xfrm>
+          <a:prstGeom prst="rect">
+            <a:avLst/>
+          </a:prstGeom>
+          <a:noFill/>
+        </p:spPr>
+        <p:txBody>
+          <a:bodyPr wrap="square"/>
+          <a:lstStyle/>
+          <a:p>
+            <a:pPr algn="l"/>
+            <a:r>
+              <a:rPr sz="1800" b="1">
+                <a:solidFill>
+                  <a:srgbClr val="1B3A4B"/>
+                </a:solidFill>
+                <a:latin typeface="WenQuanYi Micro Hei"/>
+                <a:ea typeface="WenQuanYi Micro Hei"/>
+                <a:cs typeface="WenQuanYi Micro Hei"/>
+              </a:rPr>
+              <a:t>临时出口自己的问题</a:t>
+            </a:r>
+          </a:p>
+        </p:txBody>
+      </p:sp>
+      <p:sp>
+        <p:nvSpPr>
+          <p:cNvPr id="16" name="TextBox 15"/>
+          <p:cNvSpPr txBox="1"/>
+          <p:nvPr/>
+        </p:nvSpPr>
+        <p:spPr>
+          <a:xfrm>
+            <a:off x="685800" y="5413248"/>
+            <a:ext cx="10789920" cy="530352"/>
+          </a:xfrm>
+          <a:prstGeom prst="rect">
+            <a:avLst/>
+          </a:prstGeom>
+          <a:noFill/>
+        </p:spPr>
+        <p:txBody>
+          <a:bodyPr wrap="square"/>
+          <a:lstStyle/>
+          <a:p>
+            <a:pPr algn="l"/>
+            <a:r>
+              <a:rPr sz="1500" b="0">
+                <a:solidFill>
+                  <a:srgbClr val="1C2430"/>
+                </a:solidFill>
+                <a:latin typeface="WenQuanYi Micro Hei"/>
+                <a:ea typeface="WenQuanYi Micro Hei"/>
+                <a:cs typeface="WenQuanYi Micro Hei"/>
+              </a:rPr>
+              <a:t>短语会重复同类转身，也会把举手和下蹲排在一起。这是出口质量，不是生成模型的结果。</a:t>
+            </a:r>
+          </a:p>
+        </p:txBody>
+      </p:sp>
+      <p:sp>
+        <p:nvSpPr>
+          <p:cNvPr id="17" name="TextBox 16"/>
+          <p:cNvSpPr txBox="1"/>
+          <p:nvPr/>
+        </p:nvSpPr>
+        <p:spPr>
+          <a:xfrm>
+            <a:off x="502920" y="6510528"/>
+            <a:ext cx="8229600" cy="256032"/>
+          </a:xfrm>
+          <a:prstGeom prst="rect">
+            <a:avLst/>
+          </a:prstGeom>
+          <a:noFill/>
+        </p:spPr>
+        <p:txBody>
+          <a:bodyPr wrap="square"/>
+          <a:lstStyle/>
+          <a:p>
+            <a:pPr algn="l"/>
+            <a:r>
+              <a:rPr sz="1100" b="0">
                 <a:solidFill>
                   <a:srgbClr val="5C6B73"/>
                 </a:solidFill>
@@ -8358,400 +7649,14 @@
                 <a:ea typeface="WenQuanYi Micro Hei"/>
                 <a:cs typeface="WenQuanYi Micro Hei"/>
               </a:rPr>
-              <a:t>左转、右转当成不同动作</a:t>
-            </a:r>
-          </a:p>
-        </p:txBody>
-      </p:sp>
-      <p:sp>
-        <p:nvSpPr>
-          <p:cNvPr id="16" name="TextBox 15"/>
-          <p:cNvSpPr txBox="1"/>
-          <p:nvPr/>
-        </p:nvSpPr>
-        <p:spPr>
-          <a:xfrm>
-            <a:off x="6263640" y="2990088"/>
-            <a:ext cx="5212080" cy="502920"/>
-          </a:xfrm>
-          <a:prstGeom prst="rect">
-            <a:avLst/>
-          </a:prstGeom>
-          <a:noFill/>
-        </p:spPr>
-        <p:txBody>
-          <a:bodyPr wrap="square"/>
-          <a:lstStyle/>
-          <a:p>
-            <a:pPr algn="l"/>
-            <a:r>
-              <a:rPr sz="1600" b="1">
-                <a:solidFill>
-                  <a:srgbClr val="2F6F4E"/>
-                </a:solidFill>
-                <a:latin typeface="WenQuanYi Micro Hei"/>
-                <a:ea typeface="WenQuanYi Micro Hei"/>
-                <a:cs typeface="WenQuanYi Micro Hei"/>
-              </a:rPr>
-              <a:t>所有转身算一类，接下来 4 组不再转</a:t>
-            </a:r>
-          </a:p>
-        </p:txBody>
-      </p:sp>
-      <p:sp>
-        <p:nvSpPr>
-          <p:cNvPr id="17" name="Rectangle 16"/>
-          <p:cNvSpPr/>
-          <p:nvPr/>
-        </p:nvSpPr>
-        <p:spPr>
-          <a:xfrm>
-            <a:off x="502920" y="3749040"/>
-            <a:ext cx="5486400" cy="868680"/>
-          </a:xfrm>
-          <a:prstGeom prst="rect">
-            <a:avLst/>
-          </a:prstGeom>
-          <a:solidFill>
-            <a:srgbClr val="FFFFFF"/>
-          </a:solidFill>
-          <a:ln>
-            <a:noFill/>
-          </a:ln>
-          <a:effectLst/>
-        </p:spPr>
-        <p:style>
-          <a:lnRef idx="1">
-            <a:schemeClr val="accent1"/>
-          </a:lnRef>
-          <a:fillRef idx="3">
-            <a:schemeClr val="accent1"/>
-          </a:fillRef>
-          <a:effectRef idx="2">
-            <a:schemeClr val="accent1"/>
-          </a:effectRef>
-          <a:fontRef idx="minor">
-            <a:schemeClr val="lt1"/>
-          </a:fontRef>
-        </p:style>
-        <p:txBody>
-          <a:bodyPr rtlCol="0" anchor="ctr"/>
-          <a:lstStyle/>
-          <a:p>
-            <a:pPr algn="ctr"/>
-          </a:p>
-        </p:txBody>
-      </p:sp>
-      <p:sp>
-        <p:nvSpPr>
-          <p:cNvPr id="18" name="Rectangle 17"/>
-          <p:cNvSpPr/>
-          <p:nvPr/>
-        </p:nvSpPr>
-        <p:spPr>
-          <a:xfrm>
-            <a:off x="6080760" y="3749040"/>
-            <a:ext cx="5577840" cy="868680"/>
-          </a:xfrm>
-          <a:prstGeom prst="rect">
-            <a:avLst/>
-          </a:prstGeom>
-          <a:solidFill>
-            <a:srgbClr val="F3F7F4"/>
-          </a:solidFill>
-          <a:ln>
-            <a:noFill/>
-          </a:ln>
-          <a:effectLst/>
-        </p:spPr>
-        <p:style>
-          <a:lnRef idx="1">
-            <a:schemeClr val="accent1"/>
-          </a:lnRef>
-          <a:fillRef idx="3">
-            <a:schemeClr val="accent1"/>
-          </a:fillRef>
-          <a:effectRef idx="2">
-            <a:schemeClr val="accent1"/>
-          </a:effectRef>
-          <a:fontRef idx="minor">
-            <a:schemeClr val="lt1"/>
-          </a:fontRef>
-        </p:style>
-        <p:txBody>
-          <a:bodyPr rtlCol="0" anchor="ctr"/>
-          <a:lstStyle/>
-          <a:p>
-            <a:pPr algn="ctr"/>
-          </a:p>
-        </p:txBody>
-      </p:sp>
-      <p:sp>
-        <p:nvSpPr>
-          <p:cNvPr id="19" name="TextBox 18"/>
-          <p:cNvSpPr txBox="1"/>
-          <p:nvPr/>
-        </p:nvSpPr>
-        <p:spPr>
-          <a:xfrm>
-            <a:off x="685800" y="3950208"/>
-            <a:ext cx="5120640" cy="502920"/>
-          </a:xfrm>
-          <a:prstGeom prst="rect">
-            <a:avLst/>
-          </a:prstGeom>
-          <a:noFill/>
-        </p:spPr>
-        <p:txBody>
-          <a:bodyPr wrap="square"/>
-          <a:lstStyle/>
-          <a:p>
-            <a:pPr algn="l"/>
-            <a:r>
-              <a:rPr sz="1600" b="0">
-                <a:solidFill>
-                  <a:srgbClr val="5C6B73"/>
-                </a:solidFill>
-                <a:latin typeface="WenQuanYi Micro Hei"/>
-                <a:ea typeface="WenQuanYi Micro Hei"/>
-                <a:cs typeface="WenQuanYi Micro Hei"/>
-              </a:rPr>
-              <a:t>侧步、举手、下蹲也各自可马上再来</a:t>
-            </a:r>
-          </a:p>
-        </p:txBody>
-      </p:sp>
-      <p:sp>
-        <p:nvSpPr>
-          <p:cNvPr id="20" name="TextBox 19"/>
-          <p:cNvSpPr txBox="1"/>
-          <p:nvPr/>
-        </p:nvSpPr>
-        <p:spPr>
-          <a:xfrm>
-            <a:off x="6263640" y="3950208"/>
-            <a:ext cx="5212080" cy="502920"/>
-          </a:xfrm>
-          <a:prstGeom prst="rect">
-            <a:avLst/>
-          </a:prstGeom>
-          <a:noFill/>
-        </p:spPr>
-        <p:txBody>
-          <a:bodyPr wrap="square"/>
-          <a:lstStyle/>
-          <a:p>
-            <a:pPr algn="l"/>
-            <a:r>
-              <a:rPr sz="1600" b="1">
-                <a:solidFill>
-                  <a:srgbClr val="2F6F4E"/>
-                </a:solidFill>
-                <a:latin typeface="WenQuanYi Micro Hei"/>
-                <a:ea typeface="WenQuanYi Micro Hei"/>
-                <a:cs typeface="WenQuanYi Micro Hei"/>
-              </a:rPr>
-              <a:t>侧步、前进后退、举手、鞠躬、下蹲各自成类，同样隔开</a:t>
-            </a:r>
-          </a:p>
-        </p:txBody>
-      </p:sp>
-      <p:sp>
-        <p:nvSpPr>
-          <p:cNvPr id="21" name="Rectangle 20"/>
-          <p:cNvSpPr/>
-          <p:nvPr/>
-        </p:nvSpPr>
-        <p:spPr>
-          <a:xfrm>
-            <a:off x="502920" y="4709160"/>
-            <a:ext cx="5486400" cy="868680"/>
-          </a:xfrm>
-          <a:prstGeom prst="rect">
-            <a:avLst/>
-          </a:prstGeom>
-          <a:solidFill>
-            <a:srgbClr val="FFFFFF"/>
-          </a:solidFill>
-          <a:ln>
-            <a:noFill/>
-          </a:ln>
-          <a:effectLst/>
-        </p:spPr>
-        <p:style>
-          <a:lnRef idx="1">
-            <a:schemeClr val="accent1"/>
-          </a:lnRef>
-          <a:fillRef idx="3">
-            <a:schemeClr val="accent1"/>
-          </a:fillRef>
-          <a:effectRef idx="2">
-            <a:schemeClr val="accent1"/>
-          </a:effectRef>
-          <a:fontRef idx="minor">
-            <a:schemeClr val="lt1"/>
-          </a:fontRef>
-        </p:style>
-        <p:txBody>
-          <a:bodyPr rtlCol="0" anchor="ctr"/>
-          <a:lstStyle/>
-          <a:p>
-            <a:pPr algn="ctr"/>
-          </a:p>
-        </p:txBody>
-      </p:sp>
-      <p:sp>
-        <p:nvSpPr>
-          <p:cNvPr id="22" name="Rectangle 21"/>
-          <p:cNvSpPr/>
-          <p:nvPr/>
-        </p:nvSpPr>
-        <p:spPr>
-          <a:xfrm>
-            <a:off x="6080760" y="4709160"/>
-            <a:ext cx="5577840" cy="868680"/>
-          </a:xfrm>
-          <a:prstGeom prst="rect">
-            <a:avLst/>
-          </a:prstGeom>
-          <a:solidFill>
-            <a:srgbClr val="F3F7F4"/>
-          </a:solidFill>
-          <a:ln>
-            <a:noFill/>
-          </a:ln>
-          <a:effectLst/>
-        </p:spPr>
-        <p:style>
-          <a:lnRef idx="1">
-            <a:schemeClr val="accent1"/>
-          </a:lnRef>
-          <a:fillRef idx="3">
-            <a:schemeClr val="accent1"/>
-          </a:fillRef>
-          <a:effectRef idx="2">
-            <a:schemeClr val="accent1"/>
-          </a:effectRef>
-          <a:fontRef idx="minor">
-            <a:schemeClr val="lt1"/>
-          </a:fontRef>
-        </p:style>
-        <p:txBody>
-          <a:bodyPr rtlCol="0" anchor="ctr"/>
-          <a:lstStyle/>
-          <a:p>
-            <a:pPr algn="ctr"/>
-          </a:p>
-        </p:txBody>
-      </p:sp>
-      <p:sp>
-        <p:nvSpPr>
-          <p:cNvPr id="23" name="TextBox 22"/>
-          <p:cNvSpPr txBox="1"/>
-          <p:nvPr/>
-        </p:nvSpPr>
-        <p:spPr>
-          <a:xfrm>
-            <a:off x="685800" y="4910328"/>
-            <a:ext cx="5120640" cy="502920"/>
-          </a:xfrm>
-          <a:prstGeom prst="rect">
-            <a:avLst/>
-          </a:prstGeom>
-          <a:noFill/>
-        </p:spPr>
-        <p:txBody>
-          <a:bodyPr wrap="square"/>
-          <a:lstStyle/>
-          <a:p>
-            <a:pPr algn="l"/>
-            <a:r>
-              <a:rPr sz="1600" b="0">
-                <a:solidFill>
-                  <a:srgbClr val="5C6B73"/>
-                </a:solidFill>
-                <a:latin typeface="WenQuanYi Micro Hei"/>
-                <a:ea typeface="WenQuanYi Micro Hei"/>
-                <a:cs typeface="WenQuanYi Micro Hei"/>
-              </a:rPr>
-              <a:t>举手可以接着鞠躬或下蹲</a:t>
-            </a:r>
-          </a:p>
-        </p:txBody>
-      </p:sp>
-      <p:sp>
-        <p:nvSpPr>
-          <p:cNvPr id="24" name="TextBox 23"/>
-          <p:cNvSpPr txBox="1"/>
-          <p:nvPr/>
-        </p:nvSpPr>
-        <p:spPr>
-          <a:xfrm>
-            <a:off x="6263640" y="4910328"/>
-            <a:ext cx="5212080" cy="502920"/>
-          </a:xfrm>
-          <a:prstGeom prst="rect">
-            <a:avLst/>
-          </a:prstGeom>
-          <a:noFill/>
-        </p:spPr>
-        <p:txBody>
-          <a:bodyPr wrap="square"/>
-          <a:lstStyle/>
-          <a:p>
-            <a:pPr algn="l"/>
-            <a:r>
-              <a:rPr sz="1600" b="1">
-                <a:solidFill>
-                  <a:srgbClr val="2F6F4E"/>
-                </a:solidFill>
-                <a:latin typeface="WenQuanYi Micro Hei"/>
-                <a:ea typeface="WenQuanYi Micro Hei"/>
-                <a:cs typeface="WenQuanYi Micro Hei"/>
-              </a:rPr>
-              <a:t>这两组不再放进同一条短语</a:t>
-            </a:r>
-          </a:p>
-        </p:txBody>
-      </p:sp>
-      <p:sp>
-        <p:nvSpPr>
-          <p:cNvPr id="25" name="TextBox 24"/>
-          <p:cNvSpPr txBox="1"/>
-          <p:nvPr/>
-        </p:nvSpPr>
-        <p:spPr>
-          <a:xfrm>
-            <a:off x="502920" y="6510528"/>
-            <a:ext cx="7315200" cy="256032"/>
-          </a:xfrm>
-          <a:prstGeom prst="rect">
-            <a:avLst/>
-          </a:prstGeom>
-          <a:noFill/>
-        </p:spPr>
-        <p:txBody>
-          <a:bodyPr wrap="square"/>
-          <a:lstStyle/>
-          <a:p>
-            <a:pPr algn="l"/>
-            <a:r>
-              <a:rPr sz="1100" b="0">
-                <a:solidFill>
-                  <a:srgbClr val="5C6B73"/>
-                </a:solidFill>
-                <a:latin typeface="WenQuanYi Micro Hei"/>
-                <a:ea typeface="WenQuanYi Micro Hei"/>
-                <a:cs typeface="WenQuanYi Micro Hei"/>
-              </a:rPr>
-              <a:t>TonyPi 多模态情绪动作  ·  组会汇报</a:t>
-            </a:r>
-          </a:p>
-        </p:txBody>
-      </p:sp>
-      <p:sp>
-        <p:nvSpPr>
-          <p:cNvPr id="26" name="TextBox 25"/>
+              <a:t>标准路径：多模态输入 → 端侧判断 → MoMask 生成</a:t>
+            </a:r>
+          </a:p>
+        </p:txBody>
+      </p:sp>
+      <p:sp>
+        <p:nvSpPr>
+          <p:cNvPr id="18" name="TextBox 17"/>
           <p:cNvSpPr txBox="1"/>
           <p:nvPr/>
         </p:nvSpPr>
@@ -8920,7 +7825,7 @@
                 <a:ea typeface="WenQuanYi Micro Hei"/>
                 <a:cs typeface="WenQuanYi Micro Hei"/>
               </a:rPr>
-              <a:t>下阶段计划</a:t>
+              <a:t>下阶段按这条路径往前</a:t>
             </a:r>
           </a:p>
         </p:txBody>
@@ -8955,7 +7860,7 @@
                 <a:ea typeface="WenQuanYi Micro Hei"/>
                 <a:cs typeface="WenQuanYi Micro Hei"/>
               </a:rPr>
-              <a:t>先把已经改过的规则装回机器人，再补语音。大模型排在语音之后。</a:t>
+              <a:t>顺序不要反过来：先补输入，再让判断真的是模型，然后才让 MoMask 上身。</a:t>
             </a:r>
           </a:p>
         </p:txBody>
@@ -9015,7 +7920,7 @@
         <p:spPr>
           <a:xfrm>
             <a:off x="685800" y="1572768"/>
-            <a:ext cx="548640" cy="457200"/>
+            <a:ext cx="502920" cy="457200"/>
           </a:xfrm>
           <a:prstGeom prst="rect">
             <a:avLst/>
@@ -9049,8 +7954,8 @@
         </p:nvSpPr>
         <p:spPr>
           <a:xfrm>
-            <a:off x="1371600" y="1408176"/>
-            <a:ext cx="3657600" cy="365760"/>
+            <a:off x="1371600" y="1389888"/>
+            <a:ext cx="9875520" cy="347472"/>
           </a:xfrm>
           <a:prstGeom prst="rect">
             <a:avLst/>
@@ -9071,7 +7976,7 @@
                 <a:ea typeface="WenQuanYi Micro Hei"/>
                 <a:cs typeface="WenQuanYi Micro Hei"/>
               </a:rPr>
-              <a:t>再上机验证动作</a:t>
+              <a:t>补上语音输入</a:t>
             </a:r>
           </a:p>
         </p:txBody>
@@ -9084,8 +7989,8 @@
         </p:nvSpPr>
         <p:spPr>
           <a:xfrm>
-            <a:off x="1371600" y="1783080"/>
-            <a:ext cx="9875520" cy="502920"/>
+            <a:off x="1371600" y="1773936"/>
+            <a:ext cx="9875520" cy="475488"/>
           </a:xfrm>
           <a:prstGeom prst="rect">
             <a:avLst/>
@@ -9106,7 +8011,7 @@
                 <a:ea typeface="WenQuanYi Micro Hei"/>
                 <a:cs typeface="WenQuanYi Micro Hei"/>
               </a:rPr>
-              <a:t>重新安装后连测十几轮。看表里相邻几组是否还出现同一类转身或举手。同时看手臂和下蹲是否还叠在一起。</a:t>
+              <a:t>接通唤醒。日志里要有 wakeup，录音大于 0。脸和语音一起进同一次判断。</a:t>
             </a:r>
           </a:p>
         </p:txBody>
@@ -9166,7 +8071,7 @@
         <p:spPr>
           <a:xfrm>
             <a:off x="685800" y="2779776"/>
-            <a:ext cx="548640" cy="457200"/>
+            <a:ext cx="502920" cy="457200"/>
           </a:xfrm>
           <a:prstGeom prst="rect">
             <a:avLst/>
@@ -9200,8 +8105,8 @@
         </p:nvSpPr>
         <p:spPr>
           <a:xfrm>
-            <a:off x="1371600" y="2615184"/>
-            <a:ext cx="3657600" cy="365760"/>
+            <a:off x="1371600" y="2596896"/>
+            <a:ext cx="9875520" cy="347472"/>
           </a:xfrm>
           <a:prstGeom prst="rect">
             <a:avLst/>
@@ -9222,7 +8127,7 @@
                 <a:ea typeface="WenQuanYi Micro Hei"/>
                 <a:cs typeface="WenQuanYi Micro Hei"/>
               </a:rPr>
-              <a:t>接通语音唤醒</a:t>
+              <a:t>让端侧模型真正判断</a:t>
             </a:r>
           </a:p>
         </p:txBody>
@@ -9235,8 +8140,8 @@
         </p:nvSpPr>
         <p:spPr>
           <a:xfrm>
-            <a:off x="1371600" y="2990088"/>
-            <a:ext cx="9875520" cy="502920"/>
+            <a:off x="1371600" y="2980944"/>
+            <a:ext cx="9875520" cy="475488"/>
           </a:xfrm>
           <a:prstGeom prst="rect">
             <a:avLst/>
@@ -9257,7 +8162,7 @@
                 <a:ea typeface="WenQuanYi Micro Hei"/>
                 <a:cs typeface="WenQuanYi Micro Hei"/>
               </a:rPr>
-              <a:t>确认语音小板在 /dev/ttyUSB0。说「小幻小幻」后，表里要出现一行 wakeup，并且录音时间大于 0。</a:t>
+              <a:t>在 aarch64 上装上 llama-cpp，用已有的 Qwen 权重。表里的实际决策不再是规则，并记下推理时间。</a:t>
             </a:r>
           </a:p>
         </p:txBody>
@@ -9317,7 +8222,7 @@
         <p:spPr>
           <a:xfrm>
             <a:off x="685800" y="3986784"/>
-            <a:ext cx="548640" cy="457200"/>
+            <a:ext cx="502920" cy="457200"/>
           </a:xfrm>
           <a:prstGeom prst="rect">
             <a:avLst/>
@@ -9351,8 +8256,8 @@
         </p:nvSpPr>
         <p:spPr>
           <a:xfrm>
-            <a:off x="1371600" y="3822192"/>
-            <a:ext cx="3657600" cy="365760"/>
+            <a:off x="1371600" y="3803904"/>
+            <a:ext cx="9875520" cy="347472"/>
           </a:xfrm>
           <a:prstGeom prst="rect">
             <a:avLst/>
@@ -9373,7 +8278,7 @@
                 <a:ea typeface="WenQuanYi Micro Hei"/>
                 <a:cs typeface="WenQuanYi Micro Hei"/>
               </a:rPr>
-              <a:t>再测语音识别耗时</a:t>
+              <a:t>用同一次判断跑 MoMask</a:t>
             </a:r>
           </a:p>
         </p:txBody>
@@ -9386,8 +8291,8 @@
         </p:nvSpPr>
         <p:spPr>
           <a:xfrm>
-            <a:off x="1371600" y="4197096"/>
-            <a:ext cx="9875520" cy="502920"/>
+            <a:off x="1371600" y="4187952"/>
+            <a:ext cx="9875520" cy="475488"/>
           </a:xfrm>
           <a:prstGeom prst="rect">
             <a:avLst/>
@@ -9408,7 +8313,7 @@
                 <a:ea typeface="WenQuanYi Micro Hei"/>
                 <a:cs typeface="WenQuanYi Micro Hei"/>
               </a:rPr>
-              <a:t>唤醒通了之后，才安装本地识别。现在表里没有这一列的有效数字，不能报一个识别时间。</a:t>
+              <a:t>模型写出的动作描述交给 MoMask，只生成关节文件，先不驱动舵机。把生成时间写进同一张表。</a:t>
             </a:r>
           </a:p>
         </p:txBody>
@@ -9468,7 +8373,7 @@
         <p:spPr>
           <a:xfrm>
             <a:off x="685800" y="5193792"/>
-            <a:ext cx="548640" cy="457200"/>
+            <a:ext cx="502920" cy="457200"/>
           </a:xfrm>
           <a:prstGeom prst="rect">
             <a:avLst/>
@@ -9502,8 +8407,8 @@
         </p:nvSpPr>
         <p:spPr>
           <a:xfrm>
-            <a:off x="1371600" y="5029200"/>
-            <a:ext cx="3657600" cy="365760"/>
+            <a:off x="1371600" y="5010912"/>
+            <a:ext cx="9875520" cy="347472"/>
           </a:xfrm>
           <a:prstGeom prst="rect">
             <a:avLst/>
@@ -9524,7 +8429,7 @@
                 <a:ea typeface="WenQuanYi Micro Hei"/>
                 <a:cs typeface="WenQuanYi Micro Hei"/>
               </a:rPr>
-              <a:t>端侧大模型</a:t>
+              <a:t>再考虑替换临时出口</a:t>
             </a:r>
           </a:p>
         </p:txBody>
@@ -9537,8 +8442,8 @@
         </p:nvSpPr>
         <p:spPr>
           <a:xfrm>
-            <a:off x="1371600" y="5404104"/>
-            <a:ext cx="9875520" cy="502920"/>
+            <a:off x="1371600" y="5394960"/>
+            <a:ext cx="9875520" cy="475488"/>
           </a:xfrm>
           <a:prstGeom prst="rect">
             <a:avLst/>
@@ -9559,7 +8464,7 @@
                 <a:ea typeface="WenQuanYi Micro Hei"/>
                 <a:cs typeface="WenQuanYi Micro Hei"/>
               </a:rPr>
-              <a:t>权重已经在机器人上。缺的是 aarch64 上的 llama-cpp。装上之前，决策继续用规则，不把 0.001 秒说成模型时间。</a:t>
+              <a:t>有了关节到 16 舵机的对应之后，身体才改播生成结果。在那之前，短语继续负责能看的动作，并把重复和碰撞收干净。</a:t>
             </a:r>
           </a:p>
         </p:txBody>
@@ -9573,7 +8478,7 @@
         <p:spPr>
           <a:xfrm>
             <a:off x="502920" y="6510528"/>
-            <a:ext cx="7315200" cy="256032"/>
+            <a:ext cx="8229600" cy="256032"/>
           </a:xfrm>
           <a:prstGeom prst="rect">
             <a:avLst/>
@@ -9594,7 +8499,7 @@
                 <a:ea typeface="WenQuanYi Micro Hei"/>
                 <a:cs typeface="WenQuanYi Micro Hei"/>
               </a:rPr>
-              <a:t>TonyPi 多模态情绪动作  ·  组会汇报</a:t>
+              <a:t>标准路径：多模态输入 → 端侧判断 → MoMask 生成</a:t>
             </a:r>
           </a:p>
         </p:txBody>
@@ -9770,7 +8675,7 @@
                 <a:ea typeface="WenQuanYi Micro Hei"/>
                 <a:cs typeface="WenQuanYi Micro Hei"/>
               </a:rPr>
-              <a:t>这一阶段可以怎么说</a:t>
+              <a:t>汇报时可以怎么说</a:t>
             </a:r>
           </a:p>
         </p:txBody>
@@ -9783,8 +8688,8 @@
         </p:nvSpPr>
         <p:spPr>
           <a:xfrm>
-            <a:off x="502920" y="1234440"/>
-            <a:ext cx="109728" cy="960120"/>
+            <a:off x="502920" y="1280160"/>
+            <a:ext cx="109728" cy="1005840"/>
           </a:xfrm>
           <a:prstGeom prst="rect">
             <a:avLst/>
@@ -9827,8 +8732,8 @@
         </p:nvSpPr>
         <p:spPr>
           <a:xfrm>
-            <a:off x="822960" y="1280160"/>
-            <a:ext cx="2194560" cy="365760"/>
+            <a:off x="822960" y="1536192"/>
+            <a:ext cx="2011680" cy="411480"/>
           </a:xfrm>
           <a:prstGeom prst="rect">
             <a:avLst/>
@@ -9849,7 +8754,7 @@
                 <a:ea typeface="WenQuanYi Micro Hei"/>
                 <a:cs typeface="WenQuanYi Micro Hei"/>
               </a:rPr>
-              <a:t>做成了</a:t>
+              <a:t>路径</a:t>
             </a:r>
           </a:p>
         </p:txBody>
@@ -9862,8 +8767,8 @@
         </p:nvSpPr>
         <p:spPr>
           <a:xfrm>
-            <a:off x="3108960" y="1307592"/>
-            <a:ext cx="8412480" cy="777240"/>
+            <a:off x="2926080" y="1481328"/>
+            <a:ext cx="8595360" cy="640080"/>
           </a:xfrm>
           <a:prstGeom prst="rect">
             <a:avLst/>
@@ -9884,7 +8789,7 @@
                 <a:ea typeface="WenQuanYi Micro Hei"/>
                 <a:cs typeface="WenQuanYi Micro Hei"/>
               </a:rPr>
-              <a:t>WonderPi「人脸检测」能看脸，并按四类情绪播社交动作。耗时表能分开人脸、决策和动作播放。</a:t>
+              <a:t>要做的是：多模态情绪进来，端侧模型做判断，MoMask 生成动作。</a:t>
             </a:r>
           </a:p>
         </p:txBody>
@@ -9897,8 +8802,8 @@
         </p:nvSpPr>
         <p:spPr>
           <a:xfrm>
-            <a:off x="502920" y="2377440"/>
-            <a:ext cx="109728" cy="960120"/>
+            <a:off x="502920" y="2468880"/>
+            <a:ext cx="109728" cy="1005840"/>
           </a:xfrm>
           <a:prstGeom prst="rect">
             <a:avLst/>
@@ -9941,8 +8846,8 @@
         </p:nvSpPr>
         <p:spPr>
           <a:xfrm>
-            <a:off x="822960" y="2423160"/>
-            <a:ext cx="2194560" cy="365760"/>
+            <a:off x="822960" y="2724912"/>
+            <a:ext cx="2011680" cy="411480"/>
           </a:xfrm>
           <a:prstGeom prst="rect">
             <a:avLst/>
@@ -9963,7 +8868,7 @@
                 <a:ea typeface="WenQuanYi Micro Hei"/>
                 <a:cs typeface="WenQuanYi Micro Hei"/>
               </a:rPr>
-              <a:t>还没做成</a:t>
+              <a:t>这一阶段</a:t>
             </a:r>
           </a:p>
         </p:txBody>
@@ -9976,8 +8881,8 @@
         </p:nvSpPr>
         <p:spPr>
           <a:xfrm>
-            <a:off x="3108960" y="2450592"/>
-            <a:ext cx="8412480" cy="777240"/>
+            <a:off x="2926080" y="2670048"/>
+            <a:ext cx="8595360" cy="640080"/>
           </a:xfrm>
           <a:prstGeom prst="rect">
             <a:avLst/>
@@ -9998,7 +8903,7 @@
                 <a:ea typeface="WenQuanYi Micro Hei"/>
                 <a:cs typeface="WenQuanYi Micro Hei"/>
               </a:rPr>
-              <a:t>语音唤醒没有进日志。端侧 Qwen 没有运行。MoMask 关节不驱动舵机。</a:t>
+              <a:t>视觉输入和「判断带动身体」已经在真机上看到。判断目前是规则替身，动作目前是预设短语。</a:t>
             </a:r>
           </a:p>
         </p:txBody>
@@ -10011,8 +8916,8 @@
         </p:nvSpPr>
         <p:spPr>
           <a:xfrm>
-            <a:off x="502920" y="3520440"/>
-            <a:ext cx="109728" cy="960120"/>
+            <a:off x="502920" y="3657600"/>
+            <a:ext cx="109728" cy="1005840"/>
           </a:xfrm>
           <a:prstGeom prst="rect">
             <a:avLst/>
@@ -10055,8 +8960,8 @@
         </p:nvSpPr>
         <p:spPr>
           <a:xfrm>
-            <a:off x="822960" y="3566160"/>
-            <a:ext cx="2194560" cy="365760"/>
+            <a:off x="822960" y="3913632"/>
+            <a:ext cx="2011680" cy="411480"/>
           </a:xfrm>
           <a:prstGeom prst="rect">
             <a:avLst/>
@@ -10077,7 +8982,7 @@
                 <a:ea typeface="WenQuanYi Micro Hei"/>
                 <a:cs typeface="WenQuanYi Micro Hei"/>
               </a:rPr>
-              <a:t>日志说明</a:t>
+              <a:t>不要说成完成</a:t>
             </a:r>
           </a:p>
         </p:txBody>
@@ -10090,8 +8995,8 @@
         </p:nvSpPr>
         <p:spPr>
           <a:xfrm>
-            <a:off x="3108960" y="3593592"/>
-            <a:ext cx="8412480" cy="777240"/>
+            <a:off x="2926080" y="3858768"/>
+            <a:ext cx="8595360" cy="640080"/>
           </a:xfrm>
           <a:prstGeom prst="rect">
             <a:avLst/>
@@ -10112,7 +9017,7 @@
                 <a:ea typeface="WenQuanYi Micro Hei"/>
                 <a:cs typeface="WenQuanYi Micro Hei"/>
               </a:rPr>
-              <a:t>人会感觉到的等待，主要是动作播放的 2 到 9 秒，不是识别。</a:t>
+              <a:t>不要说语音已经多模态，不要说端侧模型已经在判断，不要说机器人在播 MoMask。</a:t>
             </a:r>
           </a:p>
         </p:txBody>
@@ -10125,8 +9030,8 @@
         </p:nvSpPr>
         <p:spPr>
           <a:xfrm>
-            <a:off x="502920" y="4663440"/>
-            <a:ext cx="109728" cy="960120"/>
+            <a:off x="502920" y="4846320"/>
+            <a:ext cx="109728" cy="1005840"/>
           </a:xfrm>
           <a:prstGeom prst="rect">
             <a:avLst/>
@@ -10169,8 +9074,8 @@
         </p:nvSpPr>
         <p:spPr>
           <a:xfrm>
-            <a:off x="822960" y="4709160"/>
-            <a:ext cx="2194560" cy="365760"/>
+            <a:off x="822960" y="5102352"/>
+            <a:ext cx="2011680" cy="411480"/>
           </a:xfrm>
           <a:prstGeom prst="rect">
             <a:avLst/>
@@ -10204,8 +9109,8 @@
         </p:nvSpPr>
         <p:spPr>
           <a:xfrm>
-            <a:off x="3108960" y="4736592"/>
-            <a:ext cx="8412480" cy="777240"/>
+            <a:off x="2926080" y="5047488"/>
+            <a:ext cx="8595360" cy="640080"/>
           </a:xfrm>
           <a:prstGeom prst="rect">
             <a:avLst/>
@@ -10226,7 +9131,7 @@
                 <a:ea typeface="WenQuanYi Micro Hei"/>
                 <a:cs typeface="WenQuanYi Micro Hei"/>
               </a:rPr>
-              <a:t>先复测去重和碰撞，再让表里出现 wakeup，最后才测大模型和语音识别时间。</a:t>
+              <a:t>先让语音进表，再让表里的决策变成模型，然后记一次 MoMask 只出关节的时间。</a:t>
             </a:r>
           </a:p>
         </p:txBody>
@@ -10240,7 +9145,7 @@
         <p:spPr>
           <a:xfrm>
             <a:off x="502920" y="6510528"/>
-            <a:ext cx="7315200" cy="256032"/>
+            <a:ext cx="8229600" cy="256032"/>
           </a:xfrm>
           <a:prstGeom prst="rect">
             <a:avLst/>
@@ -10261,7 +9166,7 @@
                 <a:ea typeface="WenQuanYi Micro Hei"/>
                 <a:cs typeface="WenQuanYi Micro Hei"/>
               </a:rPr>
-              <a:t>TonyPi 多模态情绪动作  ·  组会汇报</a:t>
+              <a:t>标准路径：多模态输入 → 端侧判断 → MoMask 生成</a:t>
             </a:r>
           </a:p>
         </p:txBody>
